--- a/docs/CIB_EWS_Presentation.pptx
+++ b/docs/CIB_EWS_Presentation.pptx
@@ -6,20 +6,23 @@
   </p:sldMasterIdLst>
   <p:sldIdLst>
     <p:sldId id="256" r:id="rId7"/>
-    <p:sldId id="257" r:id="rId8"/>
-    <p:sldId id="258" r:id="rId9"/>
-    <p:sldId id="259" r:id="rId10"/>
-    <p:sldId id="260" r:id="rId11"/>
-    <p:sldId id="261" r:id="rId12"/>
-    <p:sldId id="262" r:id="rId13"/>
-    <p:sldId id="263" r:id="rId14"/>
-    <p:sldId id="264" r:id="rId15"/>
-    <p:sldId id="265" r:id="rId16"/>
-    <p:sldId id="266" r:id="rId17"/>
-    <p:sldId id="267" r:id="rId18"/>
-    <p:sldId id="268" r:id="rId19"/>
-    <p:sldId id="269" r:id="rId20"/>
-    <p:sldId id="270" r:id="rId21"/>
+    <p:sldId id="257" r:id="rId9"/>
+    <p:sldId id="258" r:id="rId10"/>
+    <p:sldId id="259" r:id="rId11"/>
+    <p:sldId id="260" r:id="rId12"/>
+    <p:sldId id="261" r:id="rId13"/>
+    <p:sldId id="262" r:id="rId14"/>
+    <p:sldId id="263" r:id="rId15"/>
+    <p:sldId id="264" r:id="rId16"/>
+    <p:sldId id="265" r:id="rId17"/>
+    <p:sldId id="266" r:id="rId18"/>
+    <p:sldId id="267" r:id="rId19"/>
+    <p:sldId id="268" r:id="rId20"/>
+    <p:sldId id="269" r:id="rId21"/>
+    <p:sldId id="270" r:id="rId22"/>
+    <p:sldId id="271" r:id="rId23"/>
+    <p:sldId id="272" r:id="rId24"/>
+    <p:sldId id="273" r:id="rId25"/>
   </p:sldIdLst>
   <p:sldSz cx="12191695" cy="6858000" type="screen4x3"/>
   <p:notesSz cx="6858000" cy="9144000"/>
@@ -119,6 +122,986 @@
     </a:lvl9pPr>
   </p:defaultTextStyle>
 </p:presentation>
+</file>
+
+<file path=ppt/notesMasters/notesMaster1.xml><?xml version="1.0" encoding="utf-8"?>
+<p:notesMaster xmlns:a="http://schemas.openxmlformats.org/drawingml/2006/main" xmlns:p="http://schemas.openxmlformats.org/presentationml/2006/main" xmlns:r="http://schemas.openxmlformats.org/officeDocument/2006/relationships">
+  <p:cSld>
+    <p:bg>
+      <p:bgRef idx="1001">
+        <a:schemeClr val="bg1"/>
+      </p:bgRef>
+    </p:bg>
+    <p:spTree>
+      <p:nvGrpSpPr>
+        <p:cNvPr id="1" name=""/>
+        <p:cNvGrpSpPr/>
+        <p:nvPr/>
+      </p:nvGrpSpPr>
+      <p:grpSpPr>
+        <a:xfrm>
+          <a:off x="0" y="0"/>
+          <a:ext cx="0" cy="0"/>
+          <a:chOff x="0" y="0"/>
+          <a:chExt cx="0" cy="0"/>
+        </a:xfrm>
+      </p:grpSpPr>
+      <p:sp>
+        <p:nvSpPr>
+          <p:cNvPr id="2" name="Header Placeholder 1"/>
+          <p:cNvSpPr>
+            <a:spLocks noGrp="1"/>
+          </p:cNvSpPr>
+          <p:nvPr>
+            <p:ph type="hdr" sz="quarter"/>
+          </p:nvPr>
+        </p:nvSpPr>
+        <p:spPr>
+          <a:xfrm>
+            <a:off x="0" y="0"/>
+            <a:ext cx="2971800" cy="457200"/>
+          </a:xfrm>
+          <a:prstGeom prst="rect">
+            <a:avLst/>
+          </a:prstGeom>
+        </p:spPr>
+        <p:txBody>
+          <a:bodyPr vert="horz" lIns="91440" tIns="45720" rIns="91440" bIns="45720" rtlCol="0"/>
+          <a:lstStyle>
+            <a:lvl1pPr algn="l">
+              <a:defRPr sz="1200"/>
+            </a:lvl1pPr>
+          </a:lstStyle>
+          <a:p>
+            <a:endParaRPr lang="en-US"/>
+          </a:p>
+        </p:txBody>
+      </p:sp>
+      <p:sp>
+        <p:nvSpPr>
+          <p:cNvPr id="3" name="Date Placeholder 2"/>
+          <p:cNvSpPr>
+            <a:spLocks noGrp="1"/>
+          </p:cNvSpPr>
+          <p:nvPr>
+            <p:ph type="dt" idx="1"/>
+          </p:nvPr>
+        </p:nvSpPr>
+        <p:spPr>
+          <a:xfrm>
+            <a:off x="3884613" y="0"/>
+            <a:ext cx="2971800" cy="457200"/>
+          </a:xfrm>
+          <a:prstGeom prst="rect">
+            <a:avLst/>
+          </a:prstGeom>
+        </p:spPr>
+        <p:txBody>
+          <a:bodyPr vert="horz" lIns="91440" tIns="45720" rIns="91440" bIns="45720" rtlCol="0"/>
+          <a:lstStyle>
+            <a:lvl1pPr algn="r">
+              <a:defRPr sz="1200"/>
+            </a:lvl1pPr>
+          </a:lstStyle>
+          <a:p>
+            <a:fld id="{0F89C1C7-3DCD-1040-A9CF-14679D8B5DDD}" type="datetimeFigureOut">
+              <a:rPr lang="en-US" smtClean="0"/>
+              <a:t>10/17/16</a:t>
+            </a:fld>
+            <a:endParaRPr lang="en-US"/>
+          </a:p>
+        </p:txBody>
+      </p:sp>
+      <p:sp>
+        <p:nvSpPr>
+          <p:cNvPr id="4" name="Slide Image Placeholder 3"/>
+          <p:cNvSpPr>
+            <a:spLocks noGrp="1" noRot="1" noChangeAspect="1"/>
+          </p:cNvSpPr>
+          <p:nvPr>
+            <p:ph type="sldImg" idx="2"/>
+          </p:nvPr>
+        </p:nvSpPr>
+        <p:spPr>
+          <a:xfrm>
+            <a:off x="1143000" y="685800"/>
+            <a:ext cx="4572000" cy="3429000"/>
+          </a:xfrm>
+          <a:prstGeom prst="rect">
+            <a:avLst/>
+          </a:prstGeom>
+          <a:noFill/>
+          <a:ln w="12700">
+            <a:solidFill>
+              <a:prstClr val="black"/>
+            </a:solidFill>
+          </a:ln>
+        </p:spPr>
+        <p:txBody>
+          <a:bodyPr vert="horz" lIns="91440" tIns="45720" rIns="91440" bIns="45720" rtlCol="0" anchor="ctr"/>
+          <a:lstStyle/>
+          <a:p>
+            <a:endParaRPr lang="en-US"/>
+          </a:p>
+        </p:txBody>
+      </p:sp>
+      <p:sp>
+        <p:nvSpPr>
+          <p:cNvPr id="5" name="Notes Placeholder 4"/>
+          <p:cNvSpPr>
+            <a:spLocks noGrp="1"/>
+          </p:cNvSpPr>
+          <p:nvPr>
+            <p:ph type="body" sz="quarter" idx="3"/>
+          </p:nvPr>
+        </p:nvSpPr>
+        <p:spPr>
+          <a:xfrm>
+            <a:off x="685800" y="4343400"/>
+            <a:ext cx="5486400" cy="4114800"/>
+          </a:xfrm>
+          <a:prstGeom prst="rect">
+            <a:avLst/>
+          </a:prstGeom>
+        </p:spPr>
+        <p:txBody>
+          <a:bodyPr vert="horz" lIns="91440" tIns="45720" rIns="91440" bIns="45720" rtlCol="0"/>
+          <a:lstStyle/>
+          <a:p>
+            <a:pPr lvl="0"/>
+            <a:r>
+              <a:rPr lang="en-US" smtClean="0"/>
+              <a:t>Click to edit Master text styles</a:t>
+            </a:r>
+          </a:p>
+          <a:p>
+            <a:pPr lvl="1"/>
+            <a:r>
+              <a:rPr lang="en-US" smtClean="0"/>
+              <a:t>Second level</a:t>
+            </a:r>
+          </a:p>
+          <a:p>
+            <a:pPr lvl="2"/>
+            <a:r>
+              <a:rPr lang="en-US" smtClean="0"/>
+              <a:t>Third level</a:t>
+            </a:r>
+          </a:p>
+          <a:p>
+            <a:pPr lvl="3"/>
+            <a:r>
+              <a:rPr lang="en-US" smtClean="0"/>
+              <a:t>Fourth level</a:t>
+            </a:r>
+          </a:p>
+          <a:p>
+            <a:pPr lvl="4"/>
+            <a:r>
+              <a:rPr lang="en-US" smtClean="0"/>
+              <a:t>Fifth level</a:t>
+            </a:r>
+            <a:endParaRPr lang="en-US"/>
+          </a:p>
+        </p:txBody>
+      </p:sp>
+      <p:sp>
+        <p:nvSpPr>
+          <p:cNvPr id="6" name="Footer Placeholder 5"/>
+          <p:cNvSpPr>
+            <a:spLocks noGrp="1"/>
+          </p:cNvSpPr>
+          <p:nvPr>
+            <p:ph type="ftr" sz="quarter" idx="4"/>
+          </p:nvPr>
+        </p:nvSpPr>
+        <p:spPr>
+          <a:xfrm>
+            <a:off x="0" y="8685213"/>
+            <a:ext cx="2971800" cy="457200"/>
+          </a:xfrm>
+          <a:prstGeom prst="rect">
+            <a:avLst/>
+          </a:prstGeom>
+        </p:spPr>
+        <p:txBody>
+          <a:bodyPr vert="horz" lIns="91440" tIns="45720" rIns="91440" bIns="45720" rtlCol="0" anchor="b"/>
+          <a:lstStyle>
+            <a:lvl1pPr algn="l">
+              <a:defRPr sz="1200"/>
+            </a:lvl1pPr>
+          </a:lstStyle>
+          <a:p>
+            <a:endParaRPr lang="en-US"/>
+          </a:p>
+        </p:txBody>
+      </p:sp>
+      <p:sp>
+        <p:nvSpPr>
+          <p:cNvPr id="7" name="Slide Number Placeholder 6"/>
+          <p:cNvSpPr>
+            <a:spLocks noGrp="1"/>
+          </p:cNvSpPr>
+          <p:nvPr>
+            <p:ph type="sldNum" sz="quarter" idx="5"/>
+          </p:nvPr>
+        </p:nvSpPr>
+        <p:spPr>
+          <a:xfrm>
+            <a:off x="3884613" y="8685213"/>
+            <a:ext cx="2971800" cy="457200"/>
+          </a:xfrm>
+          <a:prstGeom prst="rect">
+            <a:avLst/>
+          </a:prstGeom>
+        </p:spPr>
+        <p:txBody>
+          <a:bodyPr vert="horz" lIns="91440" tIns="45720" rIns="91440" bIns="45720" rtlCol="0" anchor="b"/>
+          <a:lstStyle>
+            <a:lvl1pPr algn="r">
+              <a:defRPr sz="1200"/>
+            </a:lvl1pPr>
+          </a:lstStyle>
+          <a:p>
+            <a:fld id="{BB5E49A5-4136-284D-997B-48E1D791AD67}" type="slidenum">
+              <a:rPr lang="en-US" smtClean="0"/>
+              <a:t>‹#›</a:t>
+            </a:fld>
+            <a:endParaRPr lang="en-US"/>
+          </a:p>
+        </p:txBody>
+      </p:sp>
+    </p:spTree>
+    <p:extLst>
+      <p:ext uri="{BB962C8B-B14F-4D97-AF65-F5344CB8AC3E}">
+        <p14:creationId xmlns:p14="http://schemas.microsoft.com/office/powerpoint/2010/main" val="2623252185"/>
+      </p:ext>
+    </p:extLst>
+  </p:cSld>
+  <p:clrMap bg1="lt1" tx1="dk1" bg2="lt2" tx2="dk2" accent1="accent1" accent2="accent2" accent3="accent3" accent4="accent4" accent5="accent5" accent6="accent6" hlink="hlink" folHlink="folHlink"/>
+  <p:notesStyle>
+    <a:lvl1pPr marL="0" algn="l" defTabSz="457200" rtl="0" eaLnBrk="1" latinLnBrk="0" hangingPunct="1">
+      <a:defRPr sz="1200" kern="1200">
+        <a:solidFill>
+          <a:schemeClr val="tx1"/>
+        </a:solidFill>
+        <a:latin typeface="+mn-lt"/>
+        <a:ea typeface="+mn-ea"/>
+        <a:cs typeface="+mn-cs"/>
+      </a:defRPr>
+    </a:lvl1pPr>
+    <a:lvl2pPr marL="457200" algn="l" defTabSz="457200" rtl="0" eaLnBrk="1" latinLnBrk="0" hangingPunct="1">
+      <a:defRPr sz="1200" kern="1200">
+        <a:solidFill>
+          <a:schemeClr val="tx1"/>
+        </a:solidFill>
+        <a:latin typeface="+mn-lt"/>
+        <a:ea typeface="+mn-ea"/>
+        <a:cs typeface="+mn-cs"/>
+      </a:defRPr>
+    </a:lvl2pPr>
+    <a:lvl3pPr marL="914400" algn="l" defTabSz="457200" rtl="0" eaLnBrk="1" latinLnBrk="0" hangingPunct="1">
+      <a:defRPr sz="1200" kern="1200">
+        <a:solidFill>
+          <a:schemeClr val="tx1"/>
+        </a:solidFill>
+        <a:latin typeface="+mn-lt"/>
+        <a:ea typeface="+mn-ea"/>
+        <a:cs typeface="+mn-cs"/>
+      </a:defRPr>
+    </a:lvl3pPr>
+    <a:lvl4pPr marL="1371600" algn="l" defTabSz="457200" rtl="0" eaLnBrk="1" latinLnBrk="0" hangingPunct="1">
+      <a:defRPr sz="1200" kern="1200">
+        <a:solidFill>
+          <a:schemeClr val="tx1"/>
+        </a:solidFill>
+        <a:latin typeface="+mn-lt"/>
+        <a:ea typeface="+mn-ea"/>
+        <a:cs typeface="+mn-cs"/>
+      </a:defRPr>
+    </a:lvl4pPr>
+    <a:lvl5pPr marL="1828800" algn="l" defTabSz="457200" rtl="0" eaLnBrk="1" latinLnBrk="0" hangingPunct="1">
+      <a:defRPr sz="1200" kern="1200">
+        <a:solidFill>
+          <a:schemeClr val="tx1"/>
+        </a:solidFill>
+        <a:latin typeface="+mn-lt"/>
+        <a:ea typeface="+mn-ea"/>
+        <a:cs typeface="+mn-cs"/>
+      </a:defRPr>
+    </a:lvl5pPr>
+    <a:lvl6pPr marL="2286000" algn="l" defTabSz="457200" rtl="0" eaLnBrk="1" latinLnBrk="0" hangingPunct="1">
+      <a:defRPr sz="1200" kern="1200">
+        <a:solidFill>
+          <a:schemeClr val="tx1"/>
+        </a:solidFill>
+        <a:latin typeface="+mn-lt"/>
+        <a:ea typeface="+mn-ea"/>
+        <a:cs typeface="+mn-cs"/>
+      </a:defRPr>
+    </a:lvl6pPr>
+    <a:lvl7pPr marL="2743200" algn="l" defTabSz="457200" rtl="0" eaLnBrk="1" latinLnBrk="0" hangingPunct="1">
+      <a:defRPr sz="1200" kern="1200">
+        <a:solidFill>
+          <a:schemeClr val="tx1"/>
+        </a:solidFill>
+        <a:latin typeface="+mn-lt"/>
+        <a:ea typeface="+mn-ea"/>
+        <a:cs typeface="+mn-cs"/>
+      </a:defRPr>
+    </a:lvl7pPr>
+    <a:lvl8pPr marL="3200400" algn="l" defTabSz="457200" rtl="0" eaLnBrk="1" latinLnBrk="0" hangingPunct="1">
+      <a:defRPr sz="1200" kern="1200">
+        <a:solidFill>
+          <a:schemeClr val="tx1"/>
+        </a:solidFill>
+        <a:latin typeface="+mn-lt"/>
+        <a:ea typeface="+mn-ea"/>
+        <a:cs typeface="+mn-cs"/>
+      </a:defRPr>
+    </a:lvl8pPr>
+    <a:lvl9pPr marL="3657600" algn="l" defTabSz="457200" rtl="0" eaLnBrk="1" latinLnBrk="0" hangingPunct="1">
+      <a:defRPr sz="1200" kern="1200">
+        <a:solidFill>
+          <a:schemeClr val="tx1"/>
+        </a:solidFill>
+        <a:latin typeface="+mn-lt"/>
+        <a:ea typeface="+mn-ea"/>
+        <a:cs typeface="+mn-cs"/>
+      </a:defRPr>
+    </a:lvl9pPr>
+  </p:notesStyle>
+</p:notesMaster>
+</file>
+
+<file path=ppt/notesSlides/notesSlide1.xml><?xml version="1.0" encoding="utf-8"?>
+<p:notes xmlns:a="http://schemas.openxmlformats.org/drawingml/2006/main" xmlns:p="http://schemas.openxmlformats.org/presentationml/2006/main" xmlns:r="http://schemas.openxmlformats.org/officeDocument/2006/relationships">
+  <p:cSld>
+    <p:spTree>
+      <p:nvGrpSpPr>
+        <p:cNvPr id="1" name=""/>
+        <p:cNvGrpSpPr/>
+        <p:nvPr/>
+      </p:nvGrpSpPr>
+      <p:grpSpPr>
+        <a:xfrm>
+          <a:off x="0" y="0"/>
+          <a:ext cx="0" cy="0"/>
+          <a:chOff x="0" y="0"/>
+          <a:chExt cx="0" cy="0"/>
+        </a:xfrm>
+      </p:grpSpPr>
+      <p:sp>
+        <p:nvSpPr>
+          <p:cNvPr id="2" name="Slide Image Placeholder 1"/>
+          <p:cNvSpPr>
+            <a:spLocks noGrp="1"/>
+          </p:cNvSpPr>
+          <p:nvPr>
+            <p:ph type="sldImg" idx="2"/>
+          </p:nvPr>
+        </p:nvSpPr>
+        <p:spPr/>
+      </p:sp>
+      <p:sp>
+        <p:nvSpPr>
+          <p:cNvPr id="3" name="Notes Placeholder 2"/>
+          <p:cNvSpPr>
+            <a:spLocks noGrp="1"/>
+          </p:cNvSpPr>
+          <p:nvPr>
+            <p:ph type="body" idx="3" sz="quarter"/>
+          </p:nvPr>
+        </p:nvSpPr>
+        <p:spPr/>
+        <p:txBody>
+          <a:bodyPr/>
+          <a:lstStyle/>
+          <a:p>
+            <a:r>
+              <a:t>Open by naming the real problem in one sentence before touching the deck: 'HDFC's CA customers don't close accounts when they're unhappy — they quietly move activity to a competitor while the account stays open.' Then say this is a from-scratch, end-to-end project built to demonstrate how you'd approach that as a data scientist, on synthetic data since real data isn't available outside the bank. Mention the navy/red theme is a deliberate nod to HDFC's brand, not their actual logo — shows you thought about professionalism and IP boundaries, which is itself a good signal to a bank's reviewers.</a:t>
+            </a:r>
+          </a:p>
+        </p:txBody>
+      </p:sp>
+      <p:sp>
+        <p:nvSpPr>
+          <p:cNvPr id="4" name="Slide Number Placeholder 3"/>
+          <p:cNvSpPr>
+            <a:spLocks noGrp="1"/>
+          </p:cNvSpPr>
+          <p:nvPr>
+            <p:ph type="sldNum" idx="5" sz="quarter"/>
+          </p:nvPr>
+        </p:nvSpPr>
+        <p:spPr/>
+      </p:sp>
+    </p:spTree>
+  </p:cSld>
+  <p:clrMapOvr>
+    <a:masterClrMapping/>
+  </p:clrMapOvr>
+</p:notes>
+</file>
+
+<file path=ppt/notesSlides/notesSlide2.xml><?xml version="1.0" encoding="utf-8"?>
+<p:notes xmlns:a="http://schemas.openxmlformats.org/drawingml/2006/main" xmlns:p="http://schemas.openxmlformats.org/presentationml/2006/main" xmlns:r="http://schemas.openxmlformats.org/officeDocument/2006/relationships">
+  <p:cSld>
+    <p:spTree>
+      <p:nvGrpSpPr>
+        <p:cNvPr id="1" name=""/>
+        <p:cNvGrpSpPr/>
+        <p:nvPr/>
+      </p:nvGrpSpPr>
+      <p:grpSpPr>
+        <a:xfrm>
+          <a:off x="0" y="0"/>
+          <a:ext cx="0" cy="0"/>
+          <a:chOff x="0" y="0"/>
+          <a:chExt cx="0" cy="0"/>
+        </a:xfrm>
+      </p:grpSpPr>
+      <p:sp>
+        <p:nvSpPr>
+          <p:cNvPr id="2" name="Slide Image Placeholder 1"/>
+          <p:cNvSpPr>
+            <a:spLocks noGrp="1"/>
+          </p:cNvSpPr>
+          <p:nvPr>
+            <p:ph type="sldImg" idx="2"/>
+          </p:nvPr>
+        </p:nvSpPr>
+        <p:spPr/>
+      </p:sp>
+      <p:sp>
+        <p:nvSpPr>
+          <p:cNvPr id="3" name="Notes Placeholder 2"/>
+          <p:cNvSpPr>
+            <a:spLocks noGrp="1"/>
+          </p:cNvSpPr>
+          <p:nvPr>
+            <p:ph type="body" idx="3" sz="quarter"/>
+          </p:nvPr>
+        </p:nvSpPr>
+        <p:spPr/>
+        <p:txBody>
+          <a:bodyPr/>
+          <a:lstStyle/>
+          <a:p>
+            <a:r>
+              <a:t>This is the slide to slow down on. Emphasize 'technically open' — that's the whole insight the project is built around. If asked 'why not just watch balances', that's your cue for the next slide's framing: balance is the LAST thing to move, and the whole value of an early-warning system is watching what moves BEFORE it.</a:t>
+            </a:r>
+          </a:p>
+        </p:txBody>
+      </p:sp>
+      <p:sp>
+        <p:nvSpPr>
+          <p:cNvPr id="4" name="Slide Number Placeholder 3"/>
+          <p:cNvSpPr>
+            <a:spLocks noGrp="1"/>
+          </p:cNvSpPr>
+          <p:nvPr>
+            <p:ph type="sldNum" idx="5" sz="quarter"/>
+          </p:nvPr>
+        </p:nvSpPr>
+        <p:spPr/>
+      </p:sp>
+    </p:spTree>
+  </p:cSld>
+  <p:clrMapOvr>
+    <a:masterClrMapping/>
+  </p:clrMapOvr>
+</p:notes>
+</file>
+
+<file path=ppt/notesSlides/notesSlide3.xml><?xml version="1.0" encoding="utf-8"?>
+<p:notes xmlns:a="http://schemas.openxmlformats.org/drawingml/2006/main" xmlns:p="http://schemas.openxmlformats.org/presentationml/2006/main" xmlns:r="http://schemas.openxmlformats.org/officeDocument/2006/relationships">
+  <p:cSld>
+    <p:spTree>
+      <p:nvGrpSpPr>
+        <p:cNvPr id="1" name=""/>
+        <p:cNvGrpSpPr/>
+        <p:nvPr/>
+      </p:nvGrpSpPr>
+      <p:grpSpPr>
+        <a:xfrm>
+          <a:off x="0" y="0"/>
+          <a:ext cx="0" cy="0"/>
+          <a:chOff x="0" y="0"/>
+          <a:chExt cx="0" cy="0"/>
+        </a:xfrm>
+      </p:grpSpPr>
+      <p:sp>
+        <p:nvSpPr>
+          <p:cNvPr id="2" name="Slide Image Placeholder 1"/>
+          <p:cNvSpPr>
+            <a:spLocks noGrp="1"/>
+          </p:cNvSpPr>
+          <p:nvPr>
+            <p:ph type="sldImg" idx="2"/>
+          </p:nvPr>
+        </p:nvSpPr>
+        <p:spPr/>
+      </p:sp>
+      <p:sp>
+        <p:nvSpPr>
+          <p:cNvPr id="3" name="Notes Placeholder 2"/>
+          <p:cNvSpPr>
+            <a:spLocks noGrp="1"/>
+          </p:cNvSpPr>
+          <p:nvPr>
+            <p:ph type="body" idx="3" sz="quarter"/>
+          </p:nvPr>
+        </p:nvSpPr>
+        <p:spPr/>
+        <p:txBody>
+          <a:bodyPr/>
+          <a:lstStyle/>
+          <a:p>
+            <a:r>
+              <a:t>Use this slide if the audience includes anyone non-technical (a hiring manager, an HR panelist). It's your elevator pitch — you should be able to say this paragraph from memory without looking at the slide. Everything after this slide is proving each of the three boxes actually works.</a:t>
+            </a:r>
+          </a:p>
+        </p:txBody>
+      </p:sp>
+      <p:sp>
+        <p:nvSpPr>
+          <p:cNvPr id="4" name="Slide Number Placeholder 3"/>
+          <p:cNvSpPr>
+            <a:spLocks noGrp="1"/>
+          </p:cNvSpPr>
+          <p:nvPr>
+            <p:ph type="sldNum" idx="5" sz="quarter"/>
+          </p:nvPr>
+        </p:nvSpPr>
+        <p:spPr/>
+      </p:sp>
+    </p:spTree>
+  </p:cSld>
+  <p:clrMapOvr>
+    <a:masterClrMapping/>
+  </p:clrMapOvr>
+</p:notes>
+</file>
+
+<file path=ppt/notesSlides/notesSlide4.xml><?xml version="1.0" encoding="utf-8"?>
+<p:notes xmlns:a="http://schemas.openxmlformats.org/drawingml/2006/main" xmlns:p="http://schemas.openxmlformats.org/presentationml/2006/main" xmlns:r="http://schemas.openxmlformats.org/officeDocument/2006/relationships">
+  <p:cSld>
+    <p:spTree>
+      <p:nvGrpSpPr>
+        <p:cNvPr id="1" name=""/>
+        <p:cNvGrpSpPr/>
+        <p:nvPr/>
+      </p:nvGrpSpPr>
+      <p:grpSpPr>
+        <a:xfrm>
+          <a:off x="0" y="0"/>
+          <a:ext cx="0" cy="0"/>
+          <a:chOff x="0" y="0"/>
+          <a:chExt cx="0" cy="0"/>
+        </a:xfrm>
+      </p:grpSpPr>
+      <p:sp>
+        <p:nvSpPr>
+          <p:cNvPr id="2" name="Slide Image Placeholder 1"/>
+          <p:cNvSpPr>
+            <a:spLocks noGrp="1"/>
+          </p:cNvSpPr>
+          <p:nvPr>
+            <p:ph type="sldImg" idx="2"/>
+          </p:nvPr>
+        </p:nvSpPr>
+        <p:spPr/>
+      </p:sp>
+      <p:sp>
+        <p:nvSpPr>
+          <p:cNvPr id="3" name="Notes Placeholder 2"/>
+          <p:cNvSpPr>
+            <a:spLocks noGrp="1"/>
+          </p:cNvSpPr>
+          <p:nvPr>
+            <p:ph type="body" idx="3" sz="quarter"/>
+          </p:nvPr>
+        </p:nvSpPr>
+        <p:spPr/>
+        <p:txBody>
+          <a:bodyPr/>
+          <a:lstStyle/>
+          <a:p>
+            <a:r>
+              <a:t>If asked 'why not just threshold the balance': explain that an SME's balance naturally swings more than a Large Corporate's, and quarter-end window dressing moves everyone's balance at once — ranking against same-segment, same-month peers cancels both effects out. The seasonal_false_positive row (1.7% flagged) is the proof that a naive dip-detector would have failed here.</a:t>
+            </a:r>
+          </a:p>
+        </p:txBody>
+      </p:sp>
+      <p:sp>
+        <p:nvSpPr>
+          <p:cNvPr id="4" name="Slide Number Placeholder 3"/>
+          <p:cNvSpPr>
+            <a:spLocks noGrp="1"/>
+          </p:cNvSpPr>
+          <p:nvPr>
+            <p:ph type="sldNum" idx="5" sz="quarter"/>
+          </p:nvPr>
+        </p:nvSpPr>
+        <p:spPr/>
+      </p:sp>
+    </p:spTree>
+  </p:cSld>
+  <p:clrMapOvr>
+    <a:masterClrMapping/>
+  </p:clrMapOvr>
+</p:notes>
+</file>
+
+<file path=ppt/notesSlides/notesSlide5.xml><?xml version="1.0" encoding="utf-8"?>
+<p:notes xmlns:a="http://schemas.openxmlformats.org/drawingml/2006/main" xmlns:p="http://schemas.openxmlformats.org/presentationml/2006/main" xmlns:r="http://schemas.openxmlformats.org/officeDocument/2006/relationships">
+  <p:cSld>
+    <p:spTree>
+      <p:nvGrpSpPr>
+        <p:cNvPr id="1" name=""/>
+        <p:cNvGrpSpPr/>
+        <p:nvPr/>
+      </p:nvGrpSpPr>
+      <p:grpSpPr>
+        <a:xfrm>
+          <a:off x="0" y="0"/>
+          <a:ext cx="0" cy="0"/>
+          <a:chOff x="0" y="0"/>
+          <a:chExt cx="0" cy="0"/>
+        </a:xfrm>
+      </p:grpSpPr>
+      <p:sp>
+        <p:nvSpPr>
+          <p:cNvPr id="2" name="Slide Image Placeholder 1"/>
+          <p:cNvSpPr>
+            <a:spLocks noGrp="1"/>
+          </p:cNvSpPr>
+          <p:nvPr>
+            <p:ph type="sldImg" idx="2"/>
+          </p:nvPr>
+        </p:nvSpPr>
+        <p:spPr/>
+      </p:sp>
+      <p:sp>
+        <p:nvSpPr>
+          <p:cNvPr id="3" name="Notes Placeholder 2"/>
+          <p:cNvSpPr>
+            <a:spLocks noGrp="1"/>
+          </p:cNvSpPr>
+          <p:nvPr>
+            <p:ph type="body" idx="3" sz="quarter"/>
+          </p:nvPr>
+        </p:nvSpPr>
+        <p:spPr/>
+        <p:txBody>
+          <a:bodyPr/>
+          <a:lstStyle/>
+          <a:p>
+            <a:r>
+              <a:t>The LightGBM 0.000/0.000 precision/recall row is a great interview story: it shows you don't just read the headline metric and stop — you checked a second angle (a fixed threshold) and caught something the PR-AUC alone hid. Lead with that if asked 'tell me about a time you caught your own mistake / a subtle bug'.</a:t>
+            </a:r>
+          </a:p>
+        </p:txBody>
+      </p:sp>
+      <p:sp>
+        <p:nvSpPr>
+          <p:cNvPr id="4" name="Slide Number Placeholder 3"/>
+          <p:cNvSpPr>
+            <a:spLocks noGrp="1"/>
+          </p:cNvSpPr>
+          <p:nvPr>
+            <p:ph type="sldNum" idx="5" sz="quarter"/>
+          </p:nvPr>
+        </p:nvSpPr>
+        <p:spPr/>
+      </p:sp>
+    </p:spTree>
+  </p:cSld>
+  <p:clrMapOvr>
+    <a:masterClrMapping/>
+  </p:clrMapOvr>
+</p:notes>
+</file>
+
+<file path=ppt/notesSlides/notesSlide6.xml><?xml version="1.0" encoding="utf-8"?>
+<p:notes xmlns:a="http://schemas.openxmlformats.org/drawingml/2006/main" xmlns:p="http://schemas.openxmlformats.org/presentationml/2006/main" xmlns:r="http://schemas.openxmlformats.org/officeDocument/2006/relationships">
+  <p:cSld>
+    <p:spTree>
+      <p:nvGrpSpPr>
+        <p:cNvPr id="1" name=""/>
+        <p:cNvGrpSpPr/>
+        <p:nvPr/>
+      </p:nvGrpSpPr>
+      <p:grpSpPr>
+        <a:xfrm>
+          <a:off x="0" y="0"/>
+          <a:ext cx="0" cy="0"/>
+          <a:chOff x="0" y="0"/>
+          <a:chExt cx="0" cy="0"/>
+        </a:xfrm>
+      </p:grpSpPr>
+      <p:sp>
+        <p:nvSpPr>
+          <p:cNvPr id="2" name="Slide Image Placeholder 1"/>
+          <p:cNvSpPr>
+            <a:spLocks noGrp="1"/>
+          </p:cNvSpPr>
+          <p:nvPr>
+            <p:ph type="sldImg" idx="2"/>
+          </p:nvPr>
+        </p:nvSpPr>
+        <p:spPr/>
+      </p:sp>
+      <p:sp>
+        <p:nvSpPr>
+          <p:cNvPr id="3" name="Notes Placeholder 2"/>
+          <p:cNvSpPr>
+            <a:spLocks noGrp="1"/>
+          </p:cNvSpPr>
+          <p:nvPr>
+            <p:ph type="body" idx="3" sz="quarter"/>
+          </p:nvPr>
+        </p:nvSpPr>
+        <p:spPr/>
+        <p:txBody>
+          <a:bodyPr/>
+          <a:lstStyle/>
+          <a:p>
+            <a:r>
+              <a:t>This is your best 'I check my assumptions instead of trusting a library's default' story. Cox is the textbook answer; running check_assumptions() and actually reading the output (11/24 covariates failing) before trusting the hazard ratios is the part worth narrating slowly if asked about statistical rigor.</a:t>
+            </a:r>
+          </a:p>
+        </p:txBody>
+      </p:sp>
+      <p:sp>
+        <p:nvSpPr>
+          <p:cNvPr id="4" name="Slide Number Placeholder 3"/>
+          <p:cNvSpPr>
+            <a:spLocks noGrp="1"/>
+          </p:cNvSpPr>
+          <p:nvPr>
+            <p:ph type="sldNum" idx="5" sz="quarter"/>
+          </p:nvPr>
+        </p:nvSpPr>
+        <p:spPr/>
+      </p:sp>
+    </p:spTree>
+  </p:cSld>
+  <p:clrMapOvr>
+    <a:masterClrMapping/>
+  </p:clrMapOvr>
+</p:notes>
+</file>
+
+<file path=ppt/notesSlides/notesSlide7.xml><?xml version="1.0" encoding="utf-8"?>
+<p:notes xmlns:a="http://schemas.openxmlformats.org/drawingml/2006/main" xmlns:p="http://schemas.openxmlformats.org/presentationml/2006/main" xmlns:r="http://schemas.openxmlformats.org/officeDocument/2006/relationships">
+  <p:cSld>
+    <p:spTree>
+      <p:nvGrpSpPr>
+        <p:cNvPr id="1" name=""/>
+        <p:cNvGrpSpPr/>
+        <p:nvPr/>
+      </p:nvGrpSpPr>
+      <p:grpSpPr>
+        <a:xfrm>
+          <a:off x="0" y="0"/>
+          <a:ext cx="0" cy="0"/>
+          <a:chOff x="0" y="0"/>
+          <a:chExt cx="0" cy="0"/>
+        </a:xfrm>
+      </p:grpSpPr>
+      <p:sp>
+        <p:nvSpPr>
+          <p:cNvPr id="2" name="Slide Image Placeholder 1"/>
+          <p:cNvSpPr>
+            <a:spLocks noGrp="1"/>
+          </p:cNvSpPr>
+          <p:nvPr>
+            <p:ph type="sldImg" idx="2"/>
+          </p:nvPr>
+        </p:nvSpPr>
+        <p:spPr/>
+      </p:sp>
+      <p:sp>
+        <p:nvSpPr>
+          <p:cNvPr id="3" name="Notes Placeholder 2"/>
+          <p:cNvSpPr>
+            <a:spLocks noGrp="1"/>
+          </p:cNvSpPr>
+          <p:nvPr>
+            <p:ph type="body" idx="3" sz="quarter"/>
+          </p:nvPr>
+        </p:nvSpPr>
+        <p:spPr/>
+        <p:txBody>
+          <a:bodyPr/>
+          <a:lstStyle/>
+          <a:p>
+            <a:r>
+              <a:t>Don't skip or rush this slide — a negative result you investigated and explained is a STRONGER signal of maturity than another slide of things that worked. If a reviewer asks 'what didn't work', this is the answer, and you already have the root cause (0.88-0.91 correlation) ready, not just 'it didn't help'.</a:t>
+            </a:r>
+          </a:p>
+        </p:txBody>
+      </p:sp>
+      <p:sp>
+        <p:nvSpPr>
+          <p:cNvPr id="4" name="Slide Number Placeholder 3"/>
+          <p:cNvSpPr>
+            <a:spLocks noGrp="1"/>
+          </p:cNvSpPr>
+          <p:nvPr>
+            <p:ph type="sldNum" idx="5" sz="quarter"/>
+          </p:nvPr>
+        </p:nvSpPr>
+        <p:spPr/>
+      </p:sp>
+    </p:spTree>
+  </p:cSld>
+  <p:clrMapOvr>
+    <a:masterClrMapping/>
+  </p:clrMapOvr>
+</p:notes>
+</file>
+
+<file path=ppt/notesSlides/notesSlide8.xml><?xml version="1.0" encoding="utf-8"?>
+<p:notes xmlns:a="http://schemas.openxmlformats.org/drawingml/2006/main" xmlns:p="http://schemas.openxmlformats.org/presentationml/2006/main" xmlns:r="http://schemas.openxmlformats.org/officeDocument/2006/relationships">
+  <p:cSld>
+    <p:spTree>
+      <p:nvGrpSpPr>
+        <p:cNvPr id="1" name=""/>
+        <p:cNvGrpSpPr/>
+        <p:nvPr/>
+      </p:nvGrpSpPr>
+      <p:grpSpPr>
+        <a:xfrm>
+          <a:off x="0" y="0"/>
+          <a:ext cx="0" cy="0"/>
+          <a:chOff x="0" y="0"/>
+          <a:chExt cx="0" cy="0"/>
+        </a:xfrm>
+      </p:grpSpPr>
+      <p:sp>
+        <p:nvSpPr>
+          <p:cNvPr id="2" name="Slide Image Placeholder 1"/>
+          <p:cNvSpPr>
+            <a:spLocks noGrp="1"/>
+          </p:cNvSpPr>
+          <p:nvPr>
+            <p:ph type="sldImg" idx="2"/>
+          </p:nvPr>
+        </p:nvSpPr>
+        <p:spPr/>
+      </p:sp>
+      <p:sp>
+        <p:nvSpPr>
+          <p:cNvPr id="3" name="Notes Placeholder 2"/>
+          <p:cNvSpPr>
+            <a:spLocks noGrp="1"/>
+          </p:cNvSpPr>
+          <p:nvPr>
+            <p:ph type="body" idx="3" sz="quarter"/>
+          </p:nvPr>
+        </p:nvSpPr>
+        <p:spPr/>
+        <p:txBody>
+          <a:bodyPr/>
+          <a:lstStyle/>
+          <a:p>
+            <a:r>
+              <a:t>Be careful with this slide — do not let it sound like you're claiming to know HDFC's real numbers. The point is showing you think about business impact, not just model metrics, while being explicit that the rupee figure is illustrative. If pressed, say plainly: 'I don't have HDFC's real numbers — this shows the mechanism, and I'd want the chance to run it on real data.'</a:t>
+            </a:r>
+          </a:p>
+        </p:txBody>
+      </p:sp>
+      <p:sp>
+        <p:nvSpPr>
+          <p:cNvPr id="4" name="Slide Number Placeholder 3"/>
+          <p:cNvSpPr>
+            <a:spLocks noGrp="1"/>
+          </p:cNvSpPr>
+          <p:nvPr>
+            <p:ph type="sldNum" idx="5" sz="quarter"/>
+          </p:nvPr>
+        </p:nvSpPr>
+        <p:spPr/>
+      </p:sp>
+    </p:spTree>
+  </p:cSld>
+  <p:clrMapOvr>
+    <a:masterClrMapping/>
+  </p:clrMapOvr>
+</p:notes>
+</file>
+
+<file path=ppt/notesSlides/notesSlide9.xml><?xml version="1.0" encoding="utf-8"?>
+<p:notes xmlns:a="http://schemas.openxmlformats.org/drawingml/2006/main" xmlns:p="http://schemas.openxmlformats.org/presentationml/2006/main" xmlns:r="http://schemas.openxmlformats.org/officeDocument/2006/relationships">
+  <p:cSld>
+    <p:spTree>
+      <p:nvGrpSpPr>
+        <p:cNvPr id="1" name=""/>
+        <p:cNvGrpSpPr/>
+        <p:nvPr/>
+      </p:nvGrpSpPr>
+      <p:grpSpPr>
+        <a:xfrm>
+          <a:off x="0" y="0"/>
+          <a:ext cx="0" cy="0"/>
+          <a:chOff x="0" y="0"/>
+          <a:chExt cx="0" cy="0"/>
+        </a:xfrm>
+      </p:grpSpPr>
+      <p:sp>
+        <p:nvSpPr>
+          <p:cNvPr id="2" name="Slide Image Placeholder 1"/>
+          <p:cNvSpPr>
+            <a:spLocks noGrp="1"/>
+          </p:cNvSpPr>
+          <p:nvPr>
+            <p:ph type="sldImg" idx="2"/>
+          </p:nvPr>
+        </p:nvSpPr>
+        <p:spPr/>
+      </p:sp>
+      <p:sp>
+        <p:nvSpPr>
+          <p:cNvPr id="3" name="Notes Placeholder 2"/>
+          <p:cNvSpPr>
+            <a:spLocks noGrp="1"/>
+          </p:cNvSpPr>
+          <p:nvPr>
+            <p:ph type="body" idx="3" sz="quarter"/>
+          </p:nvPr>
+        </p:nvSpPr>
+        <p:spPr/>
+        <p:txBody>
+          <a:bodyPr/>
+          <a:lstStyle/>
+          <a:p>
+            <a:r>
+              <a:t>This slide is deliberately about what you'd do NEXT, not more of what's already done — use it to show self-awareness of the project's edges and genuine ideas for extending it, which is exactly what an internship interviewer wants to see: can this person keep improving something after the first version ships, not just finish an assignment.</a:t>
+            </a:r>
+          </a:p>
+        </p:txBody>
+      </p:sp>
+      <p:sp>
+        <p:nvSpPr>
+          <p:cNvPr id="4" name="Slide Number Placeholder 3"/>
+          <p:cNvSpPr>
+            <a:spLocks noGrp="1"/>
+          </p:cNvSpPr>
+          <p:nvPr>
+            <p:ph type="sldNum" idx="5" sz="quarter"/>
+          </p:nvPr>
+        </p:nvSpPr>
+        <p:spPr/>
+      </p:sp>
+    </p:spTree>
+  </p:cSld>
+  <p:clrMapOvr>
+    <a:masterClrMapping/>
+  </p:clrMapOvr>
+</p:notes>
 </file>
 
 <file path=ppt/slideLayouts/slideLayout1.xml><?xml version="1.0" encoding="utf-8"?>
@@ -3117,7 +4100,7 @@
             <a:avLst/>
           </a:prstGeom>
           <a:solidFill>
-            <a:srgbClr val="0F172A"/>
+            <a:srgbClr val="0B2447"/>
           </a:solidFill>
           <a:ln>
             <a:noFill/>
@@ -3161,7 +4144,7 @@
             <a:avLst/>
           </a:prstGeom>
           <a:solidFill>
-            <a:srgbClr val="EA580C"/>
+            <a:srgbClr val="E4002B"/>
           </a:solidFill>
           <a:ln>
             <a:noFill/>
@@ -3192,7 +4175,7 @@
       </p:sp>
       <p:sp>
         <p:nvSpPr>
-          <p:cNvPr id="4" name="Rounded Rectangle 3"/>
+          <p:cNvPr id="4" name="Oval 3"/>
           <p:cNvSpPr/>
           <p:nvPr/>
         </p:nvSpPr>
@@ -3201,14 +4184,16 @@
             <a:off x="5367528" y="1051560"/>
             <a:ext cx="1463040" cy="1463040"/>
           </a:xfrm>
-          <a:prstGeom prst="roundRect">
+          <a:prstGeom prst="ellipse">
             <a:avLst/>
           </a:prstGeom>
           <a:solidFill>
             <a:srgbClr val="FFFFFF"/>
           </a:solidFill>
-          <a:ln>
-            <a:noFill/>
+          <a:ln w="31750">
+            <a:solidFill>
+              <a:srgbClr val="E4002B"/>
+            </a:solidFill>
           </a:ln>
           <a:effectLst/>
         </p:spPr>
@@ -3234,7 +4219,7 @@
             <a:r>
               <a:rPr sz="4400" b="0" i="0">
                 <a:solidFill>
-                  <a:srgbClr val="155E75"/>
+                  <a:srgbClr val="E4002B"/>
                 </a:solidFill>
                 <a:latin typeface="Calibri"/>
               </a:rPr>
@@ -3339,7 +4324,7 @@
             <a:r>
               <a:rPr sz="1300" b="0" i="0">
                 <a:solidFill>
-                  <a:srgbClr val="7DD3FC"/>
+                  <a:srgbClr val="FFC1CC"/>
                 </a:solidFill>
                 <a:latin typeface="Calibri"/>
               </a:rPr>
@@ -3460,7 +4445,7 @@
             <a:avLst/>
           </a:prstGeom>
           <a:solidFill>
-            <a:srgbClr val="0F172A"/>
+            <a:srgbClr val="0B2447"/>
           </a:solidFill>
           <a:ln>
             <a:noFill/>
@@ -3504,7 +4489,7 @@
             <a:avLst/>
           </a:prstGeom>
           <a:solidFill>
-            <a:srgbClr val="EA580C"/>
+            <a:srgbClr val="E4002B"/>
           </a:solidFill>
           <a:ln>
             <a:noFill/>
@@ -3558,11 +4543,11 @@
             <a:r>
               <a:rPr sz="1200" b="1" i="0">
                 <a:solidFill>
-                  <a:srgbClr val="7DD3FC"/>
-                </a:solidFill>
-                <a:latin typeface="Calibri"/>
-              </a:rPr>
-              <a:t>PHASE 6 — PFAR (PROBABILITY-WEIGHTED FUNDS AT RISK)</a:t>
+                  <a:srgbClr val="FFC1CC"/>
+                </a:solidFill>
+                <a:latin typeface="Calibri"/>
+              </a:rPr>
+              <a:t>PHASE 5 — FROM A SCORE TO A STORY</a:t>
             </a:r>
           </a:p>
           <a:p>
@@ -3573,7 +4558,7 @@
                 </a:solidFill>
                 <a:latin typeface="Calibri"/>
               </a:rPr>
-              <a:t>Risk Sizing &amp; Recommended Actions</a:t>
+              <a:t>Explainability — SHAP Reason Codes</a:t>
             </a:r>
           </a:p>
         </p:txBody>
@@ -3586,8 +4571,381 @@
         </p:nvSpPr>
         <p:spPr>
           <a:xfrm>
-            <a:off x="777240" y="1417320"/>
-            <a:ext cx="10607040" cy="640080"/>
+            <a:off x="640080" y="1371600"/>
+            <a:ext cx="10881360" cy="2011680"/>
+          </a:xfrm>
+          <a:prstGeom prst="rect">
+            <a:avLst/>
+          </a:prstGeom>
+          <a:noFill/>
+        </p:spPr>
+        <p:txBody>
+          <a:bodyPr wrap="square">
+            <a:spAutoFit/>
+          </a:bodyPr>
+          <a:lstStyle/>
+          <a:p>
+            <a:pPr>
+              <a:spcBef>
+                <a:spcPts val="1000"/>
+              </a:spcBef>
+            </a:pPr>
+            <a:r>
+              <a:rPr sz="1700" b="0" i="0">
+                <a:solidFill>
+                  <a:srgbClr val="0B2447"/>
+                </a:solidFill>
+                <a:latin typeface="Calibri"/>
+              </a:rPr>
+              <a:t>•  SHAP TreeExplainer computes PER-CUSTOMER attributions — not just global feature importance</a:t>
+            </a:r>
+          </a:p>
+          <a:p>
+            <a:pPr>
+              <a:spcBef>
+                <a:spcPts val="1000"/>
+              </a:spcBef>
+            </a:pPr>
+            <a:r>
+              <a:rPr sz="1700" b="0" i="0">
+                <a:solidFill>
+                  <a:srgbClr val="0B2447"/>
+                </a:solidFill>
+                <a:latin typeface="Calibri"/>
+              </a:rPr>
+              <a:t>•  Raw features grouped into plain-language driver labels BEFORE ranking (3 distinct stories, not 1 story 3 times)</a:t>
+            </a:r>
+          </a:p>
+          <a:p>
+            <a:pPr>
+              <a:spcBef>
+                <a:spcPts val="1000"/>
+              </a:spcBef>
+            </a:pPr>
+            <a:r>
+              <a:rPr sz="1700" b="0" i="0">
+                <a:solidFill>
+                  <a:srgbClr val="0B2447"/>
+                </a:solidFill>
+                <a:latin typeface="Calibri"/>
+              </a:rPr>
+              <a:t>•  Ranked by signed SHAP sum, not magnitude — a protective factor never crowds out the actual risk drivers</a:t>
+            </a:r>
+          </a:p>
+        </p:txBody>
+      </p:sp>
+      <p:graphicFrame>
+        <p:nvGraphicFramePr>
+          <p:cNvPr id="7" name="Table 6"/>
+          <p:cNvGraphicFramePr>
+            <a:graphicFrameLocks noGrp="1"/>
+          </p:cNvGraphicFramePr>
+          <p:nvPr/>
+        </p:nvGraphicFramePr>
+        <p:xfrm>
+          <a:off x="640080" y="3566160"/>
+          <a:ext cx="10881360" cy="1828800"/>
+        </p:xfrm>
+        <a:graphic>
+          <a:graphicData uri="http://schemas.openxmlformats.org/drawingml/2006/table">
+            <a:tbl>
+              <a:tblPr firstRow="1" bandRow="1">
+                <a:tableStyleId>{5C22544A-7EE6-4342-B048-85BDC9FD1C3A}</a:tableStyleId>
+              </a:tblPr>
+              <a:tblGrid>
+                <a:gridCol w="1188720"/>
+                <a:gridCol w="1188720"/>
+                <a:gridCol w="8503920"/>
+              </a:tblGrid>
+              <a:tr h="457200">
+                <a:tc>
+                  <a:txBody>
+                    <a:bodyPr/>
+                    <a:lstStyle/>
+                    <a:p>
+                      <a:pPr algn="l"/>
+                      <a:r>
+                        <a:rPr sz="1400" b="1" i="0">
+                          <a:solidFill>
+                            <a:srgbClr val="FFFFFF"/>
+                          </a:solidFill>
+                          <a:latin typeface="Calibri"/>
+                        </a:rPr>
+                        <a:t>Risk</a:t>
+                      </a:r>
+                    </a:p>
+                  </a:txBody>
+                  <a:tcPr>
+                    <a:solidFill>
+                      <a:srgbClr val="0B2447"/>
+                    </a:solidFill>
+                  </a:tcPr>
+                </a:tc>
+                <a:tc>
+                  <a:txBody>
+                    <a:bodyPr/>
+                    <a:lstStyle/>
+                    <a:p>
+                      <a:pPr algn="l"/>
+                      <a:r>
+                        <a:rPr sz="1400" b="1" i="0">
+                          <a:solidFill>
+                            <a:srgbClr val="FFFFFF"/>
+                          </a:solidFill>
+                          <a:latin typeface="Calibri"/>
+                        </a:rPr>
+                        <a:t>90d score</a:t>
+                      </a:r>
+                    </a:p>
+                  </a:txBody>
+                  <a:tcPr>
+                    <a:solidFill>
+                      <a:srgbClr val="0B2447"/>
+                    </a:solidFill>
+                  </a:tcPr>
+                </a:tc>
+                <a:tc>
+                  <a:txBody>
+                    <a:bodyPr/>
+                    <a:lstStyle/>
+                    <a:p>
+                      <a:pPr algn="l"/>
+                      <a:r>
+                        <a:rPr sz="1400" b="1" i="0">
+                          <a:solidFill>
+                            <a:srgbClr val="FFFFFF"/>
+                          </a:solidFill>
+                          <a:latin typeface="Calibri"/>
+                        </a:rPr>
+                        <a:t>Top 3 reason codes</a:t>
+                      </a:r>
+                    </a:p>
+                  </a:txBody>
+                  <a:tcPr>
+                    <a:solidFill>
+                      <a:srgbClr val="0B2447"/>
+                    </a:solidFill>
+                  </a:tcPr>
+                </a:tc>
+              </a:tr>
+              <a:tr h="457200">
+                <a:tc>
+                  <a:txBody>
+                    <a:bodyPr/>
+                    <a:lstStyle/>
+                    <a:p>
+                      <a:r>
+                        <a:rPr sz="1400" b="1" i="0">
+                          <a:solidFill>
+                            <a:srgbClr val="0B2447"/>
+                          </a:solidFill>
+                          <a:latin typeface="Calibri"/>
+                        </a:rPr>
+                        <a:t>High</a:t>
+                      </a:r>
+                    </a:p>
+                  </a:txBody>
+                  <a:tcPr>
+                    <a:solidFill>
+                      <a:srgbClr val="FFFFFF"/>
+                    </a:solidFill>
+                  </a:tcPr>
+                </a:tc>
+                <a:tc>
+                  <a:txBody>
+                    <a:bodyPr/>
+                    <a:lstStyle/>
+                    <a:p>
+                      <a:r>
+                        <a:rPr sz="1400" b="0" i="0">
+                          <a:solidFill>
+                            <a:srgbClr val="0B2447"/>
+                          </a:solidFill>
+                          <a:latin typeface="Calibri"/>
+                        </a:rPr>
+                        <a:t>1.00</a:t>
+                      </a:r>
+                    </a:p>
+                  </a:txBody>
+                  <a:tcPr>
+                    <a:solidFill>
+                      <a:srgbClr val="FFFFFF"/>
+                    </a:solidFill>
+                  </a:tcPr>
+                </a:tc>
+                <a:tc>
+                  <a:txBody>
+                    <a:bodyPr/>
+                    <a:lstStyle/>
+                    <a:p>
+                      <a:r>
+                        <a:rPr sz="1400" b="0" i="0">
+                          <a:solidFill>
+                            <a:srgbClr val="0B2447"/>
+                          </a:solidFill>
+                          <a:latin typeface="Calibri"/>
+                        </a:rPr>
+                        <a:t>Falling balances → Lower digital activity → Reduced payroll activity</a:t>
+                      </a:r>
+                    </a:p>
+                  </a:txBody>
+                  <a:tcPr>
+                    <a:solidFill>
+                      <a:srgbClr val="FFFFFF"/>
+                    </a:solidFill>
+                  </a:tcPr>
+                </a:tc>
+              </a:tr>
+              <a:tr h="457200">
+                <a:tc>
+                  <a:txBody>
+                    <a:bodyPr/>
+                    <a:lstStyle/>
+                    <a:p>
+                      <a:r>
+                        <a:rPr sz="1400" b="1" i="0">
+                          <a:solidFill>
+                            <a:srgbClr val="0B2447"/>
+                          </a:solidFill>
+                          <a:latin typeface="Calibri"/>
+                        </a:rPr>
+                        <a:t>Medium</a:t>
+                      </a:r>
+                    </a:p>
+                  </a:txBody>
+                  <a:tcPr>
+                    <a:solidFill>
+                      <a:srgbClr val="F1F5F9"/>
+                    </a:solidFill>
+                  </a:tcPr>
+                </a:tc>
+                <a:tc>
+                  <a:txBody>
+                    <a:bodyPr/>
+                    <a:lstStyle/>
+                    <a:p>
+                      <a:r>
+                        <a:rPr sz="1400" b="0" i="0">
+                          <a:solidFill>
+                            <a:srgbClr val="0B2447"/>
+                          </a:solidFill>
+                          <a:latin typeface="Calibri"/>
+                        </a:rPr>
+                        <a:t>0.50</a:t>
+                      </a:r>
+                    </a:p>
+                  </a:txBody>
+                  <a:tcPr>
+                    <a:solidFill>
+                      <a:srgbClr val="F1F5F9"/>
+                    </a:solidFill>
+                  </a:tcPr>
+                </a:tc>
+                <a:tc>
+                  <a:txBody>
+                    <a:bodyPr/>
+                    <a:lstStyle/>
+                    <a:p>
+                      <a:r>
+                        <a:rPr sz="1400" b="0" i="0">
+                          <a:solidFill>
+                            <a:srgbClr val="0B2447"/>
+                          </a:solidFill>
+                          <a:latin typeface="Calibri"/>
+                        </a:rPr>
+                        <a:t>Declining credits → Concentrating counterparties → Declining transactions</a:t>
+                      </a:r>
+                    </a:p>
+                  </a:txBody>
+                  <a:tcPr>
+                    <a:solidFill>
+                      <a:srgbClr val="F1F5F9"/>
+                    </a:solidFill>
+                  </a:tcPr>
+                </a:tc>
+              </a:tr>
+              <a:tr h="457200">
+                <a:tc>
+                  <a:txBody>
+                    <a:bodyPr/>
+                    <a:lstStyle/>
+                    <a:p>
+                      <a:r>
+                        <a:rPr sz="1400" b="1" i="0">
+                          <a:solidFill>
+                            <a:srgbClr val="0B2447"/>
+                          </a:solidFill>
+                          <a:latin typeface="Calibri"/>
+                        </a:rPr>
+                        <a:t>Low</a:t>
+                      </a:r>
+                    </a:p>
+                  </a:txBody>
+                  <a:tcPr>
+                    <a:solidFill>
+                      <a:srgbClr val="FFFFFF"/>
+                    </a:solidFill>
+                  </a:tcPr>
+                </a:tc>
+                <a:tc>
+                  <a:txBody>
+                    <a:bodyPr/>
+                    <a:lstStyle/>
+                    <a:p>
+                      <a:r>
+                        <a:rPr sz="1400" b="0" i="0">
+                          <a:solidFill>
+                            <a:srgbClr val="0B2447"/>
+                          </a:solidFill>
+                          <a:latin typeface="Calibri"/>
+                        </a:rPr>
+                        <a:t>0.00</a:t>
+                      </a:r>
+                    </a:p>
+                  </a:txBody>
+                  <a:tcPr>
+                    <a:solidFill>
+                      <a:srgbClr val="FFFFFF"/>
+                    </a:solidFill>
+                  </a:tcPr>
+                </a:tc>
+                <a:tc>
+                  <a:txBody>
+                    <a:bodyPr/>
+                    <a:lstStyle/>
+                    <a:p>
+                      <a:r>
+                        <a:rPr sz="1400" b="0" i="0">
+                          <a:solidFill>
+                            <a:srgbClr val="0B2447"/>
+                          </a:solidFill>
+                          <a:latin typeface="Calibri"/>
+                        </a:rPr>
+                        <a:t>Narrowing product relationship → Rising complaints → Concentrating counterparties</a:t>
+                      </a:r>
+                    </a:p>
+                  </a:txBody>
+                  <a:tcPr>
+                    <a:solidFill>
+                      <a:srgbClr val="FFFFFF"/>
+                    </a:solidFill>
+                  </a:tcPr>
+                </a:tc>
+              </a:tr>
+            </a:tbl>
+          </a:graphicData>
+        </a:graphic>
+      </p:graphicFrame>
+      <p:sp>
+        <p:nvSpPr>
+          <p:cNvPr id="8" name="TextBox 7"/>
+          <p:cNvSpPr txBox="1"/>
+          <p:nvPr/>
+        </p:nvSpPr>
+        <p:spPr>
+          <a:xfrm>
+            <a:off x="457200" y="6537960"/>
+            <a:ext cx="8229600" cy="274320"/>
           </a:xfrm>
           <a:prstGeom prst="rect">
             <a:avLst/>
@@ -3600,11 +4958,275 @@
           </a:bodyPr>
           <a:lstStyle/>
           <a:p>
+            <a:r>
+              <a:rPr sz="900" b="0" i="0">
+                <a:solidFill>
+                  <a:srgbClr val="64748B"/>
+                </a:solidFill>
+                <a:latin typeface="Calibri"/>
+              </a:rPr>
+              <a:t>CIB Early Warning System  •  Agastya Sharma  •  github.com/agastyasharma20/cib-ews</a:t>
+            </a:r>
+          </a:p>
+        </p:txBody>
+      </p:sp>
+      <p:sp>
+        <p:nvSpPr>
+          <p:cNvPr id="9" name="TextBox 8"/>
+          <p:cNvSpPr txBox="1"/>
+          <p:nvPr/>
+        </p:nvSpPr>
+        <p:spPr>
+          <a:xfrm>
+            <a:off x="11247120" y="6537960"/>
+            <a:ext cx="548640" cy="274320"/>
+          </a:xfrm>
+          <a:prstGeom prst="rect">
+            <a:avLst/>
+          </a:prstGeom>
+          <a:noFill/>
+        </p:spPr>
+        <p:txBody>
+          <a:bodyPr wrap="none">
+            <a:spAutoFit/>
+          </a:bodyPr>
+          <a:lstStyle/>
+          <a:p>
+            <a:pPr algn="r"/>
+            <a:r>
+              <a:rPr sz="900" b="0" i="0">
+                <a:solidFill>
+                  <a:srgbClr val="64748B"/>
+                </a:solidFill>
+                <a:latin typeface="Calibri"/>
+              </a:rPr>
+              <a:t>10</a:t>
+            </a:r>
+          </a:p>
+        </p:txBody>
+      </p:sp>
+    </p:spTree>
+  </p:cSld>
+  <p:clrMapOvr>
+    <a:masterClrMapping/>
+  </p:clrMapOvr>
+</p:sld>
+</file>
+
+<file path=ppt/slides/slide11.xml><?xml version="1.0" encoding="utf-8"?>
+<p:sld xmlns:a="http://schemas.openxmlformats.org/drawingml/2006/main" xmlns:p="http://schemas.openxmlformats.org/presentationml/2006/main" xmlns:r="http://schemas.openxmlformats.org/officeDocument/2006/relationships">
+  <p:cSld>
+    <p:spTree>
+      <p:nvGrpSpPr>
+        <p:cNvPr id="1" name=""/>
+        <p:cNvGrpSpPr/>
+        <p:nvPr/>
+      </p:nvGrpSpPr>
+      <p:grpSpPr/>
+      <p:sp>
+        <p:nvSpPr>
+          <p:cNvPr id="2" name="Rectangle 1"/>
+          <p:cNvSpPr/>
+          <p:nvPr/>
+        </p:nvSpPr>
+        <p:spPr>
+          <a:xfrm>
+            <a:off x="0" y="0"/>
+            <a:ext cx="12191695" cy="6858000"/>
+          </a:xfrm>
+          <a:prstGeom prst="rect">
+            <a:avLst/>
+          </a:prstGeom>
+          <a:solidFill>
+            <a:srgbClr val="FFFFFF"/>
+          </a:solidFill>
+          <a:ln>
+            <a:noFill/>
+          </a:ln>
+          <a:effectLst/>
+        </p:spPr>
+        <p:style>
+          <a:lnRef idx="1">
+            <a:schemeClr val="accent1"/>
+          </a:lnRef>
+          <a:fillRef idx="3">
+            <a:schemeClr val="accent1"/>
+          </a:fillRef>
+          <a:effectRef idx="2">
+            <a:schemeClr val="accent1"/>
+          </a:effectRef>
+          <a:fontRef idx="minor">
+            <a:schemeClr val="lt1"/>
+          </a:fontRef>
+        </p:style>
+        <p:txBody>
+          <a:bodyPr rtlCol="0" anchor="ctr"/>
+          <a:lstStyle/>
+          <a:p>
             <a:pPr algn="ctr"/>
+          </a:p>
+        </p:txBody>
+      </p:sp>
+      <p:sp>
+        <p:nvSpPr>
+          <p:cNvPr id="3" name="Rectangle 2"/>
+          <p:cNvSpPr/>
+          <p:nvPr/>
+        </p:nvSpPr>
+        <p:spPr>
+          <a:xfrm>
+            <a:off x="0" y="0"/>
+            <a:ext cx="12191695" cy="1051560"/>
+          </a:xfrm>
+          <a:prstGeom prst="rect">
+            <a:avLst/>
+          </a:prstGeom>
+          <a:solidFill>
+            <a:srgbClr val="0B2447"/>
+          </a:solidFill>
+          <a:ln>
+            <a:noFill/>
+          </a:ln>
+          <a:effectLst/>
+        </p:spPr>
+        <p:style>
+          <a:lnRef idx="1">
+            <a:schemeClr val="accent1"/>
+          </a:lnRef>
+          <a:fillRef idx="3">
+            <a:schemeClr val="accent1"/>
+          </a:fillRef>
+          <a:effectRef idx="2">
+            <a:schemeClr val="accent1"/>
+          </a:effectRef>
+          <a:fontRef idx="minor">
+            <a:schemeClr val="lt1"/>
+          </a:fontRef>
+        </p:style>
+        <p:txBody>
+          <a:bodyPr rtlCol="0" anchor="ctr"/>
+          <a:lstStyle/>
+          <a:p>
+            <a:pPr algn="ctr"/>
+          </a:p>
+        </p:txBody>
+      </p:sp>
+      <p:sp>
+        <p:nvSpPr>
+          <p:cNvPr id="4" name="Rectangle 3"/>
+          <p:cNvSpPr/>
+          <p:nvPr/>
+        </p:nvSpPr>
+        <p:spPr>
+          <a:xfrm>
+            <a:off x="0" y="1051560"/>
+            <a:ext cx="12191695" cy="50800"/>
+          </a:xfrm>
+          <a:prstGeom prst="rect">
+            <a:avLst/>
+          </a:prstGeom>
+          <a:solidFill>
+            <a:srgbClr val="E4002B"/>
+          </a:solidFill>
+          <a:ln>
+            <a:noFill/>
+          </a:ln>
+          <a:effectLst/>
+        </p:spPr>
+        <p:style>
+          <a:lnRef idx="1">
+            <a:schemeClr val="accent1"/>
+          </a:lnRef>
+          <a:fillRef idx="3">
+            <a:schemeClr val="accent1"/>
+          </a:fillRef>
+          <a:effectRef idx="2">
+            <a:schemeClr val="accent1"/>
+          </a:effectRef>
+          <a:fontRef idx="minor">
+            <a:schemeClr val="lt1"/>
+          </a:fontRef>
+        </p:style>
+        <p:txBody>
+          <a:bodyPr rtlCol="0" anchor="ctr"/>
+          <a:lstStyle/>
+          <a:p>
+            <a:pPr algn="ctr"/>
+          </a:p>
+        </p:txBody>
+      </p:sp>
+      <p:sp>
+        <p:nvSpPr>
+          <p:cNvPr id="5" name="TextBox 4"/>
+          <p:cNvSpPr txBox="1"/>
+          <p:nvPr/>
+        </p:nvSpPr>
+        <p:spPr>
+          <a:xfrm>
+            <a:off x="457200" y="137160"/>
+            <a:ext cx="11247120" cy="822960"/>
+          </a:xfrm>
+          <a:prstGeom prst="rect">
+            <a:avLst/>
+          </a:prstGeom>
+          <a:noFill/>
+        </p:spPr>
+        <p:txBody>
+          <a:bodyPr wrap="square">
+            <a:spAutoFit/>
+          </a:bodyPr>
+          <a:lstStyle/>
+          <a:p>
+            <a:r>
+              <a:rPr sz="1200" b="1" i="0">
+                <a:solidFill>
+                  <a:srgbClr val="FFC1CC"/>
+                </a:solidFill>
+                <a:latin typeface="Calibri"/>
+              </a:rPr>
+              <a:t>PHASE 6 — PFAR (PROBABILITY-WEIGHTED FUNDS AT RISK)</a:t>
+            </a:r>
+          </a:p>
+          <a:p>
+            <a:r>
+              <a:rPr sz="2600" b="1" i="0">
+                <a:solidFill>
+                  <a:srgbClr val="FFFFFF"/>
+                </a:solidFill>
+                <a:latin typeface="Calibri"/>
+              </a:rPr>
+              <a:t>Risk Sizing &amp; Recommended Actions</a:t>
+            </a:r>
+          </a:p>
+        </p:txBody>
+      </p:sp>
+      <p:sp>
+        <p:nvSpPr>
+          <p:cNvPr id="6" name="TextBox 5"/>
+          <p:cNvSpPr txBox="1"/>
+          <p:nvPr/>
+        </p:nvSpPr>
+        <p:spPr>
+          <a:xfrm>
+            <a:off x="777240" y="1417320"/>
+            <a:ext cx="10607040" cy="640080"/>
+          </a:xfrm>
+          <a:prstGeom prst="rect">
+            <a:avLst/>
+          </a:prstGeom>
+          <a:noFill/>
+        </p:spPr>
+        <p:txBody>
+          <a:bodyPr wrap="none">
+            <a:spAutoFit/>
+          </a:bodyPr>
+          <a:lstStyle/>
+          <a:p>
+            <a:pPr algn="ctr"/>
             <a:r>
               <a:rPr sz="2000" b="1" i="0">
                 <a:solidFill>
-                  <a:srgbClr val="155E75"/>
+                  <a:srgbClr val="B3001F"/>
                 </a:solidFill>
                 <a:latin typeface="Calibri"/>
               </a:rPr>
@@ -3643,7 +5265,7 @@
             <a:r>
               <a:rPr sz="1700" b="0" i="0">
                 <a:solidFill>
-                  <a:srgbClr val="0F172A"/>
+                  <a:srgbClr val="0B2447"/>
                 </a:solidFill>
                 <a:latin typeface="Calibri"/>
               </a:rPr>
@@ -3659,7 +5281,7 @@
             <a:r>
               <a:rPr sz="1700" b="0" i="0">
                 <a:solidFill>
-                  <a:srgbClr val="0F172A"/>
+                  <a:srgbClr val="0B2447"/>
                 </a:solidFill>
                 <a:latin typeface="Calibri"/>
               </a:rPr>
@@ -3675,7 +5297,7 @@
             <a:r>
               <a:rPr sz="1700" b="0" i="0">
                 <a:solidFill>
-                  <a:srgbClr val="0F172A"/>
+                  <a:srgbClr val="0B2447"/>
                 </a:solidFill>
                 <a:latin typeface="Calibri"/>
               </a:rPr>
@@ -3726,7 +5348,7 @@
                   </a:txBody>
                   <a:tcPr>
                     <a:solidFill>
-                      <a:srgbClr val="0F172A"/>
+                      <a:srgbClr val="0B2447"/>
                     </a:solidFill>
                   </a:tcPr>
                 </a:tc>
@@ -3749,7 +5371,7 @@
                   </a:txBody>
                   <a:tcPr>
                     <a:solidFill>
-                      <a:srgbClr val="0F172A"/>
+                      <a:srgbClr val="0B2447"/>
                     </a:solidFill>
                   </a:tcPr>
                 </a:tc>
@@ -3763,7 +5385,7 @@
                       <a:r>
                         <a:rPr sz="1400" b="1" i="0">
                           <a:solidFill>
-                            <a:srgbClr val="0F172A"/>
+                            <a:srgbClr val="0B2447"/>
                           </a:solidFill>
                           <a:latin typeface="Calibri"/>
                         </a:rPr>
@@ -3785,7 +5407,7 @@
                       <a:r>
                         <a:rPr sz="1400" b="0" i="0">
                           <a:solidFill>
-                            <a:srgbClr val="0F172A"/>
+                            <a:srgbClr val="0B2447"/>
                           </a:solidFill>
                           <a:latin typeface="Calibri"/>
                         </a:rPr>
@@ -3809,7 +5431,7 @@
                       <a:r>
                         <a:rPr sz="1400" b="1" i="0">
                           <a:solidFill>
-                            <a:srgbClr val="0F172A"/>
+                            <a:srgbClr val="0B2447"/>
                           </a:solidFill>
                           <a:latin typeface="Calibri"/>
                         </a:rPr>
@@ -3831,7 +5453,7 @@
                       <a:r>
                         <a:rPr sz="1400" b="0" i="0">
                           <a:solidFill>
-                            <a:srgbClr val="0F172A"/>
+                            <a:srgbClr val="0B2447"/>
                           </a:solidFill>
                           <a:latin typeface="Calibri"/>
                         </a:rPr>
@@ -3855,7 +5477,7 @@
                       <a:r>
                         <a:rPr sz="1400" b="1" i="0">
                           <a:solidFill>
-                            <a:srgbClr val="0F172A"/>
+                            <a:srgbClr val="0B2447"/>
                           </a:solidFill>
                           <a:latin typeface="Calibri"/>
                         </a:rPr>
@@ -3877,7 +5499,7 @@
                       <a:r>
                         <a:rPr sz="1400" b="0" i="0">
                           <a:solidFill>
-                            <a:srgbClr val="0F172A"/>
+                            <a:srgbClr val="0B2447"/>
                           </a:solidFill>
                           <a:latin typeface="Calibri"/>
                         </a:rPr>
@@ -3960,427 +5582,6 @@
                 </a:solidFill>
                 <a:latin typeface="Calibri"/>
               </a:rPr>
-              <a:t>10</a:t>
-            </a:r>
-          </a:p>
-        </p:txBody>
-      </p:sp>
-    </p:spTree>
-  </p:cSld>
-  <p:clrMapOvr>
-    <a:masterClrMapping/>
-  </p:clrMapOvr>
-</p:sld>
-</file>
-
-<file path=ppt/slides/slide11.xml><?xml version="1.0" encoding="utf-8"?>
-<p:sld xmlns:a="http://schemas.openxmlformats.org/drawingml/2006/main" xmlns:p="http://schemas.openxmlformats.org/presentationml/2006/main" xmlns:r="http://schemas.openxmlformats.org/officeDocument/2006/relationships">
-  <p:cSld>
-    <p:spTree>
-      <p:nvGrpSpPr>
-        <p:cNvPr id="1" name=""/>
-        <p:cNvGrpSpPr/>
-        <p:nvPr/>
-      </p:nvGrpSpPr>
-      <p:grpSpPr/>
-      <p:sp>
-        <p:nvSpPr>
-          <p:cNvPr id="2" name="Rectangle 1"/>
-          <p:cNvSpPr/>
-          <p:nvPr/>
-        </p:nvSpPr>
-        <p:spPr>
-          <a:xfrm>
-            <a:off x="0" y="0"/>
-            <a:ext cx="12191695" cy="6858000"/>
-          </a:xfrm>
-          <a:prstGeom prst="rect">
-            <a:avLst/>
-          </a:prstGeom>
-          <a:solidFill>
-            <a:srgbClr val="FFFFFF"/>
-          </a:solidFill>
-          <a:ln>
-            <a:noFill/>
-          </a:ln>
-          <a:effectLst/>
-        </p:spPr>
-        <p:style>
-          <a:lnRef idx="1">
-            <a:schemeClr val="accent1"/>
-          </a:lnRef>
-          <a:fillRef idx="3">
-            <a:schemeClr val="accent1"/>
-          </a:fillRef>
-          <a:effectRef idx="2">
-            <a:schemeClr val="accent1"/>
-          </a:effectRef>
-          <a:fontRef idx="minor">
-            <a:schemeClr val="lt1"/>
-          </a:fontRef>
-        </p:style>
-        <p:txBody>
-          <a:bodyPr rtlCol="0" anchor="ctr"/>
-          <a:lstStyle/>
-          <a:p>
-            <a:pPr algn="ctr"/>
-          </a:p>
-        </p:txBody>
-      </p:sp>
-      <p:sp>
-        <p:nvSpPr>
-          <p:cNvPr id="3" name="Rectangle 2"/>
-          <p:cNvSpPr/>
-          <p:nvPr/>
-        </p:nvSpPr>
-        <p:spPr>
-          <a:xfrm>
-            <a:off x="0" y="0"/>
-            <a:ext cx="12191695" cy="1051560"/>
-          </a:xfrm>
-          <a:prstGeom prst="rect">
-            <a:avLst/>
-          </a:prstGeom>
-          <a:solidFill>
-            <a:srgbClr val="0F172A"/>
-          </a:solidFill>
-          <a:ln>
-            <a:noFill/>
-          </a:ln>
-          <a:effectLst/>
-        </p:spPr>
-        <p:style>
-          <a:lnRef idx="1">
-            <a:schemeClr val="accent1"/>
-          </a:lnRef>
-          <a:fillRef idx="3">
-            <a:schemeClr val="accent1"/>
-          </a:fillRef>
-          <a:effectRef idx="2">
-            <a:schemeClr val="accent1"/>
-          </a:effectRef>
-          <a:fontRef idx="minor">
-            <a:schemeClr val="lt1"/>
-          </a:fontRef>
-        </p:style>
-        <p:txBody>
-          <a:bodyPr rtlCol="0" anchor="ctr"/>
-          <a:lstStyle/>
-          <a:p>
-            <a:pPr algn="ctr"/>
-          </a:p>
-        </p:txBody>
-      </p:sp>
-      <p:sp>
-        <p:nvSpPr>
-          <p:cNvPr id="4" name="Rectangle 3"/>
-          <p:cNvSpPr/>
-          <p:nvPr/>
-        </p:nvSpPr>
-        <p:spPr>
-          <a:xfrm>
-            <a:off x="0" y="1051560"/>
-            <a:ext cx="12191695" cy="50800"/>
-          </a:xfrm>
-          <a:prstGeom prst="rect">
-            <a:avLst/>
-          </a:prstGeom>
-          <a:solidFill>
-            <a:srgbClr val="EA580C"/>
-          </a:solidFill>
-          <a:ln>
-            <a:noFill/>
-          </a:ln>
-          <a:effectLst/>
-        </p:spPr>
-        <p:style>
-          <a:lnRef idx="1">
-            <a:schemeClr val="accent1"/>
-          </a:lnRef>
-          <a:fillRef idx="3">
-            <a:schemeClr val="accent1"/>
-          </a:fillRef>
-          <a:effectRef idx="2">
-            <a:schemeClr val="accent1"/>
-          </a:effectRef>
-          <a:fontRef idx="minor">
-            <a:schemeClr val="lt1"/>
-          </a:fontRef>
-        </p:style>
-        <p:txBody>
-          <a:bodyPr rtlCol="0" anchor="ctr"/>
-          <a:lstStyle/>
-          <a:p>
-            <a:pPr algn="ctr"/>
-          </a:p>
-        </p:txBody>
-      </p:sp>
-      <p:sp>
-        <p:nvSpPr>
-          <p:cNvPr id="5" name="TextBox 4"/>
-          <p:cNvSpPr txBox="1"/>
-          <p:nvPr/>
-        </p:nvSpPr>
-        <p:spPr>
-          <a:xfrm>
-            <a:off x="457200" y="137160"/>
-            <a:ext cx="11247120" cy="822960"/>
-          </a:xfrm>
-          <a:prstGeom prst="rect">
-            <a:avLst/>
-          </a:prstGeom>
-          <a:noFill/>
-        </p:spPr>
-        <p:txBody>
-          <a:bodyPr wrap="square">
-            <a:spAutoFit/>
-          </a:bodyPr>
-          <a:lstStyle/>
-          <a:p>
-            <a:r>
-              <a:rPr sz="1200" b="1" i="0">
-                <a:solidFill>
-                  <a:srgbClr val="7DD3FC"/>
-                </a:solidFill>
-                <a:latin typeface="Calibri"/>
-              </a:rPr>
-              <a:t>PHASE 7 — TIME-TO-DETERIORATION</a:t>
-            </a:r>
-          </a:p>
-          <a:p>
-            <a:r>
-              <a:rPr sz="2600" b="1" i="0">
-                <a:solidFill>
-                  <a:srgbClr val="FFFFFF"/>
-                </a:solidFill>
-                <a:latin typeface="Calibri"/>
-              </a:rPr>
-              <a:t>Survival Analysis — Estimating WHEN</a:t>
-            </a:r>
-          </a:p>
-        </p:txBody>
-      </p:sp>
-      <p:sp>
-        <p:nvSpPr>
-          <p:cNvPr id="6" name="TextBox 5"/>
-          <p:cNvSpPr txBox="1"/>
-          <p:nvPr/>
-        </p:nvSpPr>
-        <p:spPr>
-          <a:xfrm>
-            <a:off x="640080" y="1417320"/>
-            <a:ext cx="5577840" cy="3657600"/>
-          </a:xfrm>
-          <a:prstGeom prst="rect">
-            <a:avLst/>
-          </a:prstGeom>
-          <a:noFill/>
-        </p:spPr>
-        <p:txBody>
-          <a:bodyPr wrap="square">
-            <a:spAutoFit/>
-          </a:bodyPr>
-          <a:lstStyle/>
-          <a:p>
-            <a:pPr>
-              <a:spcBef>
-                <a:spcPts val="1400"/>
-              </a:spcBef>
-            </a:pPr>
-            <a:r>
-              <a:rPr sz="1600" b="1" i="0">
-                <a:solidFill>
-                  <a:srgbClr val="155E75"/>
-                </a:solidFill>
-                <a:latin typeface="Calibri"/>
-              </a:rPr>
-              <a:t>Tried first:  </a:t>
-            </a:r>
-            <a:r>
-              <a:rPr sz="1600" b="0" i="0">
-                <a:solidFill>
-                  <a:srgbClr val="0F172A"/>
-                </a:solidFill>
-                <a:latin typeface="Calibri"/>
-              </a:rPr>
-              <a:t>CoxPHFitter — the standard approach.</a:t>
-            </a:r>
-          </a:p>
-          <a:p>
-            <a:pPr>
-              <a:spcBef>
-                <a:spcPts val="1400"/>
-              </a:spcBef>
-            </a:pPr>
-            <a:r>
-              <a:rPr sz="1600" b="1" i="0">
-                <a:solidFill>
-                  <a:srgbClr val="155E75"/>
-                </a:solidFill>
-                <a:latin typeface="Calibri"/>
-              </a:rPr>
-              <a:t>Checked, not assumed:  </a:t>
-            </a:r>
-            <a:r>
-              <a:rPr sz="1600" b="0" i="0">
-                <a:solidFill>
-                  <a:srgbClr val="0F172A"/>
-                </a:solidFill>
-                <a:latin typeface="Calibri"/>
-              </a:rPr>
-              <a:t>check_assumptions() flagged 11 of 24 covariates (46%) violating proportional hazards — pervasive, not borderline.</a:t>
-            </a:r>
-          </a:p>
-          <a:p>
-            <a:pPr>
-              <a:spcBef>
-                <a:spcPts val="1400"/>
-              </a:spcBef>
-            </a:pPr>
-            <a:r>
-              <a:rPr sz="1600" b="1" i="0">
-                <a:solidFill>
-                  <a:srgbClr val="155E75"/>
-                </a:solidFill>
-                <a:latin typeface="Calibri"/>
-              </a:rPr>
-              <a:t>Switched to:  </a:t>
-            </a:r>
-            <a:r>
-              <a:rPr sz="1600" b="0" i="0">
-                <a:solidFill>
-                  <a:srgbClr val="0F172A"/>
-                </a:solidFill>
-                <a:latin typeface="Calibri"/>
-              </a:rPr>
-              <a:t>Random Survival Forest — no such assumption. Concordance index 0.659 vs. Cox's 0.591.</a:t>
-            </a:r>
-          </a:p>
-        </p:txBody>
-      </p:sp>
-      <p:pic>
-        <p:nvPicPr>
-          <p:cNvPr id="7" name="Picture 6" descr="survival_example_curves.png"/>
-          <p:cNvPicPr>
-            <a:picLocks noChangeAspect="1"/>
-          </p:cNvPicPr>
-          <p:nvPr/>
-        </p:nvPicPr>
-        <p:blipFill>
-          <a:blip r:embed="rId2"/>
-          <a:stretch>
-            <a:fillRect/>
-          </a:stretch>
-        </p:blipFill>
-        <p:spPr>
-          <a:xfrm>
-            <a:off x="3398367" y="1371600"/>
-            <a:ext cx="5394960" cy="3596640"/>
-          </a:xfrm>
-          <a:prstGeom prst="rect">
-            <a:avLst/>
-          </a:prstGeom>
-        </p:spPr>
-      </p:pic>
-      <p:sp>
-        <p:nvSpPr>
-          <p:cNvPr id="8" name="TextBox 7"/>
-          <p:cNvSpPr txBox="1"/>
-          <p:nvPr/>
-        </p:nvSpPr>
-        <p:spPr>
-          <a:xfrm>
-            <a:off x="640080" y="5806440"/>
-            <a:ext cx="10881360" cy="365760"/>
-          </a:xfrm>
-          <a:prstGeom prst="rect">
-            <a:avLst/>
-          </a:prstGeom>
-          <a:noFill/>
-        </p:spPr>
-        <p:txBody>
-          <a:bodyPr wrap="none">
-            <a:spAutoFit/>
-          </a:bodyPr>
-          <a:lstStyle/>
-          <a:p>
-            <a:pPr algn="ctr"/>
-            <a:r>
-              <a:rPr sz="1100" b="0" i="1">
-                <a:solidFill>
-                  <a:srgbClr val="64748B"/>
-                </a:solidFill>
-                <a:latin typeface="Calibri"/>
-              </a:rPr>
-              <a:t>0.659 is modest next to the classifiers' 0.90+ AUC — expected: this model gets ONE early snapshot per customer, not fresh features every month.</a:t>
-            </a:r>
-          </a:p>
-        </p:txBody>
-      </p:sp>
-      <p:sp>
-        <p:nvSpPr>
-          <p:cNvPr id="9" name="TextBox 8"/>
-          <p:cNvSpPr txBox="1"/>
-          <p:nvPr/>
-        </p:nvSpPr>
-        <p:spPr>
-          <a:xfrm>
-            <a:off x="457200" y="6537960"/>
-            <a:ext cx="8229600" cy="274320"/>
-          </a:xfrm>
-          <a:prstGeom prst="rect">
-            <a:avLst/>
-          </a:prstGeom>
-          <a:noFill/>
-        </p:spPr>
-        <p:txBody>
-          <a:bodyPr wrap="none">
-            <a:spAutoFit/>
-          </a:bodyPr>
-          <a:lstStyle/>
-          <a:p>
-            <a:r>
-              <a:rPr sz="900" b="0" i="0">
-                <a:solidFill>
-                  <a:srgbClr val="64748B"/>
-                </a:solidFill>
-                <a:latin typeface="Calibri"/>
-              </a:rPr>
-              <a:t>CIB Early Warning System  •  Agastya Sharma  •  github.com/agastyasharma20/cib-ews</a:t>
-            </a:r>
-          </a:p>
-        </p:txBody>
-      </p:sp>
-      <p:sp>
-        <p:nvSpPr>
-          <p:cNvPr id="10" name="TextBox 9"/>
-          <p:cNvSpPr txBox="1"/>
-          <p:nvPr/>
-        </p:nvSpPr>
-        <p:spPr>
-          <a:xfrm>
-            <a:off x="11247120" y="6537960"/>
-            <a:ext cx="548640" cy="274320"/>
-          </a:xfrm>
-          <a:prstGeom prst="rect">
-            <a:avLst/>
-          </a:prstGeom>
-          <a:noFill/>
-        </p:spPr>
-        <p:txBody>
-          <a:bodyPr wrap="none">
-            <a:spAutoFit/>
-          </a:bodyPr>
-          <a:lstStyle/>
-          <a:p>
-            <a:pPr algn="r"/>
-            <a:r>
-              <a:rPr sz="900" b="0" i="0">
-                <a:solidFill>
-                  <a:srgbClr val="64748B"/>
-                </a:solidFill>
-                <a:latin typeface="Calibri"/>
-              </a:rPr>
               <a:t>11</a:t>
             </a:r>
           </a:p>
@@ -4463,7 +5664,7 @@
             <a:avLst/>
           </a:prstGeom>
           <a:solidFill>
-            <a:srgbClr val="0F172A"/>
+            <a:srgbClr val="0B2447"/>
           </a:solidFill>
           <a:ln>
             <a:noFill/>
@@ -4507,7 +5708,7 @@
             <a:avLst/>
           </a:prstGeom>
           <a:solidFill>
-            <a:srgbClr val="EA580C"/>
+            <a:srgbClr val="E4002B"/>
           </a:solidFill>
           <a:ln>
             <a:noFill/>
@@ -4561,7 +5762,428 @@
             <a:r>
               <a:rPr sz="1200" b="1" i="0">
                 <a:solidFill>
-                  <a:srgbClr val="7DD3FC"/>
+                  <a:srgbClr val="FFC1CC"/>
+                </a:solidFill>
+                <a:latin typeface="Calibri"/>
+              </a:rPr>
+              <a:t>PHASE 7 — TIME-TO-DETERIORATION</a:t>
+            </a:r>
+          </a:p>
+          <a:p>
+            <a:r>
+              <a:rPr sz="2600" b="1" i="0">
+                <a:solidFill>
+                  <a:srgbClr val="FFFFFF"/>
+                </a:solidFill>
+                <a:latin typeface="Calibri"/>
+              </a:rPr>
+              <a:t>Survival Analysis — Estimating WHEN</a:t>
+            </a:r>
+          </a:p>
+        </p:txBody>
+      </p:sp>
+      <p:sp>
+        <p:nvSpPr>
+          <p:cNvPr id="6" name="TextBox 5"/>
+          <p:cNvSpPr txBox="1"/>
+          <p:nvPr/>
+        </p:nvSpPr>
+        <p:spPr>
+          <a:xfrm>
+            <a:off x="640080" y="1417320"/>
+            <a:ext cx="5577840" cy="3657600"/>
+          </a:xfrm>
+          <a:prstGeom prst="rect">
+            <a:avLst/>
+          </a:prstGeom>
+          <a:noFill/>
+        </p:spPr>
+        <p:txBody>
+          <a:bodyPr wrap="square">
+            <a:spAutoFit/>
+          </a:bodyPr>
+          <a:lstStyle/>
+          <a:p>
+            <a:pPr>
+              <a:spcBef>
+                <a:spcPts val="1400"/>
+              </a:spcBef>
+            </a:pPr>
+            <a:r>
+              <a:rPr sz="1600" b="1" i="0">
+                <a:solidFill>
+                  <a:srgbClr val="B3001F"/>
+                </a:solidFill>
+                <a:latin typeface="Calibri"/>
+              </a:rPr>
+              <a:t>Tried first:  </a:t>
+            </a:r>
+            <a:r>
+              <a:rPr sz="1600" b="0" i="0">
+                <a:solidFill>
+                  <a:srgbClr val="0B2447"/>
+                </a:solidFill>
+                <a:latin typeface="Calibri"/>
+              </a:rPr>
+              <a:t>CoxPHFitter — the standard approach.</a:t>
+            </a:r>
+          </a:p>
+          <a:p>
+            <a:pPr>
+              <a:spcBef>
+                <a:spcPts val="1400"/>
+              </a:spcBef>
+            </a:pPr>
+            <a:r>
+              <a:rPr sz="1600" b="1" i="0">
+                <a:solidFill>
+                  <a:srgbClr val="B3001F"/>
+                </a:solidFill>
+                <a:latin typeface="Calibri"/>
+              </a:rPr>
+              <a:t>Checked, not assumed:  </a:t>
+            </a:r>
+            <a:r>
+              <a:rPr sz="1600" b="0" i="0">
+                <a:solidFill>
+                  <a:srgbClr val="0B2447"/>
+                </a:solidFill>
+                <a:latin typeface="Calibri"/>
+              </a:rPr>
+              <a:t>check_assumptions() flagged 11 of 24 covariates (46%) violating proportional hazards — pervasive, not borderline.</a:t>
+            </a:r>
+          </a:p>
+          <a:p>
+            <a:pPr>
+              <a:spcBef>
+                <a:spcPts val="1400"/>
+              </a:spcBef>
+            </a:pPr>
+            <a:r>
+              <a:rPr sz="1600" b="1" i="0">
+                <a:solidFill>
+                  <a:srgbClr val="B3001F"/>
+                </a:solidFill>
+                <a:latin typeface="Calibri"/>
+              </a:rPr>
+              <a:t>Switched to:  </a:t>
+            </a:r>
+            <a:r>
+              <a:rPr sz="1600" b="0" i="0">
+                <a:solidFill>
+                  <a:srgbClr val="0B2447"/>
+                </a:solidFill>
+                <a:latin typeface="Calibri"/>
+              </a:rPr>
+              <a:t>Random Survival Forest — no such assumption. Concordance index 0.659 vs. Cox's 0.591.</a:t>
+            </a:r>
+          </a:p>
+        </p:txBody>
+      </p:sp>
+      <p:pic>
+        <p:nvPicPr>
+          <p:cNvPr id="7" name="Picture 6" descr="survival_example_curves.png"/>
+          <p:cNvPicPr>
+            <a:picLocks noChangeAspect="1"/>
+          </p:cNvPicPr>
+          <p:nvPr/>
+        </p:nvPicPr>
+        <p:blipFill>
+          <a:blip r:embed="rId2"/>
+          <a:stretch>
+            <a:fillRect/>
+          </a:stretch>
+        </p:blipFill>
+        <p:spPr>
+          <a:xfrm>
+            <a:off x="3398367" y="1371600"/>
+            <a:ext cx="5394960" cy="3596640"/>
+          </a:xfrm>
+          <a:prstGeom prst="rect">
+            <a:avLst/>
+          </a:prstGeom>
+        </p:spPr>
+      </p:pic>
+      <p:sp>
+        <p:nvSpPr>
+          <p:cNvPr id="8" name="TextBox 7"/>
+          <p:cNvSpPr txBox="1"/>
+          <p:nvPr/>
+        </p:nvSpPr>
+        <p:spPr>
+          <a:xfrm>
+            <a:off x="640080" y="5806440"/>
+            <a:ext cx="10881360" cy="365760"/>
+          </a:xfrm>
+          <a:prstGeom prst="rect">
+            <a:avLst/>
+          </a:prstGeom>
+          <a:noFill/>
+        </p:spPr>
+        <p:txBody>
+          <a:bodyPr wrap="none">
+            <a:spAutoFit/>
+          </a:bodyPr>
+          <a:lstStyle/>
+          <a:p>
+            <a:pPr algn="ctr"/>
+            <a:r>
+              <a:rPr sz="1100" b="0" i="1">
+                <a:solidFill>
+                  <a:srgbClr val="64748B"/>
+                </a:solidFill>
+                <a:latin typeface="Calibri"/>
+              </a:rPr>
+              <a:t>0.659 is modest next to the classifiers' 0.90+ AUC — expected: this model gets ONE early snapshot per customer, not fresh features every month.</a:t>
+            </a:r>
+          </a:p>
+        </p:txBody>
+      </p:sp>
+      <p:sp>
+        <p:nvSpPr>
+          <p:cNvPr id="9" name="TextBox 8"/>
+          <p:cNvSpPr txBox="1"/>
+          <p:nvPr/>
+        </p:nvSpPr>
+        <p:spPr>
+          <a:xfrm>
+            <a:off x="457200" y="6537960"/>
+            <a:ext cx="8229600" cy="274320"/>
+          </a:xfrm>
+          <a:prstGeom prst="rect">
+            <a:avLst/>
+          </a:prstGeom>
+          <a:noFill/>
+        </p:spPr>
+        <p:txBody>
+          <a:bodyPr wrap="none">
+            <a:spAutoFit/>
+          </a:bodyPr>
+          <a:lstStyle/>
+          <a:p>
+            <a:r>
+              <a:rPr sz="900" b="0" i="0">
+                <a:solidFill>
+                  <a:srgbClr val="64748B"/>
+                </a:solidFill>
+                <a:latin typeface="Calibri"/>
+              </a:rPr>
+              <a:t>CIB Early Warning System  •  Agastya Sharma  •  github.com/agastyasharma20/cib-ews</a:t>
+            </a:r>
+          </a:p>
+        </p:txBody>
+      </p:sp>
+      <p:sp>
+        <p:nvSpPr>
+          <p:cNvPr id="10" name="TextBox 9"/>
+          <p:cNvSpPr txBox="1"/>
+          <p:nvPr/>
+        </p:nvSpPr>
+        <p:spPr>
+          <a:xfrm>
+            <a:off x="11247120" y="6537960"/>
+            <a:ext cx="548640" cy="274320"/>
+          </a:xfrm>
+          <a:prstGeom prst="rect">
+            <a:avLst/>
+          </a:prstGeom>
+          <a:noFill/>
+        </p:spPr>
+        <p:txBody>
+          <a:bodyPr wrap="none">
+            <a:spAutoFit/>
+          </a:bodyPr>
+          <a:lstStyle/>
+          <a:p>
+            <a:pPr algn="r"/>
+            <a:r>
+              <a:rPr sz="900" b="0" i="0">
+                <a:solidFill>
+                  <a:srgbClr val="64748B"/>
+                </a:solidFill>
+                <a:latin typeface="Calibri"/>
+              </a:rPr>
+              <a:t>12</a:t>
+            </a:r>
+          </a:p>
+        </p:txBody>
+      </p:sp>
+    </p:spTree>
+  </p:cSld>
+  <p:clrMapOvr>
+    <a:masterClrMapping/>
+  </p:clrMapOvr>
+</p:sld>
+</file>
+
+<file path=ppt/slides/slide13.xml><?xml version="1.0" encoding="utf-8"?>
+<p:sld xmlns:a="http://schemas.openxmlformats.org/drawingml/2006/main" xmlns:p="http://schemas.openxmlformats.org/presentationml/2006/main" xmlns:r="http://schemas.openxmlformats.org/officeDocument/2006/relationships">
+  <p:cSld>
+    <p:spTree>
+      <p:nvGrpSpPr>
+        <p:cNvPr id="1" name=""/>
+        <p:cNvGrpSpPr/>
+        <p:nvPr/>
+      </p:nvGrpSpPr>
+      <p:grpSpPr/>
+      <p:sp>
+        <p:nvSpPr>
+          <p:cNvPr id="2" name="Rectangle 1"/>
+          <p:cNvSpPr/>
+          <p:nvPr/>
+        </p:nvSpPr>
+        <p:spPr>
+          <a:xfrm>
+            <a:off x="0" y="0"/>
+            <a:ext cx="12191695" cy="6858000"/>
+          </a:xfrm>
+          <a:prstGeom prst="rect">
+            <a:avLst/>
+          </a:prstGeom>
+          <a:solidFill>
+            <a:srgbClr val="FFFFFF"/>
+          </a:solidFill>
+          <a:ln>
+            <a:noFill/>
+          </a:ln>
+          <a:effectLst/>
+        </p:spPr>
+        <p:style>
+          <a:lnRef idx="1">
+            <a:schemeClr val="accent1"/>
+          </a:lnRef>
+          <a:fillRef idx="3">
+            <a:schemeClr val="accent1"/>
+          </a:fillRef>
+          <a:effectRef idx="2">
+            <a:schemeClr val="accent1"/>
+          </a:effectRef>
+          <a:fontRef idx="minor">
+            <a:schemeClr val="lt1"/>
+          </a:fontRef>
+        </p:style>
+        <p:txBody>
+          <a:bodyPr rtlCol="0" anchor="ctr"/>
+          <a:lstStyle/>
+          <a:p>
+            <a:pPr algn="ctr"/>
+          </a:p>
+        </p:txBody>
+      </p:sp>
+      <p:sp>
+        <p:nvSpPr>
+          <p:cNvPr id="3" name="Rectangle 2"/>
+          <p:cNvSpPr/>
+          <p:nvPr/>
+        </p:nvSpPr>
+        <p:spPr>
+          <a:xfrm>
+            <a:off x="0" y="0"/>
+            <a:ext cx="12191695" cy="1051560"/>
+          </a:xfrm>
+          <a:prstGeom prst="rect">
+            <a:avLst/>
+          </a:prstGeom>
+          <a:solidFill>
+            <a:srgbClr val="0B2447"/>
+          </a:solidFill>
+          <a:ln>
+            <a:noFill/>
+          </a:ln>
+          <a:effectLst/>
+        </p:spPr>
+        <p:style>
+          <a:lnRef idx="1">
+            <a:schemeClr val="accent1"/>
+          </a:lnRef>
+          <a:fillRef idx="3">
+            <a:schemeClr val="accent1"/>
+          </a:fillRef>
+          <a:effectRef idx="2">
+            <a:schemeClr val="accent1"/>
+          </a:effectRef>
+          <a:fontRef idx="minor">
+            <a:schemeClr val="lt1"/>
+          </a:fontRef>
+        </p:style>
+        <p:txBody>
+          <a:bodyPr rtlCol="0" anchor="ctr"/>
+          <a:lstStyle/>
+          <a:p>
+            <a:pPr algn="ctr"/>
+          </a:p>
+        </p:txBody>
+      </p:sp>
+      <p:sp>
+        <p:nvSpPr>
+          <p:cNvPr id="4" name="Rectangle 3"/>
+          <p:cNvSpPr/>
+          <p:nvPr/>
+        </p:nvSpPr>
+        <p:spPr>
+          <a:xfrm>
+            <a:off x="0" y="1051560"/>
+            <a:ext cx="12191695" cy="50800"/>
+          </a:xfrm>
+          <a:prstGeom prst="rect">
+            <a:avLst/>
+          </a:prstGeom>
+          <a:solidFill>
+            <a:srgbClr val="E4002B"/>
+          </a:solidFill>
+          <a:ln>
+            <a:noFill/>
+          </a:ln>
+          <a:effectLst/>
+        </p:spPr>
+        <p:style>
+          <a:lnRef idx="1">
+            <a:schemeClr val="accent1"/>
+          </a:lnRef>
+          <a:fillRef idx="3">
+            <a:schemeClr val="accent1"/>
+          </a:fillRef>
+          <a:effectRef idx="2">
+            <a:schemeClr val="accent1"/>
+          </a:effectRef>
+          <a:fontRef idx="minor">
+            <a:schemeClr val="lt1"/>
+          </a:fontRef>
+        </p:style>
+        <p:txBody>
+          <a:bodyPr rtlCol="0" anchor="ctr"/>
+          <a:lstStyle/>
+          <a:p>
+            <a:pPr algn="ctr"/>
+          </a:p>
+        </p:txBody>
+      </p:sp>
+      <p:sp>
+        <p:nvSpPr>
+          <p:cNvPr id="5" name="TextBox 4"/>
+          <p:cNvSpPr txBox="1"/>
+          <p:nvPr/>
+        </p:nvSpPr>
+        <p:spPr>
+          <a:xfrm>
+            <a:off x="457200" y="137160"/>
+            <a:ext cx="11247120" cy="822960"/>
+          </a:xfrm>
+          <a:prstGeom prst="rect">
+            <a:avLst/>
+          </a:prstGeom>
+          <a:noFill/>
+        </p:spPr>
+        <p:txBody>
+          <a:bodyPr wrap="square">
+            <a:spAutoFit/>
+          </a:bodyPr>
+          <a:lstStyle/>
+          <a:p>
+            <a:r>
+              <a:rPr sz="1200" b="1" i="0">
+                <a:solidFill>
+                  <a:srgbClr val="FFC1CC"/>
                 </a:solidFill>
                 <a:latin typeface="Calibri"/>
               </a:rPr>
@@ -4625,7 +6247,7 @@
                   </a:txBody>
                   <a:tcPr>
                     <a:solidFill>
-                      <a:srgbClr val="0F172A"/>
+                      <a:srgbClr val="0B2447"/>
                     </a:solidFill>
                   </a:tcPr>
                 </a:tc>
@@ -4648,7 +6270,7 @@
                   </a:txBody>
                   <a:tcPr>
                     <a:solidFill>
-                      <a:srgbClr val="0F172A"/>
+                      <a:srgbClr val="0B2447"/>
                     </a:solidFill>
                   </a:tcPr>
                 </a:tc>
@@ -4671,7 +6293,7 @@
                   </a:txBody>
                   <a:tcPr>
                     <a:solidFill>
-                      <a:srgbClr val="0F172A"/>
+                      <a:srgbClr val="0B2447"/>
                     </a:solidFill>
                   </a:tcPr>
                 </a:tc>
@@ -4694,7 +6316,7 @@
                   </a:txBody>
                   <a:tcPr>
                     <a:solidFill>
-                      <a:srgbClr val="0F172A"/>
+                      <a:srgbClr val="0B2447"/>
                     </a:solidFill>
                   </a:tcPr>
                 </a:tc>
@@ -4708,7 +6330,7 @@
                       <a:r>
                         <a:rPr sz="1500" b="1" i="0">
                           <a:solidFill>
-                            <a:srgbClr val="0F172A"/>
+                            <a:srgbClr val="0B2447"/>
                           </a:solidFill>
                           <a:latin typeface="Calibri"/>
                         </a:rPr>
@@ -4730,7 +6352,7 @@
                       <a:r>
                         <a:rPr sz="1500" b="0" i="0">
                           <a:solidFill>
-                            <a:srgbClr val="0F172A"/>
+                            <a:srgbClr val="0B2447"/>
                           </a:solidFill>
                           <a:latin typeface="Calibri"/>
                         </a:rPr>
@@ -4752,7 +6374,7 @@
                       <a:r>
                         <a:rPr sz="1500" b="0" i="0">
                           <a:solidFill>
-                            <a:srgbClr val="0F172A"/>
+                            <a:srgbClr val="0B2447"/>
                           </a:solidFill>
                           <a:latin typeface="Calibri"/>
                         </a:rPr>
@@ -4774,7 +6396,7 @@
                       <a:r>
                         <a:rPr sz="1500" b="0" i="0">
                           <a:solidFill>
-                            <a:srgbClr val="0F172A"/>
+                            <a:srgbClr val="0B2447"/>
                           </a:solidFill>
                           <a:latin typeface="Calibri"/>
                         </a:rPr>
@@ -4798,7 +6420,7 @@
                       <a:r>
                         <a:rPr sz="1500" b="1" i="0">
                           <a:solidFill>
-                            <a:srgbClr val="0F172A"/>
+                            <a:srgbClr val="0B2447"/>
                           </a:solidFill>
                           <a:latin typeface="Calibri"/>
                         </a:rPr>
@@ -4820,7 +6442,7 @@
                       <a:r>
                         <a:rPr sz="1500" b="0" i="0">
                           <a:solidFill>
-                            <a:srgbClr val="0F172A"/>
+                            <a:srgbClr val="0B2447"/>
                           </a:solidFill>
                           <a:latin typeface="Calibri"/>
                         </a:rPr>
@@ -4842,7 +6464,7 @@
                       <a:r>
                         <a:rPr sz="1500" b="0" i="0">
                           <a:solidFill>
-                            <a:srgbClr val="0F172A"/>
+                            <a:srgbClr val="0B2447"/>
                           </a:solidFill>
                           <a:latin typeface="Calibri"/>
                         </a:rPr>
@@ -4864,7 +6486,7 @@
                       <a:r>
                         <a:rPr sz="1500" b="0" i="0">
                           <a:solidFill>
-                            <a:srgbClr val="0F172A"/>
+                            <a:srgbClr val="0B2447"/>
                           </a:solidFill>
                           <a:latin typeface="Calibri"/>
                         </a:rPr>
@@ -4913,7 +6535,7 @@
             <a:r>
               <a:rPr sz="1600" b="1" i="0">
                 <a:solidFill>
-                  <a:srgbClr val="155E75"/>
+                  <a:srgbClr val="B3001F"/>
                 </a:solidFill>
                 <a:latin typeface="Calibri"/>
               </a:rPr>
@@ -4922,7 +6544,7 @@
             <a:r>
               <a:rPr sz="1600" b="0" i="0">
                 <a:solidFill>
-                  <a:srgbClr val="0F172A"/>
+                  <a:srgbClr val="0B2447"/>
                 </a:solidFill>
                 <a:latin typeface="Calibri"/>
               </a:rPr>
@@ -4938,7 +6560,7 @@
             <a:r>
               <a:rPr sz="1600" b="1" i="0">
                 <a:solidFill>
-                  <a:srgbClr val="155E75"/>
+                  <a:srgbClr val="B3001F"/>
                 </a:solidFill>
                 <a:latin typeface="Calibri"/>
               </a:rPr>
@@ -4947,7 +6569,7 @@
             <a:r>
               <a:rPr sz="1600" b="0" i="0">
                 <a:solidFill>
-                  <a:srgbClr val="0F172A"/>
+                  <a:srgbClr val="0B2447"/>
                 </a:solidFill>
                 <a:latin typeface="Calibri"/>
               </a:rPr>
@@ -4963,7 +6585,7 @@
             <a:r>
               <a:rPr sz="1600" b="1" i="0">
                 <a:solidFill>
-                  <a:srgbClr val="155E75"/>
+                  <a:srgbClr val="B3001F"/>
                 </a:solidFill>
                 <a:latin typeface="Calibri"/>
               </a:rPr>
@@ -4972,334 +6594,11 @@
             <a:r>
               <a:rPr sz="1600" b="0" i="0">
                 <a:solidFill>
-                  <a:srgbClr val="0F172A"/>
+                  <a:srgbClr val="0B2447"/>
                 </a:solidFill>
                 <a:latin typeface="Calibri"/>
               </a:rPr>
               <a:t>shows the negative result was investigated and explained, not hidden — and the graph is the right extension point once real counterparty-entity data exists.</a:t>
-            </a:r>
-          </a:p>
-        </p:txBody>
-      </p:sp>
-      <p:sp>
-        <p:nvSpPr>
-          <p:cNvPr id="8" name="TextBox 7"/>
-          <p:cNvSpPr txBox="1"/>
-          <p:nvPr/>
-        </p:nvSpPr>
-        <p:spPr>
-          <a:xfrm>
-            <a:off x="457200" y="6537960"/>
-            <a:ext cx="8229600" cy="274320"/>
-          </a:xfrm>
-          <a:prstGeom prst="rect">
-            <a:avLst/>
-          </a:prstGeom>
-          <a:noFill/>
-        </p:spPr>
-        <p:txBody>
-          <a:bodyPr wrap="none">
-            <a:spAutoFit/>
-          </a:bodyPr>
-          <a:lstStyle/>
-          <a:p>
-            <a:r>
-              <a:rPr sz="900" b="0" i="0">
-                <a:solidFill>
-                  <a:srgbClr val="64748B"/>
-                </a:solidFill>
-                <a:latin typeface="Calibri"/>
-              </a:rPr>
-              <a:t>CIB Early Warning System  •  Agastya Sharma  •  github.com/agastyasharma20/cib-ews</a:t>
-            </a:r>
-          </a:p>
-        </p:txBody>
-      </p:sp>
-      <p:sp>
-        <p:nvSpPr>
-          <p:cNvPr id="9" name="TextBox 8"/>
-          <p:cNvSpPr txBox="1"/>
-          <p:nvPr/>
-        </p:nvSpPr>
-        <p:spPr>
-          <a:xfrm>
-            <a:off x="11247120" y="6537960"/>
-            <a:ext cx="548640" cy="274320"/>
-          </a:xfrm>
-          <a:prstGeom prst="rect">
-            <a:avLst/>
-          </a:prstGeom>
-          <a:noFill/>
-        </p:spPr>
-        <p:txBody>
-          <a:bodyPr wrap="none">
-            <a:spAutoFit/>
-          </a:bodyPr>
-          <a:lstStyle/>
-          <a:p>
-            <a:pPr algn="r"/>
-            <a:r>
-              <a:rPr sz="900" b="0" i="0">
-                <a:solidFill>
-                  <a:srgbClr val="64748B"/>
-                </a:solidFill>
-                <a:latin typeface="Calibri"/>
-              </a:rPr>
-              <a:t>12</a:t>
-            </a:r>
-          </a:p>
-        </p:txBody>
-      </p:sp>
-    </p:spTree>
-  </p:cSld>
-  <p:clrMapOvr>
-    <a:masterClrMapping/>
-  </p:clrMapOvr>
-</p:sld>
-</file>
-
-<file path=ppt/slides/slide13.xml><?xml version="1.0" encoding="utf-8"?>
-<p:sld xmlns:a="http://schemas.openxmlformats.org/drawingml/2006/main" xmlns:p="http://schemas.openxmlformats.org/presentationml/2006/main" xmlns:r="http://schemas.openxmlformats.org/officeDocument/2006/relationships">
-  <p:cSld>
-    <p:spTree>
-      <p:nvGrpSpPr>
-        <p:cNvPr id="1" name=""/>
-        <p:cNvGrpSpPr/>
-        <p:nvPr/>
-      </p:nvGrpSpPr>
-      <p:grpSpPr/>
-      <p:sp>
-        <p:nvSpPr>
-          <p:cNvPr id="2" name="Rectangle 1"/>
-          <p:cNvSpPr/>
-          <p:nvPr/>
-        </p:nvSpPr>
-        <p:spPr>
-          <a:xfrm>
-            <a:off x="0" y="0"/>
-            <a:ext cx="12191695" cy="6858000"/>
-          </a:xfrm>
-          <a:prstGeom prst="rect">
-            <a:avLst/>
-          </a:prstGeom>
-          <a:solidFill>
-            <a:srgbClr val="FFFFFF"/>
-          </a:solidFill>
-          <a:ln>
-            <a:noFill/>
-          </a:ln>
-          <a:effectLst/>
-        </p:spPr>
-        <p:style>
-          <a:lnRef idx="1">
-            <a:schemeClr val="accent1"/>
-          </a:lnRef>
-          <a:fillRef idx="3">
-            <a:schemeClr val="accent1"/>
-          </a:fillRef>
-          <a:effectRef idx="2">
-            <a:schemeClr val="accent1"/>
-          </a:effectRef>
-          <a:fontRef idx="minor">
-            <a:schemeClr val="lt1"/>
-          </a:fontRef>
-        </p:style>
-        <p:txBody>
-          <a:bodyPr rtlCol="0" anchor="ctr"/>
-          <a:lstStyle/>
-          <a:p>
-            <a:pPr algn="ctr"/>
-          </a:p>
-        </p:txBody>
-      </p:sp>
-      <p:sp>
-        <p:nvSpPr>
-          <p:cNvPr id="3" name="Rectangle 2"/>
-          <p:cNvSpPr/>
-          <p:nvPr/>
-        </p:nvSpPr>
-        <p:spPr>
-          <a:xfrm>
-            <a:off x="0" y="0"/>
-            <a:ext cx="12191695" cy="1051560"/>
-          </a:xfrm>
-          <a:prstGeom prst="rect">
-            <a:avLst/>
-          </a:prstGeom>
-          <a:solidFill>
-            <a:srgbClr val="0F172A"/>
-          </a:solidFill>
-          <a:ln>
-            <a:noFill/>
-          </a:ln>
-          <a:effectLst/>
-        </p:spPr>
-        <p:style>
-          <a:lnRef idx="1">
-            <a:schemeClr val="accent1"/>
-          </a:lnRef>
-          <a:fillRef idx="3">
-            <a:schemeClr val="accent1"/>
-          </a:fillRef>
-          <a:effectRef idx="2">
-            <a:schemeClr val="accent1"/>
-          </a:effectRef>
-          <a:fontRef idx="minor">
-            <a:schemeClr val="lt1"/>
-          </a:fontRef>
-        </p:style>
-        <p:txBody>
-          <a:bodyPr rtlCol="0" anchor="ctr"/>
-          <a:lstStyle/>
-          <a:p>
-            <a:pPr algn="ctr"/>
-          </a:p>
-        </p:txBody>
-      </p:sp>
-      <p:sp>
-        <p:nvSpPr>
-          <p:cNvPr id="4" name="Rectangle 3"/>
-          <p:cNvSpPr/>
-          <p:nvPr/>
-        </p:nvSpPr>
-        <p:spPr>
-          <a:xfrm>
-            <a:off x="0" y="1051560"/>
-            <a:ext cx="12191695" cy="50800"/>
-          </a:xfrm>
-          <a:prstGeom prst="rect">
-            <a:avLst/>
-          </a:prstGeom>
-          <a:solidFill>
-            <a:srgbClr val="EA580C"/>
-          </a:solidFill>
-          <a:ln>
-            <a:noFill/>
-          </a:ln>
-          <a:effectLst/>
-        </p:spPr>
-        <p:style>
-          <a:lnRef idx="1">
-            <a:schemeClr val="accent1"/>
-          </a:lnRef>
-          <a:fillRef idx="3">
-            <a:schemeClr val="accent1"/>
-          </a:fillRef>
-          <a:effectRef idx="2">
-            <a:schemeClr val="accent1"/>
-          </a:effectRef>
-          <a:fontRef idx="minor">
-            <a:schemeClr val="lt1"/>
-          </a:fontRef>
-        </p:style>
-        <p:txBody>
-          <a:bodyPr rtlCol="0" anchor="ctr"/>
-          <a:lstStyle/>
-          <a:p>
-            <a:pPr algn="ctr"/>
-          </a:p>
-        </p:txBody>
-      </p:sp>
-      <p:sp>
-        <p:nvSpPr>
-          <p:cNvPr id="5" name="TextBox 4"/>
-          <p:cNvSpPr txBox="1"/>
-          <p:nvPr/>
-        </p:nvSpPr>
-        <p:spPr>
-          <a:xfrm>
-            <a:off x="457200" y="137160"/>
-            <a:ext cx="11247120" cy="822960"/>
-          </a:xfrm>
-          <a:prstGeom prst="rect">
-            <a:avLst/>
-          </a:prstGeom>
-          <a:noFill/>
-        </p:spPr>
-        <p:txBody>
-          <a:bodyPr wrap="square">
-            <a:spAutoFit/>
-          </a:bodyPr>
-          <a:lstStyle/>
-          <a:p>
-            <a:r>
-              <a:rPr sz="1200" b="1" i="0">
-                <a:solidFill>
-                  <a:srgbClr val="7DD3FC"/>
-                </a:solidFill>
-                <a:latin typeface="Calibri"/>
-              </a:rPr>
-              <a:t>PHASE 9 — RM COCKPIT + PORTFOLIO VIEW</a:t>
-            </a:r>
-          </a:p>
-          <a:p>
-            <a:r>
-              <a:rPr sz="2600" b="1" i="0">
-                <a:solidFill>
-                  <a:srgbClr val="FFFFFF"/>
-                </a:solidFill>
-                <a:latin typeface="Calibri"/>
-              </a:rPr>
-              <a:t>The Dashboard</a:t>
-            </a:r>
-          </a:p>
-        </p:txBody>
-      </p:sp>
-      <p:pic>
-        <p:nvPicPr>
-          <p:cNvPr id="6" name="Picture 5" descr="dashboard_rm_cockpit.png"/>
-          <p:cNvPicPr>
-            <a:picLocks noChangeAspect="1"/>
-          </p:cNvPicPr>
-          <p:nvPr/>
-        </p:nvPicPr>
-        <p:blipFill>
-          <a:blip r:embed="rId2"/>
-          <a:stretch>
-            <a:fillRect/>
-          </a:stretch>
-        </p:blipFill>
-        <p:spPr>
-          <a:xfrm>
-            <a:off x="655167" y="1280160"/>
-            <a:ext cx="10881360" cy="3766624"/>
-          </a:xfrm>
-          <a:prstGeom prst="rect">
-            <a:avLst/>
-          </a:prstGeom>
-        </p:spPr>
-      </p:pic>
-      <p:sp>
-        <p:nvSpPr>
-          <p:cNvPr id="7" name="TextBox 6"/>
-          <p:cNvSpPr txBox="1"/>
-          <p:nvPr/>
-        </p:nvSpPr>
-        <p:spPr>
-          <a:xfrm>
-            <a:off x="640080" y="6400800"/>
-            <a:ext cx="10881360" cy="365760"/>
-          </a:xfrm>
-          <a:prstGeom prst="rect">
-            <a:avLst/>
-          </a:prstGeom>
-          <a:noFill/>
-        </p:spPr>
-        <p:txBody>
-          <a:bodyPr wrap="none">
-            <a:spAutoFit/>
-          </a:bodyPr>
-          <a:lstStyle/>
-          <a:p>
-            <a:pPr algn="ctr"/>
-            <a:r>
-              <a:rPr sz="1100" b="0" i="1">
-                <a:solidFill>
-                  <a:srgbClr val="64748B"/>
-                </a:solidFill>
-                <a:latin typeface="Calibri"/>
-              </a:rPr>
-              <a:t>RM Cockpit: PFaR-ranked, filterable, with plain-language reason codes and an inline survival-curve sparkline per customer.</a:t>
             </a:r>
           </a:p>
         </p:txBody>
@@ -5450,7 +6749,7 @@
             <a:avLst/>
           </a:prstGeom>
           <a:solidFill>
-            <a:srgbClr val="0F172A"/>
+            <a:srgbClr val="0B2447"/>
           </a:solidFill>
           <a:ln>
             <a:noFill/>
@@ -5494,7 +6793,7 @@
             <a:avLst/>
           </a:prstGeom>
           <a:solidFill>
-            <a:srgbClr val="EA580C"/>
+            <a:srgbClr val="E4002B"/>
           </a:solidFill>
           <a:ln>
             <a:noFill/>
@@ -5548,11 +6847,11 @@
             <a:r>
               <a:rPr sz="1200" b="1" i="0">
                 <a:solidFill>
-                  <a:srgbClr val="7DD3FC"/>
-                </a:solidFill>
-                <a:latin typeface="Calibri"/>
-              </a:rPr>
-              <a:t>BEING DIRECT ABOUT WHAT CHANGES WITH REAL DATA</a:t>
+                  <a:srgbClr val="FFC1CC"/>
+                </a:solidFill>
+                <a:latin typeface="Calibri"/>
+              </a:rPr>
+              <a:t>PHASE 9 — RM COCKPIT + PORTFOLIO VIEW</a:t>
             </a:r>
           </a:p>
           <a:p>
@@ -5563,134 +6862,35 @@
                 </a:solidFill>
                 <a:latin typeface="Calibri"/>
               </a:rPr>
-              <a:t>Limitations &amp; Path to Production</a:t>
-            </a:r>
-          </a:p>
-        </p:txBody>
-      </p:sp>
-      <p:sp>
-        <p:nvSpPr>
-          <p:cNvPr id="6" name="TextBox 5"/>
-          <p:cNvSpPr txBox="1"/>
-          <p:nvPr/>
-        </p:nvSpPr>
-        <p:spPr>
-          <a:xfrm>
-            <a:off x="640080" y="1417320"/>
-            <a:ext cx="10881360" cy="4846320"/>
-          </a:xfrm>
-          <a:prstGeom prst="rect">
-            <a:avLst/>
-          </a:prstGeom>
-          <a:noFill/>
-        </p:spPr>
-        <p:txBody>
-          <a:bodyPr wrap="square">
-            <a:spAutoFit/>
-          </a:bodyPr>
-          <a:lstStyle/>
-          <a:p>
-            <a:pPr>
-              <a:spcBef>
-                <a:spcPts val="1400"/>
-              </a:spcBef>
-            </a:pPr>
-            <a:r>
-              <a:rPr sz="1600" b="1" i="0">
-                <a:solidFill>
-                  <a:srgbClr val="155E75"/>
-                </a:solidFill>
-                <a:latin typeface="Calibri"/>
-              </a:rPr>
-              <a:t>Known limitation:  </a:t>
-            </a:r>
-            <a:r>
-              <a:rPr sz="1600" b="0" i="0">
-                <a:solidFill>
-                  <a:srgbClr val="0F172A"/>
-                </a:solidFill>
-                <a:latin typeface="Calibri"/>
-              </a:rPr>
-              <a:t>0.90+ AUCs are unusually strong because engineered features are correlated with how the synthetic labels were built — real data will likely perform lower.</a:t>
-            </a:r>
-          </a:p>
-          <a:p>
-            <a:pPr>
-              <a:spcBef>
-                <a:spcPts val="1400"/>
-              </a:spcBef>
-            </a:pPr>
-            <a:r>
-              <a:rPr sz="1600" b="1" i="0">
-                <a:solidFill>
-                  <a:srgbClr val="155E75"/>
-                </a:solidFill>
-                <a:latin typeface="Calibri"/>
-              </a:rPr>
-              <a:t>One seam to swap:  </a:t>
-            </a:r>
-            <a:r>
-              <a:rPr sz="1600" b="0" i="0">
-                <a:solidFill>
-                  <a:srgbClr val="0F172A"/>
-                </a:solidFill>
-                <a:latin typeface="Calibri"/>
-              </a:rPr>
-              <a:t>src/config.py's file paths are the ONLY place a real core-banking source plugs in — nothing downstream (features, models, dashboard) needs to change.</a:t>
-            </a:r>
-          </a:p>
-          <a:p>
-            <a:pPr>
-              <a:spcBef>
-                <a:spcPts val="1400"/>
-              </a:spcBef>
-            </a:pPr>
-            <a:r>
-              <a:rPr sz="1600" b="1" i="0">
-                <a:solidFill>
-                  <a:srgbClr val="155E75"/>
-                </a:solidFill>
-                <a:latin typeface="Calibri"/>
-              </a:rPr>
-              <a:t>Must be recalibrated:  </a:t>
-            </a:r>
-            <a:r>
-              <a:rPr sz="1600" b="0" i="0">
-                <a:solidFill>
-                  <a:srgbClr val="0F172A"/>
-                </a:solidFill>
-                <a:latin typeface="Calibri"/>
-              </a:rPr>
-              <a:t>DI threshold, PFaR decline %, model hyperparameters, the Cox-vs-RSF decision — all tuned on synthetic data, not assumed to transfer.</a:t>
-            </a:r>
-          </a:p>
-          <a:p>
-            <a:pPr>
-              <a:spcBef>
-                <a:spcPts val="1400"/>
-              </a:spcBef>
-            </a:pPr>
-            <a:r>
-              <a:rPr sz="1600" b="1" i="0">
-                <a:solidFill>
-                  <a:srgbClr val="155E75"/>
-                </a:solidFill>
-                <a:latin typeface="Calibri"/>
-              </a:rPr>
-              <a:t>Becomes possible for the first time:  </a:t>
-            </a:r>
-            <a:r>
-              <a:rPr sz="1600" b="0" i="0">
-                <a:solidFill>
-                  <a:srgbClr val="0F172A"/>
-                </a:solidFill>
-                <a:latin typeface="Calibri"/>
-              </a:rPr>
-              <a:t>the full customer↔customer wallet-leakage graph, and a contextual-bandit RM-action recommender, once real entity and outcome data exist.</a:t>
-            </a:r>
-          </a:p>
-        </p:txBody>
-      </p:sp>
+              <a:t>The Dashboard</a:t>
+            </a:r>
+          </a:p>
+        </p:txBody>
+      </p:sp>
+      <p:pic>
+        <p:nvPicPr>
+          <p:cNvPr id="6" name="Picture 5" descr="dashboard_rm_cockpit.png"/>
+          <p:cNvPicPr>
+            <a:picLocks noChangeAspect="1"/>
+          </p:cNvPicPr>
+          <p:nvPr/>
+        </p:nvPicPr>
+        <p:blipFill>
+          <a:blip r:embed="rId2"/>
+          <a:stretch>
+            <a:fillRect/>
+          </a:stretch>
+        </p:blipFill>
+        <p:spPr>
+          <a:xfrm>
+            <a:off x="655167" y="1280160"/>
+            <a:ext cx="10881360" cy="3766624"/>
+          </a:xfrm>
+          <a:prstGeom prst="rect">
+            <a:avLst/>
+          </a:prstGeom>
+        </p:spPr>
+      </p:pic>
       <p:sp>
         <p:nvSpPr>
           <p:cNvPr id="7" name="TextBox 6"/>
@@ -5699,8 +6899,8 @@
         </p:nvSpPr>
         <p:spPr>
           <a:xfrm>
-            <a:off x="457200" y="6537960"/>
-            <a:ext cx="8229600" cy="274320"/>
+            <a:off x="640080" y="6400800"/>
+            <a:ext cx="10881360" cy="365760"/>
           </a:xfrm>
           <a:prstGeom prst="rect">
             <a:avLst/>
@@ -5713,6 +6913,41 @@
           </a:bodyPr>
           <a:lstStyle/>
           <a:p>
+            <a:pPr algn="ctr"/>
+            <a:r>
+              <a:rPr sz="1100" b="0" i="1">
+                <a:solidFill>
+                  <a:srgbClr val="64748B"/>
+                </a:solidFill>
+                <a:latin typeface="Calibri"/>
+              </a:rPr>
+              <a:t>RM Cockpit: PFaR-ranked, filterable, with plain-language reason codes and an inline survival-curve sparkline per customer.</a:t>
+            </a:r>
+          </a:p>
+        </p:txBody>
+      </p:sp>
+      <p:sp>
+        <p:nvSpPr>
+          <p:cNvPr id="8" name="TextBox 7"/>
+          <p:cNvSpPr txBox="1"/>
+          <p:nvPr/>
+        </p:nvSpPr>
+        <p:spPr>
+          <a:xfrm>
+            <a:off x="457200" y="6537960"/>
+            <a:ext cx="8229600" cy="274320"/>
+          </a:xfrm>
+          <a:prstGeom prst="rect">
+            <a:avLst/>
+          </a:prstGeom>
+          <a:noFill/>
+        </p:spPr>
+        <p:txBody>
+          <a:bodyPr wrap="none">
+            <a:spAutoFit/>
+          </a:bodyPr>
+          <a:lstStyle/>
+          <a:p>
             <a:r>
               <a:rPr sz="900" b="0" i="0">
                 <a:solidFill>
@@ -5727,7 +6962,7 @@
       </p:sp>
       <p:sp>
         <p:nvSpPr>
-          <p:cNvPr id="8" name="TextBox 7"/>
+          <p:cNvPr id="9" name="TextBox 8"/>
           <p:cNvSpPr txBox="1"/>
           <p:nvPr/>
         </p:nvSpPr>
@@ -5793,7 +7028,7 @@
             <a:avLst/>
           </a:prstGeom>
           <a:solidFill>
-            <a:srgbClr val="0F172A"/>
+            <a:srgbClr val="FFFFFF"/>
           </a:solidFill>
           <a:ln>
             <a:noFill/>
@@ -5824,14 +7059,270 @@
       </p:sp>
       <p:sp>
         <p:nvSpPr>
-          <p:cNvPr id="3" name="TextBox 2"/>
+          <p:cNvPr id="3" name="Rectangle 2"/>
+          <p:cNvSpPr/>
+          <p:nvPr/>
+        </p:nvSpPr>
+        <p:spPr>
+          <a:xfrm>
+            <a:off x="0" y="0"/>
+            <a:ext cx="12191695" cy="1051560"/>
+          </a:xfrm>
+          <a:prstGeom prst="rect">
+            <a:avLst/>
+          </a:prstGeom>
+          <a:solidFill>
+            <a:srgbClr val="0B2447"/>
+          </a:solidFill>
+          <a:ln>
+            <a:noFill/>
+          </a:ln>
+          <a:effectLst/>
+        </p:spPr>
+        <p:style>
+          <a:lnRef idx="1">
+            <a:schemeClr val="accent1"/>
+          </a:lnRef>
+          <a:fillRef idx="3">
+            <a:schemeClr val="accent1"/>
+          </a:fillRef>
+          <a:effectRef idx="2">
+            <a:schemeClr val="accent1"/>
+          </a:effectRef>
+          <a:fontRef idx="minor">
+            <a:schemeClr val="lt1"/>
+          </a:fontRef>
+        </p:style>
+        <p:txBody>
+          <a:bodyPr rtlCol="0" anchor="ctr"/>
+          <a:lstStyle/>
+          <a:p>
+            <a:pPr algn="ctr"/>
+          </a:p>
+        </p:txBody>
+      </p:sp>
+      <p:sp>
+        <p:nvSpPr>
+          <p:cNvPr id="4" name="Rectangle 3"/>
+          <p:cNvSpPr/>
+          <p:nvPr/>
+        </p:nvSpPr>
+        <p:spPr>
+          <a:xfrm>
+            <a:off x="0" y="1051560"/>
+            <a:ext cx="12191695" cy="50800"/>
+          </a:xfrm>
+          <a:prstGeom prst="rect">
+            <a:avLst/>
+          </a:prstGeom>
+          <a:solidFill>
+            <a:srgbClr val="E4002B"/>
+          </a:solidFill>
+          <a:ln>
+            <a:noFill/>
+          </a:ln>
+          <a:effectLst/>
+        </p:spPr>
+        <p:style>
+          <a:lnRef idx="1">
+            <a:schemeClr val="accent1"/>
+          </a:lnRef>
+          <a:fillRef idx="3">
+            <a:schemeClr val="accent1"/>
+          </a:fillRef>
+          <a:effectRef idx="2">
+            <a:schemeClr val="accent1"/>
+          </a:effectRef>
+          <a:fontRef idx="minor">
+            <a:schemeClr val="lt1"/>
+          </a:fontRef>
+        </p:style>
+        <p:txBody>
+          <a:bodyPr rtlCol="0" anchor="ctr"/>
+          <a:lstStyle/>
+          <a:p>
+            <a:pPr algn="ctr"/>
+          </a:p>
+        </p:txBody>
+      </p:sp>
+      <p:sp>
+        <p:nvSpPr>
+          <p:cNvPr id="5" name="TextBox 4"/>
           <p:cNvSpPr txBox="1"/>
           <p:nvPr/>
         </p:nvSpPr>
         <p:spPr>
           <a:xfrm>
-            <a:off x="914400" y="2377440"/>
-            <a:ext cx="10360152" cy="914400"/>
+            <a:off x="457200" y="137160"/>
+            <a:ext cx="11247120" cy="822960"/>
+          </a:xfrm>
+          <a:prstGeom prst="rect">
+            <a:avLst/>
+          </a:prstGeom>
+          <a:noFill/>
+        </p:spPr>
+        <p:txBody>
+          <a:bodyPr wrap="square">
+            <a:spAutoFit/>
+          </a:bodyPr>
+          <a:lstStyle/>
+          <a:p>
+            <a:r>
+              <a:rPr sz="1200" b="1" i="0">
+                <a:solidFill>
+                  <a:srgbClr val="FFC1CC"/>
+                </a:solidFill>
+                <a:latin typeface="Calibri"/>
+              </a:rPr>
+              <a:t>BUSINESS FRAMING, NOT A REAL REVENUE ESTIMATE</a:t>
+            </a:r>
+          </a:p>
+          <a:p>
+            <a:r>
+              <a:rPr sz="2600" b="1" i="0">
+                <a:solidFill>
+                  <a:srgbClr val="FFFFFF"/>
+                </a:solidFill>
+                <a:latin typeface="Calibri"/>
+              </a:rPr>
+              <a:t>Why This Could Matter for HDFC</a:t>
+            </a:r>
+          </a:p>
+        </p:txBody>
+      </p:sp>
+      <p:sp>
+        <p:nvSpPr>
+          <p:cNvPr id="6" name="TextBox 5"/>
+          <p:cNvSpPr txBox="1"/>
+          <p:nvPr/>
+        </p:nvSpPr>
+        <p:spPr>
+          <a:xfrm>
+            <a:off x="640080" y="1417320"/>
+            <a:ext cx="10881360" cy="4846320"/>
+          </a:xfrm>
+          <a:prstGeom prst="rect">
+            <a:avLst/>
+          </a:prstGeom>
+          <a:noFill/>
+        </p:spPr>
+        <p:txBody>
+          <a:bodyPr wrap="square">
+            <a:spAutoFit/>
+          </a:bodyPr>
+          <a:lstStyle/>
+          <a:p>
+            <a:pPr>
+              <a:spcBef>
+                <a:spcPts val="1400"/>
+              </a:spcBef>
+            </a:pPr>
+            <a:r>
+              <a:rPr sz="1600" b="1" i="0">
+                <a:solidFill>
+                  <a:srgbClr val="B3001F"/>
+                </a:solidFill>
+                <a:latin typeface="Calibri"/>
+              </a:rPr>
+              <a:t>CIB relationships are high-value —  </a:t>
+            </a:r>
+            <a:r>
+              <a:rPr sz="1600" b="0" i="0">
+                <a:solidFill>
+                  <a:srgbClr val="0B2447"/>
+                </a:solidFill>
+                <a:latin typeface="Calibri"/>
+              </a:rPr>
+              <a:t>large balances, deep cross-sell, and expensive to win back once fully gone. Even a modest improvement in EARLY detection compounds at portfolio scale.</a:t>
+            </a:r>
+          </a:p>
+          <a:p>
+            <a:pPr>
+              <a:spcBef>
+                <a:spcPts val="1400"/>
+              </a:spcBef>
+            </a:pPr>
+            <a:r>
+              <a:rPr sz="1600" b="1" i="0">
+                <a:solidFill>
+                  <a:srgbClr val="B3001F"/>
+                </a:solidFill>
+                <a:latin typeface="Calibri"/>
+              </a:rPr>
+              <a:t>Shifts RM effort from reactive to prioritized —  </a:t>
+            </a:r>
+            <a:r>
+              <a:rPr sz="1600" b="0" i="0">
+                <a:solidFill>
+                  <a:srgbClr val="0B2447"/>
+                </a:solidFill>
+                <a:latin typeface="Calibri"/>
+              </a:rPr>
+              <a:t>instead of a monthly balance report an RM notices too late, a ranked worklist with a reason and a specific action.</a:t>
+            </a:r>
+          </a:p>
+          <a:p>
+            <a:pPr>
+              <a:spcBef>
+                <a:spcPts val="1400"/>
+              </a:spcBef>
+            </a:pPr>
+            <a:r>
+              <a:rPr sz="1600" b="1" i="0">
+                <a:solidFill>
+                  <a:srgbClr val="B3001F"/>
+                </a:solidFill>
+                <a:latin typeface="Calibri"/>
+              </a:rPr>
+              <a:t>The ₹8,570 Cr flagged exposure on this synthetic 5,000-customer book isn't a real estimate —  </a:t>
+            </a:r>
+            <a:r>
+              <a:rPr sz="1600" b="0" i="0">
+                <a:solidFill>
+                  <a:srgbClr val="0B2447"/>
+                </a:solidFill>
+                <a:latin typeface="Calibri"/>
+              </a:rPr>
+              <a:t> it's a demonstration of the SHAPE of the calculation a real portfolio-scale PFaR number would take.</a:t>
+            </a:r>
+          </a:p>
+          <a:p>
+            <a:pPr>
+              <a:spcBef>
+                <a:spcPts val="1400"/>
+              </a:spcBef>
+            </a:pPr>
+            <a:r>
+              <a:rPr sz="1600" b="1" i="0">
+                <a:solidFill>
+                  <a:srgbClr val="B3001F"/>
+                </a:solidFill>
+                <a:latin typeface="Calibri"/>
+              </a:rPr>
+              <a:t>The real ask:  </a:t>
+            </a:r>
+            <a:r>
+              <a:rPr sz="1600" b="0" i="0">
+                <a:solidFill>
+                  <a:srgbClr val="0B2447"/>
+                </a:solidFill>
+                <a:latin typeface="Calibri"/>
+              </a:rPr>
+              <a:t>a chance to do this analysis on real (anonymized/sampled) CIB data, where every threshold and calibration in this deck would be re-tuned, not reused blindly (see the Path to Production section of docs/methodology.md).</a:t>
+            </a:r>
+          </a:p>
+        </p:txBody>
+      </p:sp>
+      <p:sp>
+        <p:nvSpPr>
+          <p:cNvPr id="7" name="TextBox 6"/>
+          <p:cNvSpPr txBox="1"/>
+          <p:nvPr/>
+        </p:nvSpPr>
+        <p:spPr>
+          <a:xfrm>
+            <a:off x="457200" y="6537960"/>
+            <a:ext cx="8229600" cy="274320"/>
           </a:xfrm>
           <a:prstGeom prst="rect">
             <a:avLst/>
@@ -5844,29 +7335,28 @@
           </a:bodyPr>
           <a:lstStyle/>
           <a:p>
-            <a:pPr algn="ctr"/>
-            <a:r>
-              <a:rPr sz="4000" b="1" i="0">
-                <a:solidFill>
-                  <a:srgbClr val="FFFFFF"/>
-                </a:solidFill>
-                <a:latin typeface="Calibri"/>
-              </a:rPr>
-              <a:t>Thank You</a:t>
-            </a:r>
-          </a:p>
-        </p:txBody>
-      </p:sp>
-      <p:sp>
-        <p:nvSpPr>
-          <p:cNvPr id="4" name="TextBox 3"/>
+            <a:r>
+              <a:rPr sz="900" b="0" i="0">
+                <a:solidFill>
+                  <a:srgbClr val="64748B"/>
+                </a:solidFill>
+                <a:latin typeface="Calibri"/>
+              </a:rPr>
+              <a:t>CIB Early Warning System  •  Agastya Sharma  •  github.com/agastyasharma20/cib-ews</a:t>
+            </a:r>
+          </a:p>
+        </p:txBody>
+      </p:sp>
+      <p:sp>
+        <p:nvSpPr>
+          <p:cNvPr id="8" name="TextBox 7"/>
           <p:cNvSpPr txBox="1"/>
           <p:nvPr/>
         </p:nvSpPr>
         <p:spPr>
           <a:xfrm>
-            <a:off x="914400" y="3474720"/>
-            <a:ext cx="10360152" cy="1097280"/>
+            <a:off x="11247120" y="6537960"/>
+            <a:ext cx="548640" cy="274320"/>
           </a:xfrm>
           <a:prstGeom prst="rect">
             <a:avLst/>
@@ -5879,7 +7369,957 @@
           </a:bodyPr>
           <a:lstStyle/>
           <a:p>
+            <a:pPr algn="r"/>
+            <a:r>
+              <a:rPr sz="900" b="0" i="0">
+                <a:solidFill>
+                  <a:srgbClr val="64748B"/>
+                </a:solidFill>
+                <a:latin typeface="Calibri"/>
+              </a:rPr>
+              <a:t>15</a:t>
+            </a:r>
+          </a:p>
+        </p:txBody>
+      </p:sp>
+    </p:spTree>
+  </p:cSld>
+  <p:clrMapOvr>
+    <a:masterClrMapping/>
+  </p:clrMapOvr>
+</p:sld>
+</file>
+
+<file path=ppt/slides/slide16.xml><?xml version="1.0" encoding="utf-8"?>
+<p:sld xmlns:a="http://schemas.openxmlformats.org/drawingml/2006/main" xmlns:p="http://schemas.openxmlformats.org/presentationml/2006/main" xmlns:r="http://schemas.openxmlformats.org/officeDocument/2006/relationships">
+  <p:cSld>
+    <p:spTree>
+      <p:nvGrpSpPr>
+        <p:cNvPr id="1" name=""/>
+        <p:cNvGrpSpPr/>
+        <p:nvPr/>
+      </p:nvGrpSpPr>
+      <p:grpSpPr/>
+      <p:sp>
+        <p:nvSpPr>
+          <p:cNvPr id="2" name="Rectangle 1"/>
+          <p:cNvSpPr/>
+          <p:nvPr/>
+        </p:nvSpPr>
+        <p:spPr>
+          <a:xfrm>
+            <a:off x="0" y="0"/>
+            <a:ext cx="12191695" cy="6858000"/>
+          </a:xfrm>
+          <a:prstGeom prst="rect">
+            <a:avLst/>
+          </a:prstGeom>
+          <a:solidFill>
+            <a:srgbClr val="FFFFFF"/>
+          </a:solidFill>
+          <a:ln>
+            <a:noFill/>
+          </a:ln>
+          <a:effectLst/>
+        </p:spPr>
+        <p:style>
+          <a:lnRef idx="1">
+            <a:schemeClr val="accent1"/>
+          </a:lnRef>
+          <a:fillRef idx="3">
+            <a:schemeClr val="accent1"/>
+          </a:fillRef>
+          <a:effectRef idx="2">
+            <a:schemeClr val="accent1"/>
+          </a:effectRef>
+          <a:fontRef idx="minor">
+            <a:schemeClr val="lt1"/>
+          </a:fontRef>
+        </p:style>
+        <p:txBody>
+          <a:bodyPr rtlCol="0" anchor="ctr"/>
+          <a:lstStyle/>
+          <a:p>
             <a:pPr algn="ctr"/>
+          </a:p>
+        </p:txBody>
+      </p:sp>
+      <p:sp>
+        <p:nvSpPr>
+          <p:cNvPr id="3" name="Rectangle 2"/>
+          <p:cNvSpPr/>
+          <p:nvPr/>
+        </p:nvSpPr>
+        <p:spPr>
+          <a:xfrm>
+            <a:off x="0" y="0"/>
+            <a:ext cx="12191695" cy="1051560"/>
+          </a:xfrm>
+          <a:prstGeom prst="rect">
+            <a:avLst/>
+          </a:prstGeom>
+          <a:solidFill>
+            <a:srgbClr val="0B2447"/>
+          </a:solidFill>
+          <a:ln>
+            <a:noFill/>
+          </a:ln>
+          <a:effectLst/>
+        </p:spPr>
+        <p:style>
+          <a:lnRef idx="1">
+            <a:schemeClr val="accent1"/>
+          </a:lnRef>
+          <a:fillRef idx="3">
+            <a:schemeClr val="accent1"/>
+          </a:fillRef>
+          <a:effectRef idx="2">
+            <a:schemeClr val="accent1"/>
+          </a:effectRef>
+          <a:fontRef idx="minor">
+            <a:schemeClr val="lt1"/>
+          </a:fontRef>
+        </p:style>
+        <p:txBody>
+          <a:bodyPr rtlCol="0" anchor="ctr"/>
+          <a:lstStyle/>
+          <a:p>
+            <a:pPr algn="ctr"/>
+          </a:p>
+        </p:txBody>
+      </p:sp>
+      <p:sp>
+        <p:nvSpPr>
+          <p:cNvPr id="4" name="Rectangle 3"/>
+          <p:cNvSpPr/>
+          <p:nvPr/>
+        </p:nvSpPr>
+        <p:spPr>
+          <a:xfrm>
+            <a:off x="0" y="1051560"/>
+            <a:ext cx="12191695" cy="50800"/>
+          </a:xfrm>
+          <a:prstGeom prst="rect">
+            <a:avLst/>
+          </a:prstGeom>
+          <a:solidFill>
+            <a:srgbClr val="E4002B"/>
+          </a:solidFill>
+          <a:ln>
+            <a:noFill/>
+          </a:ln>
+          <a:effectLst/>
+        </p:spPr>
+        <p:style>
+          <a:lnRef idx="1">
+            <a:schemeClr val="accent1"/>
+          </a:lnRef>
+          <a:fillRef idx="3">
+            <a:schemeClr val="accent1"/>
+          </a:fillRef>
+          <a:effectRef idx="2">
+            <a:schemeClr val="accent1"/>
+          </a:effectRef>
+          <a:fontRef idx="minor">
+            <a:schemeClr val="lt1"/>
+          </a:fontRef>
+        </p:style>
+        <p:txBody>
+          <a:bodyPr rtlCol="0" anchor="ctr"/>
+          <a:lstStyle/>
+          <a:p>
+            <a:pPr algn="ctr"/>
+          </a:p>
+        </p:txBody>
+      </p:sp>
+      <p:sp>
+        <p:nvSpPr>
+          <p:cNvPr id="5" name="TextBox 4"/>
+          <p:cNvSpPr txBox="1"/>
+          <p:nvPr/>
+        </p:nvSpPr>
+        <p:spPr>
+          <a:xfrm>
+            <a:off x="457200" y="137160"/>
+            <a:ext cx="11247120" cy="822960"/>
+          </a:xfrm>
+          <a:prstGeom prst="rect">
+            <a:avLst/>
+          </a:prstGeom>
+          <a:noFill/>
+        </p:spPr>
+        <p:txBody>
+          <a:bodyPr wrap="square">
+            <a:spAutoFit/>
+          </a:bodyPr>
+          <a:lstStyle/>
+          <a:p>
+            <a:r>
+              <a:rPr sz="1200" b="1" i="0">
+                <a:solidFill>
+                  <a:srgbClr val="FFC1CC"/>
+                </a:solidFill>
+                <a:latin typeface="Calibri"/>
+              </a:rPr>
+              <a:t>HOW THIS GROWS FROM A PORTFOLIO PROJECT INTO A STRONGER ONE</a:t>
+            </a:r>
+          </a:p>
+          <a:p>
+            <a:r>
+              <a:rPr sz="2600" b="1" i="0">
+                <a:solidFill>
+                  <a:srgbClr val="FFFFFF"/>
+                </a:solidFill>
+                <a:latin typeface="Calibri"/>
+              </a:rPr>
+              <a:t>Innovation &amp; What's Next</a:t>
+            </a:r>
+          </a:p>
+        </p:txBody>
+      </p:sp>
+      <p:sp>
+        <p:nvSpPr>
+          <p:cNvPr id="6" name="TextBox 5"/>
+          <p:cNvSpPr txBox="1"/>
+          <p:nvPr/>
+        </p:nvSpPr>
+        <p:spPr>
+          <a:xfrm>
+            <a:off x="640080" y="1417320"/>
+            <a:ext cx="10881360" cy="4846320"/>
+          </a:xfrm>
+          <a:prstGeom prst="rect">
+            <a:avLst/>
+          </a:prstGeom>
+          <a:noFill/>
+        </p:spPr>
+        <p:txBody>
+          <a:bodyPr wrap="square">
+            <a:spAutoFit/>
+          </a:bodyPr>
+          <a:lstStyle/>
+          <a:p>
+            <a:pPr>
+              <a:spcBef>
+                <a:spcPts val="1200"/>
+              </a:spcBef>
+            </a:pPr>
+            <a:r>
+              <a:rPr sz="1550" b="1" i="0">
+                <a:solidFill>
+                  <a:srgbClr val="B3001F"/>
+                </a:solidFill>
+                <a:latin typeface="Calibri"/>
+              </a:rPr>
+              <a:t>Close the one gap myself:  </a:t>
+            </a:r>
+            <a:r>
+              <a:rPr sz="1550" b="0" i="0">
+                <a:solidFill>
+                  <a:srgbClr val="0B2447"/>
+                </a:solidFill>
+                <a:latin typeface="Calibri"/>
+              </a:rPr>
+              <a:t>an automated test suite (label thresholds, feature leakage-safety, PFaR logic) — the one thing this project doesn't have yet.</a:t>
+            </a:r>
+          </a:p>
+          <a:p>
+            <a:pPr>
+              <a:spcBef>
+                <a:spcPts val="1200"/>
+              </a:spcBef>
+            </a:pPr>
+            <a:r>
+              <a:rPr sz="1550" b="1" i="0">
+                <a:solidFill>
+                  <a:srgbClr val="B3001F"/>
+                </a:solidFill>
+                <a:latin typeface="Calibri"/>
+              </a:rPr>
+              <a:t>Contextual bandit RM-action recommender:  </a:t>
+            </a:r>
+            <a:r>
+              <a:rPr sz="1550" b="0" i="0">
+                <a:solidFill>
+                  <a:srgbClr val="0B2447"/>
+                </a:solidFill>
+                <a:latin typeface="Calibri"/>
+              </a:rPr>
+              <a:t>the action-engine interface is already shaped for it — needs real RM-outcome data to learn from, not more code.</a:t>
+            </a:r>
+          </a:p>
+          <a:p>
+            <a:pPr>
+              <a:spcBef>
+                <a:spcPts val="1200"/>
+              </a:spcBef>
+            </a:pPr>
+            <a:r>
+              <a:rPr sz="1550" b="1" i="0">
+                <a:solidFill>
+                  <a:srgbClr val="B3001F"/>
+                </a:solidFill>
+                <a:latin typeface="Calibri"/>
+              </a:rPr>
+              <a:t>The REAL wallet-leakage graph:  </a:t>
+            </a:r>
+            <a:r>
+              <a:rPr sz="1550" b="0" i="0">
+                <a:solidFill>
+                  <a:srgbClr val="0B2447"/>
+                </a:solidFill>
+                <a:latin typeface="Calibri"/>
+              </a:rPr>
+              <a:t>customer↔customer, via shared vendors/directors, once entity-level counterparty data exists — Phase 8 showed exactly why the bank-level version fell short.</a:t>
+            </a:r>
+          </a:p>
+          <a:p>
+            <a:pPr>
+              <a:spcBef>
+                <a:spcPts val="1200"/>
+              </a:spcBef>
+            </a:pPr>
+            <a:r>
+              <a:rPr sz="1550" b="1" i="0">
+                <a:solidFill>
+                  <a:srgbClr val="B3001F"/>
+                </a:solidFill>
+                <a:latin typeface="Calibri"/>
+              </a:rPr>
+              <a:t>Model monitoring:  </a:t>
+            </a:r>
+            <a:r>
+              <a:rPr sz="1550" b="0" i="0">
+                <a:solidFill>
+                  <a:srgbClr val="0B2447"/>
+                </a:solidFill>
+                <a:latin typeface="Calibri"/>
+              </a:rPr>
+              <a:t>track PR-AUC and calibration drift over time as real data accumulates, not just a one-time evaluation.</a:t>
+            </a:r>
+          </a:p>
+          <a:p>
+            <a:pPr>
+              <a:spcBef>
+                <a:spcPts val="1200"/>
+              </a:spcBef>
+            </a:pPr>
+            <a:r>
+              <a:rPr sz="1550" b="1" i="0">
+                <a:solidFill>
+                  <a:srgbClr val="B3001F"/>
+                </a:solidFill>
+                <a:latin typeface="Calibri"/>
+              </a:rPr>
+              <a:t>NLP on RM call notes / service tickets:  </a:t>
+            </a:r>
+            <a:r>
+              <a:rPr sz="1550" b="0" i="0">
+                <a:solidFill>
+                  <a:srgbClr val="0B2447"/>
+                </a:solidFill>
+                <a:latin typeface="Calibri"/>
+              </a:rPr>
+              <a:t>a 6th feature group, using text the current data doesn't include.</a:t>
+            </a:r>
+          </a:p>
+        </p:txBody>
+      </p:sp>
+      <p:sp>
+        <p:nvSpPr>
+          <p:cNvPr id="7" name="TextBox 6"/>
+          <p:cNvSpPr txBox="1"/>
+          <p:nvPr/>
+        </p:nvSpPr>
+        <p:spPr>
+          <a:xfrm>
+            <a:off x="457200" y="6537960"/>
+            <a:ext cx="8229600" cy="274320"/>
+          </a:xfrm>
+          <a:prstGeom prst="rect">
+            <a:avLst/>
+          </a:prstGeom>
+          <a:noFill/>
+        </p:spPr>
+        <p:txBody>
+          <a:bodyPr wrap="none">
+            <a:spAutoFit/>
+          </a:bodyPr>
+          <a:lstStyle/>
+          <a:p>
+            <a:r>
+              <a:rPr sz="900" b="0" i="0">
+                <a:solidFill>
+                  <a:srgbClr val="64748B"/>
+                </a:solidFill>
+                <a:latin typeface="Calibri"/>
+              </a:rPr>
+              <a:t>CIB Early Warning System  •  Agastya Sharma  •  github.com/agastyasharma20/cib-ews</a:t>
+            </a:r>
+          </a:p>
+        </p:txBody>
+      </p:sp>
+      <p:sp>
+        <p:nvSpPr>
+          <p:cNvPr id="8" name="TextBox 7"/>
+          <p:cNvSpPr txBox="1"/>
+          <p:nvPr/>
+        </p:nvSpPr>
+        <p:spPr>
+          <a:xfrm>
+            <a:off x="11247120" y="6537960"/>
+            <a:ext cx="548640" cy="274320"/>
+          </a:xfrm>
+          <a:prstGeom prst="rect">
+            <a:avLst/>
+          </a:prstGeom>
+          <a:noFill/>
+        </p:spPr>
+        <p:txBody>
+          <a:bodyPr wrap="none">
+            <a:spAutoFit/>
+          </a:bodyPr>
+          <a:lstStyle/>
+          <a:p>
+            <a:pPr algn="r"/>
+            <a:r>
+              <a:rPr sz="900" b="0" i="0">
+                <a:solidFill>
+                  <a:srgbClr val="64748B"/>
+                </a:solidFill>
+                <a:latin typeface="Calibri"/>
+              </a:rPr>
+              <a:t>16</a:t>
+            </a:r>
+          </a:p>
+        </p:txBody>
+      </p:sp>
+    </p:spTree>
+  </p:cSld>
+  <p:clrMapOvr>
+    <a:masterClrMapping/>
+  </p:clrMapOvr>
+</p:sld>
+</file>
+
+<file path=ppt/slides/slide17.xml><?xml version="1.0" encoding="utf-8"?>
+<p:sld xmlns:a="http://schemas.openxmlformats.org/drawingml/2006/main" xmlns:p="http://schemas.openxmlformats.org/presentationml/2006/main" xmlns:r="http://schemas.openxmlformats.org/officeDocument/2006/relationships">
+  <p:cSld>
+    <p:spTree>
+      <p:nvGrpSpPr>
+        <p:cNvPr id="1" name=""/>
+        <p:cNvGrpSpPr/>
+        <p:nvPr/>
+      </p:nvGrpSpPr>
+      <p:grpSpPr/>
+      <p:sp>
+        <p:nvSpPr>
+          <p:cNvPr id="2" name="Rectangle 1"/>
+          <p:cNvSpPr/>
+          <p:nvPr/>
+        </p:nvSpPr>
+        <p:spPr>
+          <a:xfrm>
+            <a:off x="0" y="0"/>
+            <a:ext cx="12191695" cy="6858000"/>
+          </a:xfrm>
+          <a:prstGeom prst="rect">
+            <a:avLst/>
+          </a:prstGeom>
+          <a:solidFill>
+            <a:srgbClr val="FFFFFF"/>
+          </a:solidFill>
+          <a:ln>
+            <a:noFill/>
+          </a:ln>
+          <a:effectLst/>
+        </p:spPr>
+        <p:style>
+          <a:lnRef idx="1">
+            <a:schemeClr val="accent1"/>
+          </a:lnRef>
+          <a:fillRef idx="3">
+            <a:schemeClr val="accent1"/>
+          </a:fillRef>
+          <a:effectRef idx="2">
+            <a:schemeClr val="accent1"/>
+          </a:effectRef>
+          <a:fontRef idx="minor">
+            <a:schemeClr val="lt1"/>
+          </a:fontRef>
+        </p:style>
+        <p:txBody>
+          <a:bodyPr rtlCol="0" anchor="ctr"/>
+          <a:lstStyle/>
+          <a:p>
+            <a:pPr algn="ctr"/>
+          </a:p>
+        </p:txBody>
+      </p:sp>
+      <p:sp>
+        <p:nvSpPr>
+          <p:cNvPr id="3" name="Rectangle 2"/>
+          <p:cNvSpPr/>
+          <p:nvPr/>
+        </p:nvSpPr>
+        <p:spPr>
+          <a:xfrm>
+            <a:off x="0" y="0"/>
+            <a:ext cx="12191695" cy="1051560"/>
+          </a:xfrm>
+          <a:prstGeom prst="rect">
+            <a:avLst/>
+          </a:prstGeom>
+          <a:solidFill>
+            <a:srgbClr val="0B2447"/>
+          </a:solidFill>
+          <a:ln>
+            <a:noFill/>
+          </a:ln>
+          <a:effectLst/>
+        </p:spPr>
+        <p:style>
+          <a:lnRef idx="1">
+            <a:schemeClr val="accent1"/>
+          </a:lnRef>
+          <a:fillRef idx="3">
+            <a:schemeClr val="accent1"/>
+          </a:fillRef>
+          <a:effectRef idx="2">
+            <a:schemeClr val="accent1"/>
+          </a:effectRef>
+          <a:fontRef idx="minor">
+            <a:schemeClr val="lt1"/>
+          </a:fontRef>
+        </p:style>
+        <p:txBody>
+          <a:bodyPr rtlCol="0" anchor="ctr"/>
+          <a:lstStyle/>
+          <a:p>
+            <a:pPr algn="ctr"/>
+          </a:p>
+        </p:txBody>
+      </p:sp>
+      <p:sp>
+        <p:nvSpPr>
+          <p:cNvPr id="4" name="Rectangle 3"/>
+          <p:cNvSpPr/>
+          <p:nvPr/>
+        </p:nvSpPr>
+        <p:spPr>
+          <a:xfrm>
+            <a:off x="0" y="1051560"/>
+            <a:ext cx="12191695" cy="50800"/>
+          </a:xfrm>
+          <a:prstGeom prst="rect">
+            <a:avLst/>
+          </a:prstGeom>
+          <a:solidFill>
+            <a:srgbClr val="E4002B"/>
+          </a:solidFill>
+          <a:ln>
+            <a:noFill/>
+          </a:ln>
+          <a:effectLst/>
+        </p:spPr>
+        <p:style>
+          <a:lnRef idx="1">
+            <a:schemeClr val="accent1"/>
+          </a:lnRef>
+          <a:fillRef idx="3">
+            <a:schemeClr val="accent1"/>
+          </a:fillRef>
+          <a:effectRef idx="2">
+            <a:schemeClr val="accent1"/>
+          </a:effectRef>
+          <a:fontRef idx="minor">
+            <a:schemeClr val="lt1"/>
+          </a:fontRef>
+        </p:style>
+        <p:txBody>
+          <a:bodyPr rtlCol="0" anchor="ctr"/>
+          <a:lstStyle/>
+          <a:p>
+            <a:pPr algn="ctr"/>
+          </a:p>
+        </p:txBody>
+      </p:sp>
+      <p:sp>
+        <p:nvSpPr>
+          <p:cNvPr id="5" name="TextBox 4"/>
+          <p:cNvSpPr txBox="1"/>
+          <p:nvPr/>
+        </p:nvSpPr>
+        <p:spPr>
+          <a:xfrm>
+            <a:off x="457200" y="137160"/>
+            <a:ext cx="11247120" cy="822960"/>
+          </a:xfrm>
+          <a:prstGeom prst="rect">
+            <a:avLst/>
+          </a:prstGeom>
+          <a:noFill/>
+        </p:spPr>
+        <p:txBody>
+          <a:bodyPr wrap="square">
+            <a:spAutoFit/>
+          </a:bodyPr>
+          <a:lstStyle/>
+          <a:p>
+            <a:r>
+              <a:rPr sz="1200" b="1" i="0">
+                <a:solidFill>
+                  <a:srgbClr val="FFC1CC"/>
+                </a:solidFill>
+                <a:latin typeface="Calibri"/>
+              </a:rPr>
+              <a:t>BEING DIRECT ABOUT WHAT CHANGES WITH REAL DATA</a:t>
+            </a:r>
+          </a:p>
+          <a:p>
+            <a:r>
+              <a:rPr sz="2600" b="1" i="0">
+                <a:solidFill>
+                  <a:srgbClr val="FFFFFF"/>
+                </a:solidFill>
+                <a:latin typeface="Calibri"/>
+              </a:rPr>
+              <a:t>Limitations &amp; Path to Production</a:t>
+            </a:r>
+          </a:p>
+        </p:txBody>
+      </p:sp>
+      <p:sp>
+        <p:nvSpPr>
+          <p:cNvPr id="6" name="TextBox 5"/>
+          <p:cNvSpPr txBox="1"/>
+          <p:nvPr/>
+        </p:nvSpPr>
+        <p:spPr>
+          <a:xfrm>
+            <a:off x="640080" y="1417320"/>
+            <a:ext cx="10881360" cy="4846320"/>
+          </a:xfrm>
+          <a:prstGeom prst="rect">
+            <a:avLst/>
+          </a:prstGeom>
+          <a:noFill/>
+        </p:spPr>
+        <p:txBody>
+          <a:bodyPr wrap="square">
+            <a:spAutoFit/>
+          </a:bodyPr>
+          <a:lstStyle/>
+          <a:p>
+            <a:pPr>
+              <a:spcBef>
+                <a:spcPts val="1400"/>
+              </a:spcBef>
+            </a:pPr>
+            <a:r>
+              <a:rPr sz="1600" b="1" i="0">
+                <a:solidFill>
+                  <a:srgbClr val="B3001F"/>
+                </a:solidFill>
+                <a:latin typeface="Calibri"/>
+              </a:rPr>
+              <a:t>Known limitation:  </a:t>
+            </a:r>
+            <a:r>
+              <a:rPr sz="1600" b="0" i="0">
+                <a:solidFill>
+                  <a:srgbClr val="0B2447"/>
+                </a:solidFill>
+                <a:latin typeface="Calibri"/>
+              </a:rPr>
+              <a:t>0.90+ AUCs are unusually strong because engineered features are correlated with how the synthetic labels were built — real data will likely perform lower.</a:t>
+            </a:r>
+          </a:p>
+          <a:p>
+            <a:pPr>
+              <a:spcBef>
+                <a:spcPts val="1400"/>
+              </a:spcBef>
+            </a:pPr>
+            <a:r>
+              <a:rPr sz="1600" b="1" i="0">
+                <a:solidFill>
+                  <a:srgbClr val="B3001F"/>
+                </a:solidFill>
+                <a:latin typeface="Calibri"/>
+              </a:rPr>
+              <a:t>One seam to swap:  </a:t>
+            </a:r>
+            <a:r>
+              <a:rPr sz="1600" b="0" i="0">
+                <a:solidFill>
+                  <a:srgbClr val="0B2447"/>
+                </a:solidFill>
+                <a:latin typeface="Calibri"/>
+              </a:rPr>
+              <a:t>src/config.py's file paths are the ONLY place a real core-banking source plugs in — nothing downstream (features, models, dashboard) needs to change.</a:t>
+            </a:r>
+          </a:p>
+          <a:p>
+            <a:pPr>
+              <a:spcBef>
+                <a:spcPts val="1400"/>
+              </a:spcBef>
+            </a:pPr>
+            <a:r>
+              <a:rPr sz="1600" b="1" i="0">
+                <a:solidFill>
+                  <a:srgbClr val="B3001F"/>
+                </a:solidFill>
+                <a:latin typeface="Calibri"/>
+              </a:rPr>
+              <a:t>Must be recalibrated:  </a:t>
+            </a:r>
+            <a:r>
+              <a:rPr sz="1600" b="0" i="0">
+                <a:solidFill>
+                  <a:srgbClr val="0B2447"/>
+                </a:solidFill>
+                <a:latin typeface="Calibri"/>
+              </a:rPr>
+              <a:t>DI threshold, PFaR decline %, model hyperparameters, the Cox-vs-RSF decision — all tuned on synthetic data, not assumed to transfer.</a:t>
+            </a:r>
+          </a:p>
+        </p:txBody>
+      </p:sp>
+      <p:sp>
+        <p:nvSpPr>
+          <p:cNvPr id="7" name="TextBox 6"/>
+          <p:cNvSpPr txBox="1"/>
+          <p:nvPr/>
+        </p:nvSpPr>
+        <p:spPr>
+          <a:xfrm>
+            <a:off x="457200" y="6537960"/>
+            <a:ext cx="8229600" cy="274320"/>
+          </a:xfrm>
+          <a:prstGeom prst="rect">
+            <a:avLst/>
+          </a:prstGeom>
+          <a:noFill/>
+        </p:spPr>
+        <p:txBody>
+          <a:bodyPr wrap="none">
+            <a:spAutoFit/>
+          </a:bodyPr>
+          <a:lstStyle/>
+          <a:p>
+            <a:r>
+              <a:rPr sz="900" b="0" i="0">
+                <a:solidFill>
+                  <a:srgbClr val="64748B"/>
+                </a:solidFill>
+                <a:latin typeface="Calibri"/>
+              </a:rPr>
+              <a:t>CIB Early Warning System  •  Agastya Sharma  •  github.com/agastyasharma20/cib-ews</a:t>
+            </a:r>
+          </a:p>
+        </p:txBody>
+      </p:sp>
+      <p:sp>
+        <p:nvSpPr>
+          <p:cNvPr id="8" name="TextBox 7"/>
+          <p:cNvSpPr txBox="1"/>
+          <p:nvPr/>
+        </p:nvSpPr>
+        <p:spPr>
+          <a:xfrm>
+            <a:off x="11247120" y="6537960"/>
+            <a:ext cx="548640" cy="274320"/>
+          </a:xfrm>
+          <a:prstGeom prst="rect">
+            <a:avLst/>
+          </a:prstGeom>
+          <a:noFill/>
+        </p:spPr>
+        <p:txBody>
+          <a:bodyPr wrap="none">
+            <a:spAutoFit/>
+          </a:bodyPr>
+          <a:lstStyle/>
+          <a:p>
+            <a:pPr algn="r"/>
+            <a:r>
+              <a:rPr sz="900" b="0" i="0">
+                <a:solidFill>
+                  <a:srgbClr val="64748B"/>
+                </a:solidFill>
+                <a:latin typeface="Calibri"/>
+              </a:rPr>
+              <a:t>17</a:t>
+            </a:r>
+          </a:p>
+        </p:txBody>
+      </p:sp>
+    </p:spTree>
+  </p:cSld>
+  <p:clrMapOvr>
+    <a:masterClrMapping/>
+  </p:clrMapOvr>
+</p:sld>
+</file>
+
+<file path=ppt/slides/slide18.xml><?xml version="1.0" encoding="utf-8"?>
+<p:sld xmlns:a="http://schemas.openxmlformats.org/drawingml/2006/main" xmlns:p="http://schemas.openxmlformats.org/presentationml/2006/main" xmlns:r="http://schemas.openxmlformats.org/officeDocument/2006/relationships">
+  <p:cSld>
+    <p:spTree>
+      <p:nvGrpSpPr>
+        <p:cNvPr id="1" name=""/>
+        <p:cNvGrpSpPr/>
+        <p:nvPr/>
+      </p:nvGrpSpPr>
+      <p:grpSpPr/>
+      <p:sp>
+        <p:nvSpPr>
+          <p:cNvPr id="2" name="Rectangle 1"/>
+          <p:cNvSpPr/>
+          <p:nvPr/>
+        </p:nvSpPr>
+        <p:spPr>
+          <a:xfrm>
+            <a:off x="0" y="0"/>
+            <a:ext cx="12191695" cy="6858000"/>
+          </a:xfrm>
+          <a:prstGeom prst="rect">
+            <a:avLst/>
+          </a:prstGeom>
+          <a:solidFill>
+            <a:srgbClr val="0B2447"/>
+          </a:solidFill>
+          <a:ln>
+            <a:noFill/>
+          </a:ln>
+          <a:effectLst/>
+        </p:spPr>
+        <p:style>
+          <a:lnRef idx="1">
+            <a:schemeClr val="accent1"/>
+          </a:lnRef>
+          <a:fillRef idx="3">
+            <a:schemeClr val="accent1"/>
+          </a:fillRef>
+          <a:effectRef idx="2">
+            <a:schemeClr val="accent1"/>
+          </a:effectRef>
+          <a:fontRef idx="minor">
+            <a:schemeClr val="lt1"/>
+          </a:fontRef>
+        </p:style>
+        <p:txBody>
+          <a:bodyPr rtlCol="0" anchor="ctr"/>
+          <a:lstStyle/>
+          <a:p>
+            <a:pPr algn="ctr"/>
+          </a:p>
+        </p:txBody>
+      </p:sp>
+      <p:sp>
+        <p:nvSpPr>
+          <p:cNvPr id="3" name="Rectangle 2"/>
+          <p:cNvSpPr/>
+          <p:nvPr/>
+        </p:nvSpPr>
+        <p:spPr>
+          <a:xfrm>
+            <a:off x="0" y="2148840"/>
+            <a:ext cx="12191695" cy="50800"/>
+          </a:xfrm>
+          <a:prstGeom prst="rect">
+            <a:avLst/>
+          </a:prstGeom>
+          <a:solidFill>
+            <a:srgbClr val="E4002B"/>
+          </a:solidFill>
+          <a:ln>
+            <a:noFill/>
+          </a:ln>
+          <a:effectLst/>
+        </p:spPr>
+        <p:style>
+          <a:lnRef idx="1">
+            <a:schemeClr val="accent1"/>
+          </a:lnRef>
+          <a:fillRef idx="3">
+            <a:schemeClr val="accent1"/>
+          </a:fillRef>
+          <a:effectRef idx="2">
+            <a:schemeClr val="accent1"/>
+          </a:effectRef>
+          <a:fontRef idx="minor">
+            <a:schemeClr val="lt1"/>
+          </a:fontRef>
+        </p:style>
+        <p:txBody>
+          <a:bodyPr rtlCol="0" anchor="ctr"/>
+          <a:lstStyle/>
+          <a:p>
+            <a:pPr algn="ctr"/>
+          </a:p>
+        </p:txBody>
+      </p:sp>
+      <p:sp>
+        <p:nvSpPr>
+          <p:cNvPr id="4" name="TextBox 3"/>
+          <p:cNvSpPr txBox="1"/>
+          <p:nvPr/>
+        </p:nvSpPr>
+        <p:spPr>
+          <a:xfrm>
+            <a:off x="914400" y="2377440"/>
+            <a:ext cx="10360152" cy="914400"/>
+          </a:xfrm>
+          <a:prstGeom prst="rect">
+            <a:avLst/>
+          </a:prstGeom>
+          <a:noFill/>
+        </p:spPr>
+        <p:txBody>
+          <a:bodyPr wrap="none">
+            <a:spAutoFit/>
+          </a:bodyPr>
+          <a:lstStyle/>
+          <a:p>
+            <a:pPr algn="ctr"/>
+            <a:r>
+              <a:rPr sz="4000" b="1" i="0">
+                <a:solidFill>
+                  <a:srgbClr val="FFFFFF"/>
+                </a:solidFill>
+                <a:latin typeface="Calibri"/>
+              </a:rPr>
+              <a:t>Thank You</a:t>
+            </a:r>
+          </a:p>
+        </p:txBody>
+      </p:sp>
+      <p:sp>
+        <p:nvSpPr>
+          <p:cNvPr id="5" name="TextBox 4"/>
+          <p:cNvSpPr txBox="1"/>
+          <p:nvPr/>
+        </p:nvSpPr>
+        <p:spPr>
+          <a:xfrm>
+            <a:off x="914400" y="3474720"/>
+            <a:ext cx="10360152" cy="1097280"/>
+          </a:xfrm>
+          <a:prstGeom prst="rect">
+            <a:avLst/>
+          </a:prstGeom>
+          <a:noFill/>
+        </p:spPr>
+        <p:txBody>
+          <a:bodyPr wrap="none">
+            <a:spAutoFit/>
+          </a:bodyPr>
+          <a:lstStyle/>
+          <a:p>
+            <a:pPr algn="ctr"/>
             <a:r>
               <a:rPr sz="2000" b="1" i="0">
                 <a:solidFill>
@@ -5895,7 +8335,7 @@
             <a:r>
               <a:rPr sz="1500" b="0" i="0">
                 <a:solidFill>
-                  <a:srgbClr val="7DD3FC"/>
+                  <a:srgbClr val="FFC1CC"/>
                 </a:solidFill>
                 <a:latin typeface="Calibri"/>
               </a:rPr>
@@ -5906,7 +8346,7 @@
       </p:sp>
       <p:sp>
         <p:nvSpPr>
-          <p:cNvPr id="5" name="TextBox 4"/>
+          <p:cNvPr id="6" name="TextBox 5"/>
           <p:cNvSpPr txBox="1"/>
           <p:nvPr/>
         </p:nvSpPr>
@@ -6016,7 +8456,7 @@
             <a:avLst/>
           </a:prstGeom>
           <a:solidFill>
-            <a:srgbClr val="0F172A"/>
+            <a:srgbClr val="0B2447"/>
           </a:solidFill>
           <a:ln>
             <a:noFill/>
@@ -6060,7 +8500,7 @@
             <a:avLst/>
           </a:prstGeom>
           <a:solidFill>
-            <a:srgbClr val="EA580C"/>
+            <a:srgbClr val="E4002B"/>
           </a:solidFill>
           <a:ln>
             <a:noFill/>
@@ -6147,13 +8587,13 @@
           <a:p>
             <a:pPr>
               <a:spcBef>
-                <a:spcPts val="1400"/>
+                <a:spcPts val="1000"/>
               </a:spcBef>
             </a:pPr>
             <a:r>
-              <a:rPr sz="2000" b="0" i="0">
-                <a:solidFill>
-                  <a:srgbClr val="0F172A"/>
+              <a:rPr sz="1700" b="0" i="0">
+                <a:solidFill>
+                  <a:srgbClr val="0B2447"/>
                 </a:solidFill>
                 <a:latin typeface="Calibri"/>
               </a:rPr>
@@ -6163,145 +8603,177 @@
           <a:p>
             <a:pPr>
               <a:spcBef>
-                <a:spcPts val="1400"/>
+                <a:spcPts val="1000"/>
               </a:spcBef>
             </a:pPr>
             <a:r>
-              <a:rPr sz="2000" b="0" i="0">
-                <a:solidFill>
-                  <a:srgbClr val="0F172A"/>
-                </a:solidFill>
-                <a:latin typeface="Calibri"/>
-              </a:rPr>
-              <a:t>•  2. Approach — end-to-end pipeline, 9 phases</a:t>
+              <a:rPr sz="1700" b="0" i="0">
+                <a:solidFill>
+                  <a:srgbClr val="0B2447"/>
+                </a:solidFill>
+                <a:latin typeface="Calibri"/>
+              </a:rPr>
+              <a:t>•  2. In plain English — the 60-second version</a:t>
             </a:r>
           </a:p>
           <a:p>
             <a:pPr>
               <a:spcBef>
-                <a:spcPts val="1400"/>
+                <a:spcPts val="1000"/>
               </a:spcBef>
             </a:pPr>
             <a:r>
-              <a:rPr sz="2000" b="0" i="0">
-                <a:solidFill>
-                  <a:srgbClr val="0F172A"/>
-                </a:solidFill>
-                <a:latin typeface="Calibri"/>
-              </a:rPr>
-              <a:t>•  3. Synthetic data &amp; the deterioration index</a:t>
+              <a:rPr sz="1700" b="0" i="0">
+                <a:solidFill>
+                  <a:srgbClr val="0B2447"/>
+                </a:solidFill>
+                <a:latin typeface="Calibri"/>
+              </a:rPr>
+              <a:t>•  3. Approach — end-to-end pipeline, 9 phases</a:t>
             </a:r>
           </a:p>
           <a:p>
             <a:pPr>
               <a:spcBef>
-                <a:spcPts val="1400"/>
+                <a:spcPts val="1000"/>
               </a:spcBef>
             </a:pPr>
             <a:r>
-              <a:rPr sz="2000" b="0" i="0">
-                <a:solidFill>
-                  <a:srgbClr val="0F172A"/>
-                </a:solidFill>
-                <a:latin typeface="Calibri"/>
-              </a:rPr>
-              <a:t>•  4. Feature engineering — 5 signal groups</a:t>
+              <a:rPr sz="1700" b="0" i="0">
+                <a:solidFill>
+                  <a:srgbClr val="0B2447"/>
+                </a:solidFill>
+                <a:latin typeface="Calibri"/>
+              </a:rPr>
+              <a:t>•  4. Synthetic data &amp; the deterioration index</a:t>
             </a:r>
           </a:p>
           <a:p>
             <a:pPr>
               <a:spcBef>
-                <a:spcPts val="1400"/>
+                <a:spcPts val="1000"/>
               </a:spcBef>
             </a:pPr>
             <a:r>
-              <a:rPr sz="2000" b="0" i="0">
-                <a:solidFill>
-                  <a:srgbClr val="0F172A"/>
-                </a:solidFill>
-                <a:latin typeface="Calibri"/>
-              </a:rPr>
-              <a:t>•  5. Model results — baseline → tuned core model</a:t>
+              <a:rPr sz="1700" b="0" i="0">
+                <a:solidFill>
+                  <a:srgbClr val="0B2447"/>
+                </a:solidFill>
+                <a:latin typeface="Calibri"/>
+              </a:rPr>
+              <a:t>•  5. Feature engineering — 5 signal groups</a:t>
             </a:r>
           </a:p>
           <a:p>
             <a:pPr>
               <a:spcBef>
-                <a:spcPts val="1400"/>
+                <a:spcPts val="1000"/>
               </a:spcBef>
             </a:pPr>
             <a:r>
-              <a:rPr sz="2000" b="0" i="0">
-                <a:solidFill>
-                  <a:srgbClr val="0F172A"/>
-                </a:solidFill>
-                <a:latin typeface="Calibri"/>
-              </a:rPr>
-              <a:t>•  6. Explainability — SHAP reason codes</a:t>
+              <a:rPr sz="1700" b="0" i="0">
+                <a:solidFill>
+                  <a:srgbClr val="0B2447"/>
+                </a:solidFill>
+                <a:latin typeface="Calibri"/>
+              </a:rPr>
+              <a:t>•  6. Model results — baseline → tuned core model</a:t>
             </a:r>
           </a:p>
           <a:p>
             <a:pPr>
               <a:spcBef>
-                <a:spcPts val="1400"/>
+                <a:spcPts val="1000"/>
               </a:spcBef>
             </a:pPr>
             <a:r>
-              <a:rPr sz="2000" b="0" i="0">
-                <a:solidFill>
-                  <a:srgbClr val="0F172A"/>
-                </a:solidFill>
-                <a:latin typeface="Calibri"/>
-              </a:rPr>
-              <a:t>•  7. Risk sizing &amp; actions — PFaR + RM recommendations</a:t>
+              <a:rPr sz="1700" b="0" i="0">
+                <a:solidFill>
+                  <a:srgbClr val="0B2447"/>
+                </a:solidFill>
+                <a:latin typeface="Calibri"/>
+              </a:rPr>
+              <a:t>•  7. Explainability — SHAP reason codes</a:t>
             </a:r>
           </a:p>
           <a:p>
             <a:pPr>
               <a:spcBef>
-                <a:spcPts val="1400"/>
+                <a:spcPts val="1000"/>
               </a:spcBef>
             </a:pPr>
             <a:r>
-              <a:rPr sz="2000" b="0" i="0">
-                <a:solidFill>
-                  <a:srgbClr val="0F172A"/>
-                </a:solidFill>
-                <a:latin typeface="Calibri"/>
-              </a:rPr>
-              <a:t>•  8. Survival analysis — estimating WHEN, not just IF</a:t>
+              <a:rPr sz="1700" b="0" i="0">
+                <a:solidFill>
+                  <a:srgbClr val="0B2447"/>
+                </a:solidFill>
+                <a:latin typeface="Calibri"/>
+              </a:rPr>
+              <a:t>•  8. Risk sizing &amp; actions — PFaR + RM recommendations</a:t>
             </a:r>
           </a:p>
           <a:p>
             <a:pPr>
               <a:spcBef>
-                <a:spcPts val="1400"/>
+                <a:spcPts val="1000"/>
               </a:spcBef>
             </a:pPr>
             <a:r>
-              <a:rPr sz="2000" b="0" i="0">
-                <a:solidFill>
-                  <a:srgbClr val="0F172A"/>
-                </a:solidFill>
-                <a:latin typeface="Calibri"/>
-              </a:rPr>
-              <a:t>•  9. Graph feature experiment — an honest negative result</a:t>
+              <a:rPr sz="1700" b="0" i="0">
+                <a:solidFill>
+                  <a:srgbClr val="0B2447"/>
+                </a:solidFill>
+                <a:latin typeface="Calibri"/>
+              </a:rPr>
+              <a:t>•  9. Survival analysis — estimating WHEN, not just IF</a:t>
             </a:r>
           </a:p>
           <a:p>
             <a:pPr>
               <a:spcBef>
-                <a:spcPts val="1400"/>
+                <a:spcPts val="1000"/>
               </a:spcBef>
             </a:pPr>
             <a:r>
-              <a:rPr sz="2000" b="0" i="0">
-                <a:solidFill>
-                  <a:srgbClr val="0F172A"/>
-                </a:solidFill>
-                <a:latin typeface="Calibri"/>
-              </a:rPr>
-              <a:t>•  10. The dashboard, limitations, and path to production</a:t>
+              <a:rPr sz="1700" b="0" i="0">
+                <a:solidFill>
+                  <a:srgbClr val="0B2447"/>
+                </a:solidFill>
+                <a:latin typeface="Calibri"/>
+              </a:rPr>
+              <a:t>•  10. Graph feature experiment — an honest negative result</a:t>
+            </a:r>
+          </a:p>
+          <a:p>
+            <a:pPr>
+              <a:spcBef>
+                <a:spcPts val="1000"/>
+              </a:spcBef>
+            </a:pPr>
+            <a:r>
+              <a:rPr sz="1700" b="0" i="0">
+                <a:solidFill>
+                  <a:srgbClr val="0B2447"/>
+                </a:solidFill>
+                <a:latin typeface="Calibri"/>
+              </a:rPr>
+              <a:t>•  11. The dashboard</a:t>
+            </a:r>
+          </a:p>
+          <a:p>
+            <a:pPr>
+              <a:spcBef>
+                <a:spcPts val="1000"/>
+              </a:spcBef>
+            </a:pPr>
+            <a:r>
+              <a:rPr sz="1700" b="0" i="0">
+                <a:solidFill>
+                  <a:srgbClr val="0B2447"/>
+                </a:solidFill>
+                <a:latin typeface="Calibri"/>
+              </a:rPr>
+              <a:t>•  12. Why this matters for HDFC, and what's next</a:t>
             </a:r>
           </a:p>
         </p:txBody>
@@ -6452,7 +8924,7 @@
             <a:avLst/>
           </a:prstGeom>
           <a:solidFill>
-            <a:srgbClr val="0F172A"/>
+            <a:srgbClr val="0B2447"/>
           </a:solidFill>
           <a:ln>
             <a:noFill/>
@@ -6496,7 +8968,7 @@
             <a:avLst/>
           </a:prstGeom>
           <a:solidFill>
-            <a:srgbClr val="EA580C"/>
+            <a:srgbClr val="E4002B"/>
           </a:solidFill>
           <a:ln>
             <a:noFill/>
@@ -6550,7 +9022,7 @@
             <a:r>
               <a:rPr sz="1200" b="1" i="0">
                 <a:solidFill>
-                  <a:srgbClr val="7DD3FC"/>
+                  <a:srgbClr val="FFC1CC"/>
                 </a:solidFill>
                 <a:latin typeface="Calibri"/>
               </a:rPr>
@@ -6600,7 +9072,7 @@
             <a:r>
               <a:rPr sz="1900" b="1" i="0">
                 <a:solidFill>
-                  <a:srgbClr val="155E75"/>
+                  <a:srgbClr val="B3001F"/>
                 </a:solidFill>
                 <a:latin typeface="Calibri"/>
               </a:rPr>
@@ -6609,7 +9081,7 @@
             <a:r>
               <a:rPr sz="1900" b="0" i="0">
                 <a:solidFill>
-                  <a:srgbClr val="0F172A"/>
+                  <a:srgbClr val="0B2447"/>
                 </a:solidFill>
                 <a:latin typeface="Calibri"/>
               </a:rPr>
@@ -6625,7 +9097,7 @@
             <a:r>
               <a:rPr sz="1900" b="1" i="0">
                 <a:solidFill>
-                  <a:srgbClr val="155E75"/>
+                  <a:srgbClr val="B3001F"/>
                 </a:solidFill>
                 <a:latin typeface="Calibri"/>
               </a:rPr>
@@ -6634,7 +9106,7 @@
             <a:r>
               <a:rPr sz="1900" b="0" i="0">
                 <a:solidFill>
-                  <a:srgbClr val="0F172A"/>
+                  <a:srgbClr val="0B2447"/>
                 </a:solidFill>
                 <a:latin typeface="Calibri"/>
               </a:rPr>
@@ -6650,7 +9122,7 @@
             <a:r>
               <a:rPr sz="1900" b="1" i="0">
                 <a:solidFill>
-                  <a:srgbClr val="155E75"/>
+                  <a:srgbClr val="B3001F"/>
                 </a:solidFill>
                 <a:latin typeface="Calibri"/>
               </a:rPr>
@@ -6659,7 +9131,7 @@
             <a:r>
               <a:rPr sz="1900" b="0" i="0">
                 <a:solidFill>
-                  <a:srgbClr val="0F172A"/>
+                  <a:srgbClr val="0B2447"/>
                 </a:solidFill>
                 <a:latin typeface="Calibri"/>
               </a:rPr>
@@ -6814,7 +9286,7 @@
             <a:avLst/>
           </a:prstGeom>
           <a:solidFill>
-            <a:srgbClr val="0F172A"/>
+            <a:srgbClr val="0B2447"/>
           </a:solidFill>
           <a:ln>
             <a:noFill/>
@@ -6858,7 +9330,7 @@
             <a:avLst/>
           </a:prstGeom>
           <a:solidFill>
-            <a:srgbClr val="EA580C"/>
+            <a:srgbClr val="E4002B"/>
           </a:solidFill>
           <a:ln>
             <a:noFill/>
@@ -6912,11 +9384,11 @@
             <a:r>
               <a:rPr sz="1200" b="1" i="0">
                 <a:solidFill>
-                  <a:srgbClr val="7DD3FC"/>
-                </a:solidFill>
-                <a:latin typeface="Calibri"/>
-              </a:rPr>
-              <a:t>9 PHASES, ONE PIPELINE</a:t>
+                  <a:srgbClr val="FFC1CC"/>
+                </a:solidFill>
+                <a:latin typeface="Calibri"/>
+              </a:rPr>
+              <a:t>SAME IDEA, NO JARGON — THE 60-SECOND VERSION</a:t>
             </a:r>
           </a:p>
           <a:p>
@@ -6927,27 +9399,61 @@
                 </a:solidFill>
                 <a:latin typeface="Calibri"/>
               </a:rPr>
-              <a:t>End-to-End Approach</a:t>
-            </a:r>
-          </a:p>
-        </p:txBody>
-      </p:sp>
-      <p:sp>
-        <p:nvSpPr>
-          <p:cNvPr id="6" name="Rounded Rectangle 5"/>
+              <a:t>In Plain English</a:t>
+            </a:r>
+          </a:p>
+        </p:txBody>
+      </p:sp>
+      <p:sp>
+        <p:nvSpPr>
+          <p:cNvPr id="6" name="TextBox 5"/>
+          <p:cNvSpPr txBox="1"/>
+          <p:nvPr/>
+        </p:nvSpPr>
+        <p:spPr>
+          <a:xfrm>
+            <a:off x="640080" y="1325880"/>
+            <a:ext cx="10881360" cy="914400"/>
+          </a:xfrm>
+          <a:prstGeom prst="rect">
+            <a:avLst/>
+          </a:prstGeom>
+          <a:noFill/>
+        </p:spPr>
+        <p:txBody>
+          <a:bodyPr wrap="square">
+            <a:spAutoFit/>
+          </a:bodyPr>
+          <a:lstStyle/>
+          <a:p>
+            <a:r>
+              <a:rPr sz="1700" b="0" i="1">
+                <a:solidFill>
+                  <a:srgbClr val="0B2447"/>
+                </a:solidFill>
+                <a:latin typeface="Calibri"/>
+              </a:rPr>
+              <a:t>Imagine a company banks with HDFC. They don't close the account — they just quietly start routing payments, salaries, and trade deals through a rival bank instead. By the time the balance visibly drops, they're already mostly gone.</a:t>
+            </a:r>
+          </a:p>
+        </p:txBody>
+      </p:sp>
+      <p:sp>
+        <p:nvSpPr>
+          <p:cNvPr id="7" name="Rounded Rectangle 6"/>
           <p:cNvSpPr/>
           <p:nvPr/>
         </p:nvSpPr>
         <p:spPr>
           <a:xfrm>
-            <a:off x="777240" y="1554480"/>
-            <a:ext cx="3383280" cy="1051560"/>
+            <a:off x="640080" y="2514600"/>
+            <a:ext cx="3413760" cy="2103120"/>
           </a:xfrm>
           <a:prstGeom prst="roundRect">
             <a:avLst/>
           </a:prstGeom>
           <a:solidFill>
-            <a:srgbClr val="155E75"/>
+            <a:srgbClr val="0B2447"/>
           </a:solidFill>
           <a:ln>
             <a:noFill/>
@@ -6969,47 +9475,54 @@
           </a:fontRef>
         </p:style>
         <p:txBody>
-          <a:bodyPr rtlCol="0" anchor="ctr" wrap="square"/>
+          <a:bodyPr rtlCol="0" anchor="ctr" wrap="square" lIns="127000" rIns="127000"/>
           <a:lstStyle/>
           <a:p>
             <a:pPr algn="ctr"/>
             <a:r>
-              <a:rPr sz="1500" b="1" i="0">
+              <a:rPr sz="1900" b="1" i="0">
                 <a:solidFill>
                   <a:srgbClr val="FFFFFF"/>
                 </a:solidFill>
                 <a:latin typeface="Calibri"/>
               </a:rPr>
-              <a:t>1. </a:t>
-            </a:r>
-            <a:r>
-              <a:rPr sz="1500" b="1" i="0">
-                <a:solidFill>
-                  <a:srgbClr val="FFFFFF"/>
-                </a:solidFill>
-                <a:latin typeface="Calibri"/>
-              </a:rPr>
-              <a:t>Synthetic Data</a:t>
-            </a:r>
-          </a:p>
-        </p:txBody>
-      </p:sp>
-      <p:sp>
-        <p:nvSpPr>
-          <p:cNvPr id="7" name="Rounded Rectangle 6"/>
+              <a:t>1. WATCH</a:t>
+            </a:r>
+          </a:p>
+          <a:p>
+            <a:pPr algn="ctr">
+              <a:spcBef>
+                <a:spcPts val="600"/>
+              </a:spcBef>
+            </a:pPr>
+            <a:r>
+              <a:rPr sz="1300" b="0" i="0">
+                <a:solidFill>
+                  <a:srgbClr val="E2E8F0"/>
+                </a:solidFill>
+                <a:latin typeface="Calibri"/>
+              </a:rPr>
+              <a:t>Every month, compare each customer's recent behavior to their own history and to similar peers.</a:t>
+            </a:r>
+          </a:p>
+        </p:txBody>
+      </p:sp>
+      <p:sp>
+        <p:nvSpPr>
+          <p:cNvPr id="8" name="Rounded Rectangle 7"/>
           <p:cNvSpPr/>
           <p:nvPr/>
         </p:nvSpPr>
         <p:spPr>
           <a:xfrm>
-            <a:off x="4434840" y="1554480"/>
-            <a:ext cx="3383280" cy="1051560"/>
+            <a:off x="4373880" y="2514600"/>
+            <a:ext cx="3413760" cy="2103120"/>
           </a:xfrm>
           <a:prstGeom prst="roundRect">
             <a:avLst/>
           </a:prstGeom>
           <a:solidFill>
-            <a:srgbClr val="0891B2"/>
+            <a:srgbClr val="B3001F"/>
           </a:solidFill>
           <a:ln>
             <a:noFill/>
@@ -7031,47 +9544,54 @@
           </a:fontRef>
         </p:style>
         <p:txBody>
-          <a:bodyPr rtlCol="0" anchor="ctr" wrap="square"/>
+          <a:bodyPr rtlCol="0" anchor="ctr" wrap="square" lIns="127000" rIns="127000"/>
           <a:lstStyle/>
           <a:p>
             <a:pPr algn="ctr"/>
             <a:r>
-              <a:rPr sz="1500" b="1" i="0">
+              <a:rPr sz="1900" b="1" i="0">
                 <a:solidFill>
                   <a:srgbClr val="FFFFFF"/>
                 </a:solidFill>
                 <a:latin typeface="Calibri"/>
               </a:rPr>
-              <a:t>2. </a:t>
-            </a:r>
-            <a:r>
-              <a:rPr sz="1500" b="1" i="0">
-                <a:solidFill>
-                  <a:srgbClr val="FFFFFF"/>
-                </a:solidFill>
-                <a:latin typeface="Calibri"/>
-              </a:rPr>
-              <a:t>Labeling &amp; Features</a:t>
-            </a:r>
-          </a:p>
-        </p:txBody>
-      </p:sp>
-      <p:sp>
-        <p:nvSpPr>
-          <p:cNvPr id="8" name="Rounded Rectangle 7"/>
+              <a:t>2. EXPLAIN</a:t>
+            </a:r>
+          </a:p>
+          <a:p>
+            <a:pPr algn="ctr">
+              <a:spcBef>
+                <a:spcPts val="600"/>
+              </a:spcBef>
+            </a:pPr>
+            <a:r>
+              <a:rPr sz="1300" b="0" i="0">
+                <a:solidFill>
+                  <a:srgbClr val="E2E8F0"/>
+                </a:solidFill>
+                <a:latin typeface="Calibri"/>
+              </a:rPr>
+              <a:t>If something looks like quiet drifting-away, say exactly which behaviors are driving that — in plain English.</a:t>
+            </a:r>
+          </a:p>
+        </p:txBody>
+      </p:sp>
+      <p:sp>
+        <p:nvSpPr>
+          <p:cNvPr id="9" name="Rounded Rectangle 8"/>
           <p:cNvSpPr/>
           <p:nvPr/>
         </p:nvSpPr>
         <p:spPr>
           <a:xfrm>
-            <a:off x="8092440" y="1554480"/>
-            <a:ext cx="3383280" cy="1051560"/>
+            <a:off x="8107680" y="2514600"/>
+            <a:ext cx="3413760" cy="2103120"/>
           </a:xfrm>
           <a:prstGeom prst="roundRect">
             <a:avLst/>
           </a:prstGeom>
           <a:solidFill>
-            <a:srgbClr val="155E75"/>
+            <a:srgbClr val="19376D"/>
           </a:solidFill>
           <a:ln>
             <a:noFill/>
@@ -7093,412 +9613,47 @@
           </a:fontRef>
         </p:style>
         <p:txBody>
-          <a:bodyPr rtlCol="0" anchor="ctr" wrap="square"/>
+          <a:bodyPr rtlCol="0" anchor="ctr" wrap="square" lIns="127000" rIns="127000"/>
           <a:lstStyle/>
           <a:p>
             <a:pPr algn="ctr"/>
             <a:r>
-              <a:rPr sz="1500" b="1" i="0">
+              <a:rPr sz="1900" b="1" i="0">
                 <a:solidFill>
                   <a:srgbClr val="FFFFFF"/>
                 </a:solidFill>
                 <a:latin typeface="Calibri"/>
               </a:rPr>
-              <a:t>3. </a:t>
-            </a:r>
-            <a:r>
-              <a:rPr sz="1500" b="1" i="0">
-                <a:solidFill>
-                  <a:srgbClr val="FFFFFF"/>
-                </a:solidFill>
-                <a:latin typeface="Calibri"/>
-              </a:rPr>
-              <a:t>Baseline Model</a:t>
-            </a:r>
-          </a:p>
-        </p:txBody>
-      </p:sp>
-      <p:sp>
-        <p:nvSpPr>
-          <p:cNvPr id="9" name="Rounded Rectangle 8"/>
-          <p:cNvSpPr/>
-          <p:nvPr/>
-        </p:nvSpPr>
-        <p:spPr>
-          <a:xfrm>
-            <a:off x="777240" y="2926080"/>
-            <a:ext cx="3383280" cy="1051560"/>
-          </a:xfrm>
-          <a:prstGeom prst="roundRect">
-            <a:avLst/>
-          </a:prstGeom>
-          <a:solidFill>
-            <a:srgbClr val="0891B2"/>
-          </a:solidFill>
-          <a:ln>
-            <a:noFill/>
-          </a:ln>
-          <a:effectLst/>
-        </p:spPr>
-        <p:style>
-          <a:lnRef idx="1">
-            <a:schemeClr val="accent1"/>
-          </a:lnRef>
-          <a:fillRef idx="3">
-            <a:schemeClr val="accent1"/>
-          </a:fillRef>
-          <a:effectRef idx="2">
-            <a:schemeClr val="accent1"/>
-          </a:effectRef>
-          <a:fontRef idx="minor">
-            <a:schemeClr val="lt1"/>
-          </a:fontRef>
-        </p:style>
-        <p:txBody>
-          <a:bodyPr rtlCol="0" anchor="ctr" wrap="square"/>
-          <a:lstStyle/>
-          <a:p>
-            <a:pPr algn="ctr"/>
-            <a:r>
-              <a:rPr sz="1500" b="1" i="0">
-                <a:solidFill>
-                  <a:srgbClr val="FFFFFF"/>
-                </a:solidFill>
-                <a:latin typeface="Calibri"/>
-              </a:rPr>
-              <a:t>4. </a:t>
-            </a:r>
-            <a:r>
-              <a:rPr sz="1500" b="1" i="0">
-                <a:solidFill>
-                  <a:srgbClr val="FFFFFF"/>
-                </a:solidFill>
-                <a:latin typeface="Calibri"/>
-              </a:rPr>
-              <a:t>Tuned Core Model</a:t>
-            </a:r>
-          </a:p>
-        </p:txBody>
-      </p:sp>
-      <p:sp>
-        <p:nvSpPr>
-          <p:cNvPr id="10" name="Rounded Rectangle 9"/>
-          <p:cNvSpPr/>
-          <p:nvPr/>
-        </p:nvSpPr>
-        <p:spPr>
-          <a:xfrm>
-            <a:off x="4434840" y="2926080"/>
-            <a:ext cx="3383280" cy="1051560"/>
-          </a:xfrm>
-          <a:prstGeom prst="roundRect">
-            <a:avLst/>
-          </a:prstGeom>
-          <a:solidFill>
-            <a:srgbClr val="155E75"/>
-          </a:solidFill>
-          <a:ln>
-            <a:noFill/>
-          </a:ln>
-          <a:effectLst/>
-        </p:spPr>
-        <p:style>
-          <a:lnRef idx="1">
-            <a:schemeClr val="accent1"/>
-          </a:lnRef>
-          <a:fillRef idx="3">
-            <a:schemeClr val="accent1"/>
-          </a:fillRef>
-          <a:effectRef idx="2">
-            <a:schemeClr val="accent1"/>
-          </a:effectRef>
-          <a:fontRef idx="minor">
-            <a:schemeClr val="lt1"/>
-          </a:fontRef>
-        </p:style>
-        <p:txBody>
-          <a:bodyPr rtlCol="0" anchor="ctr" wrap="square"/>
-          <a:lstStyle/>
-          <a:p>
-            <a:pPr algn="ctr"/>
-            <a:r>
-              <a:rPr sz="1500" b="1" i="0">
-                <a:solidFill>
-                  <a:srgbClr val="FFFFFF"/>
-                </a:solidFill>
-                <a:latin typeface="Calibri"/>
-              </a:rPr>
-              <a:t>5. </a:t>
-            </a:r>
-            <a:r>
-              <a:rPr sz="1500" b="1" i="0">
-                <a:solidFill>
-                  <a:srgbClr val="FFFFFF"/>
-                </a:solidFill>
-                <a:latin typeface="Calibri"/>
-              </a:rPr>
-              <a:t>Explainability (SHAP)</a:t>
-            </a:r>
-          </a:p>
-        </p:txBody>
-      </p:sp>
-      <p:sp>
-        <p:nvSpPr>
-          <p:cNvPr id="11" name="Rounded Rectangle 10"/>
-          <p:cNvSpPr/>
-          <p:nvPr/>
-        </p:nvSpPr>
-        <p:spPr>
-          <a:xfrm>
-            <a:off x="8092440" y="2926080"/>
-            <a:ext cx="3383280" cy="1051560"/>
-          </a:xfrm>
-          <a:prstGeom prst="roundRect">
-            <a:avLst/>
-          </a:prstGeom>
-          <a:solidFill>
-            <a:srgbClr val="0891B2"/>
-          </a:solidFill>
-          <a:ln>
-            <a:noFill/>
-          </a:ln>
-          <a:effectLst/>
-        </p:spPr>
-        <p:style>
-          <a:lnRef idx="1">
-            <a:schemeClr val="accent1"/>
-          </a:lnRef>
-          <a:fillRef idx="3">
-            <a:schemeClr val="accent1"/>
-          </a:fillRef>
-          <a:effectRef idx="2">
-            <a:schemeClr val="accent1"/>
-          </a:effectRef>
-          <a:fontRef idx="minor">
-            <a:schemeClr val="lt1"/>
-          </a:fontRef>
-        </p:style>
-        <p:txBody>
-          <a:bodyPr rtlCol="0" anchor="ctr" wrap="square"/>
-          <a:lstStyle/>
-          <a:p>
-            <a:pPr algn="ctr"/>
-            <a:r>
-              <a:rPr sz="1500" b="1" i="0">
-                <a:solidFill>
-                  <a:srgbClr val="FFFFFF"/>
-                </a:solidFill>
-                <a:latin typeface="Calibri"/>
-              </a:rPr>
-              <a:t>6. </a:t>
-            </a:r>
-            <a:r>
-              <a:rPr sz="1500" b="1" i="0">
-                <a:solidFill>
-                  <a:srgbClr val="FFFFFF"/>
-                </a:solidFill>
-                <a:latin typeface="Calibri"/>
-              </a:rPr>
-              <a:t>PFaR + RM Actions</a:t>
-            </a:r>
-          </a:p>
-        </p:txBody>
-      </p:sp>
-      <p:sp>
-        <p:nvSpPr>
-          <p:cNvPr id="12" name="Rounded Rectangle 11"/>
-          <p:cNvSpPr/>
-          <p:nvPr/>
-        </p:nvSpPr>
-        <p:spPr>
-          <a:xfrm>
-            <a:off x="777240" y="4297680"/>
-            <a:ext cx="3383280" cy="1051560"/>
-          </a:xfrm>
-          <a:prstGeom prst="roundRect">
-            <a:avLst/>
-          </a:prstGeom>
-          <a:solidFill>
-            <a:srgbClr val="155E75"/>
-          </a:solidFill>
-          <a:ln>
-            <a:noFill/>
-          </a:ln>
-          <a:effectLst/>
-        </p:spPr>
-        <p:style>
-          <a:lnRef idx="1">
-            <a:schemeClr val="accent1"/>
-          </a:lnRef>
-          <a:fillRef idx="3">
-            <a:schemeClr val="accent1"/>
-          </a:fillRef>
-          <a:effectRef idx="2">
-            <a:schemeClr val="accent1"/>
-          </a:effectRef>
-          <a:fontRef idx="minor">
-            <a:schemeClr val="lt1"/>
-          </a:fontRef>
-        </p:style>
-        <p:txBody>
-          <a:bodyPr rtlCol="0" anchor="ctr" wrap="square"/>
-          <a:lstStyle/>
-          <a:p>
-            <a:pPr algn="ctr"/>
-            <a:r>
-              <a:rPr sz="1500" b="1" i="0">
-                <a:solidFill>
-                  <a:srgbClr val="FFFFFF"/>
-                </a:solidFill>
-                <a:latin typeface="Calibri"/>
-              </a:rPr>
-              <a:t>7. </a:t>
-            </a:r>
-            <a:r>
-              <a:rPr sz="1500" b="1" i="0">
-                <a:solidFill>
-                  <a:srgbClr val="FFFFFF"/>
-                </a:solidFill>
-                <a:latin typeface="Calibri"/>
-              </a:rPr>
-              <a:t>Survival Analysis</a:t>
-            </a:r>
-          </a:p>
-        </p:txBody>
-      </p:sp>
-      <p:sp>
-        <p:nvSpPr>
-          <p:cNvPr id="13" name="Rounded Rectangle 12"/>
-          <p:cNvSpPr/>
-          <p:nvPr/>
-        </p:nvSpPr>
-        <p:spPr>
-          <a:xfrm>
-            <a:off x="4434840" y="4297680"/>
-            <a:ext cx="3383280" cy="1051560"/>
-          </a:xfrm>
-          <a:prstGeom prst="roundRect">
-            <a:avLst/>
-          </a:prstGeom>
-          <a:solidFill>
-            <a:srgbClr val="0891B2"/>
-          </a:solidFill>
-          <a:ln>
-            <a:noFill/>
-          </a:ln>
-          <a:effectLst/>
-        </p:spPr>
-        <p:style>
-          <a:lnRef idx="1">
-            <a:schemeClr val="accent1"/>
-          </a:lnRef>
-          <a:fillRef idx="3">
-            <a:schemeClr val="accent1"/>
-          </a:fillRef>
-          <a:effectRef idx="2">
-            <a:schemeClr val="accent1"/>
-          </a:effectRef>
-          <a:fontRef idx="minor">
-            <a:schemeClr val="lt1"/>
-          </a:fontRef>
-        </p:style>
-        <p:txBody>
-          <a:bodyPr rtlCol="0" anchor="ctr" wrap="square"/>
-          <a:lstStyle/>
-          <a:p>
-            <a:pPr algn="ctr"/>
-            <a:r>
-              <a:rPr sz="1500" b="1" i="0">
-                <a:solidFill>
-                  <a:srgbClr val="FFFFFF"/>
-                </a:solidFill>
-                <a:latin typeface="Calibri"/>
-              </a:rPr>
-              <a:t>8. </a:t>
-            </a:r>
-            <a:r>
-              <a:rPr sz="1500" b="1" i="0">
-                <a:solidFill>
-                  <a:srgbClr val="FFFFFF"/>
-                </a:solidFill>
-                <a:latin typeface="Calibri"/>
-              </a:rPr>
-              <a:t>Graph Feature</a:t>
-            </a:r>
-          </a:p>
-        </p:txBody>
-      </p:sp>
-      <p:sp>
-        <p:nvSpPr>
-          <p:cNvPr id="14" name="Rounded Rectangle 13"/>
-          <p:cNvSpPr/>
-          <p:nvPr/>
-        </p:nvSpPr>
-        <p:spPr>
-          <a:xfrm>
-            <a:off x="8092440" y="4297680"/>
-            <a:ext cx="3383280" cy="1051560"/>
-          </a:xfrm>
-          <a:prstGeom prst="roundRect">
-            <a:avLst/>
-          </a:prstGeom>
-          <a:solidFill>
-            <a:srgbClr val="155E75"/>
-          </a:solidFill>
-          <a:ln>
-            <a:noFill/>
-          </a:ln>
-          <a:effectLst/>
-        </p:spPr>
-        <p:style>
-          <a:lnRef idx="1">
-            <a:schemeClr val="accent1"/>
-          </a:lnRef>
-          <a:fillRef idx="3">
-            <a:schemeClr val="accent1"/>
-          </a:fillRef>
-          <a:effectRef idx="2">
-            <a:schemeClr val="accent1"/>
-          </a:effectRef>
-          <a:fontRef idx="minor">
-            <a:schemeClr val="lt1"/>
-          </a:fontRef>
-        </p:style>
-        <p:txBody>
-          <a:bodyPr rtlCol="0" anchor="ctr" wrap="square"/>
-          <a:lstStyle/>
-          <a:p>
-            <a:pPr algn="ctr"/>
-            <a:r>
-              <a:rPr sz="1500" b="1" i="0">
-                <a:solidFill>
-                  <a:srgbClr val="FFFFFF"/>
-                </a:solidFill>
-                <a:latin typeface="Calibri"/>
-              </a:rPr>
-              <a:t>9. </a:t>
-            </a:r>
-            <a:r>
-              <a:rPr sz="1500" b="1" i="0">
-                <a:solidFill>
-                  <a:srgbClr val="FFFFFF"/>
-                </a:solidFill>
-                <a:latin typeface="Calibri"/>
-              </a:rPr>
-              <a:t>Dashboard</a:t>
-            </a:r>
-          </a:p>
-        </p:txBody>
-      </p:sp>
-      <p:sp>
-        <p:nvSpPr>
-          <p:cNvPr id="15" name="TextBox 14"/>
+              <a:t>3. ACT</a:t>
+            </a:r>
+          </a:p>
+          <a:p>
+            <a:pPr algn="ctr">
+              <a:spcBef>
+                <a:spcPts val="600"/>
+              </a:spcBef>
+            </a:pPr>
+            <a:r>
+              <a:rPr sz="1300" b="0" i="0">
+                <a:solidFill>
+                  <a:srgbClr val="E2E8F0"/>
+                </a:solidFill>
+                <a:latin typeface="Calibri"/>
+              </a:rPr>
+              <a:t>Estimate roughly when it'll get serious, size the ₹ at risk, and hand the RM one specific action.</a:t>
+            </a:r>
+          </a:p>
+        </p:txBody>
+      </p:sp>
+      <p:sp>
+        <p:nvSpPr>
+          <p:cNvPr id="10" name="TextBox 9"/>
           <p:cNvSpPr txBox="1"/>
           <p:nvPr/>
         </p:nvSpPr>
         <p:spPr>
           <a:xfrm>
-            <a:off x="640080" y="6400800"/>
+            <a:off x="640080" y="5029200"/>
             <a:ext cx="10881360" cy="365760"/>
           </a:xfrm>
           <a:prstGeom prst="rect">
@@ -7520,14 +9675,14 @@
                 </a:solidFill>
                 <a:latin typeface="Calibri"/>
               </a:rPr>
-              <a:t>Every stage reads/writes through src/config.py's file paths — a real data source swaps in at ONE seam, nothing downstream rebuilds.</a:t>
-            </a:r>
-          </a:p>
-        </p:txBody>
-      </p:sp>
-      <p:sp>
-        <p:nvSpPr>
-          <p:cNvPr id="16" name="TextBox 15"/>
+              <a:t>The rest of this deck is how each of those three steps was actually built and validated.</a:t>
+            </a:r>
+          </a:p>
+        </p:txBody>
+      </p:sp>
+      <p:sp>
+        <p:nvSpPr>
+          <p:cNvPr id="11" name="TextBox 10"/>
           <p:cNvSpPr txBox="1"/>
           <p:nvPr/>
         </p:nvSpPr>
@@ -7561,7 +9716,7 @@
       </p:sp>
       <p:sp>
         <p:nvSpPr>
-          <p:cNvPr id="17" name="TextBox 16"/>
+          <p:cNvPr id="12" name="TextBox 11"/>
           <p:cNvSpPr txBox="1"/>
           <p:nvPr/>
         </p:nvSpPr>
@@ -7671,7 +9826,7 @@
             <a:avLst/>
           </a:prstGeom>
           <a:solidFill>
-            <a:srgbClr val="0F172A"/>
+            <a:srgbClr val="0B2447"/>
           </a:solidFill>
           <a:ln>
             <a:noFill/>
@@ -7715,7 +9870,7 @@
             <a:avLst/>
           </a:prstGeom>
           <a:solidFill>
-            <a:srgbClr val="EA580C"/>
+            <a:srgbClr val="E4002B"/>
           </a:solidFill>
           <a:ln>
             <a:noFill/>
@@ -7769,11 +9924,11 @@
             <a:r>
               <a:rPr sz="1200" b="1" i="0">
                 <a:solidFill>
-                  <a:srgbClr val="7DD3FC"/>
-                </a:solidFill>
-                <a:latin typeface="Calibri"/>
-              </a:rPr>
-              <a:t>PHASE 1 — WITH HIDDEN GROUND TRUTH FOR VALIDATION</a:t>
+                  <a:srgbClr val="FFC1CC"/>
+                </a:solidFill>
+                <a:latin typeface="Calibri"/>
+              </a:rPr>
+              <a:t>9 PHASES, ONE PIPELINE</a:t>
             </a:r>
           </a:p>
           <a:p>
@@ -7784,44 +9939,578 @@
                 </a:solidFill>
                 <a:latin typeface="Calibri"/>
               </a:rPr>
-              <a:t>Synthetic Data: 4 Planted Cohorts</a:t>
-            </a:r>
-          </a:p>
-        </p:txBody>
-      </p:sp>
-      <p:pic>
-        <p:nvPicPr>
-          <p:cNvPr id="6" name="Picture 5" descr="amb_trajectory_by_cohort.png"/>
-          <p:cNvPicPr>
-            <a:picLocks noChangeAspect="1"/>
-          </p:cNvPicPr>
-          <p:nvPr/>
-        </p:nvPicPr>
-        <p:blipFill>
-          <a:blip r:embed="rId2"/>
-          <a:stretch>
-            <a:fillRect/>
-          </a:stretch>
-        </p:blipFill>
-        <p:spPr>
-          <a:xfrm>
-            <a:off x="2285847" y="1280160"/>
-            <a:ext cx="7620000" cy="4572000"/>
-          </a:xfrm>
-          <a:prstGeom prst="rect">
-            <a:avLst/>
-          </a:prstGeom>
-        </p:spPr>
-      </p:pic>
-      <p:sp>
-        <p:nvSpPr>
-          <p:cNvPr id="7" name="TextBox 6"/>
+              <a:t>End-to-End Approach</a:t>
+            </a:r>
+          </a:p>
+        </p:txBody>
+      </p:sp>
+      <p:sp>
+        <p:nvSpPr>
+          <p:cNvPr id="6" name="Rounded Rectangle 5"/>
+          <p:cNvSpPr/>
+          <p:nvPr/>
+        </p:nvSpPr>
+        <p:spPr>
+          <a:xfrm>
+            <a:off x="777240" y="1554480"/>
+            <a:ext cx="3383280" cy="1051560"/>
+          </a:xfrm>
+          <a:prstGeom prst="roundRect">
+            <a:avLst/>
+          </a:prstGeom>
+          <a:solidFill>
+            <a:srgbClr val="0B2447"/>
+          </a:solidFill>
+          <a:ln>
+            <a:noFill/>
+          </a:ln>
+          <a:effectLst/>
+        </p:spPr>
+        <p:style>
+          <a:lnRef idx="1">
+            <a:schemeClr val="accent1"/>
+          </a:lnRef>
+          <a:fillRef idx="3">
+            <a:schemeClr val="accent1"/>
+          </a:fillRef>
+          <a:effectRef idx="2">
+            <a:schemeClr val="accent1"/>
+          </a:effectRef>
+          <a:fontRef idx="minor">
+            <a:schemeClr val="lt1"/>
+          </a:fontRef>
+        </p:style>
+        <p:txBody>
+          <a:bodyPr rtlCol="0" anchor="ctr" wrap="square"/>
+          <a:lstStyle/>
+          <a:p>
+            <a:pPr algn="ctr"/>
+            <a:r>
+              <a:rPr sz="1500" b="1" i="0">
+                <a:solidFill>
+                  <a:srgbClr val="FFFFFF"/>
+                </a:solidFill>
+                <a:latin typeface="Calibri"/>
+              </a:rPr>
+              <a:t>1. </a:t>
+            </a:r>
+            <a:r>
+              <a:rPr sz="1500" b="1" i="0">
+                <a:solidFill>
+                  <a:srgbClr val="FFFFFF"/>
+                </a:solidFill>
+                <a:latin typeface="Calibri"/>
+              </a:rPr>
+              <a:t>Synthetic Data</a:t>
+            </a:r>
+          </a:p>
+        </p:txBody>
+      </p:sp>
+      <p:sp>
+        <p:nvSpPr>
+          <p:cNvPr id="7" name="Rounded Rectangle 6"/>
+          <p:cNvSpPr/>
+          <p:nvPr/>
+        </p:nvSpPr>
+        <p:spPr>
+          <a:xfrm>
+            <a:off x="4434840" y="1554480"/>
+            <a:ext cx="3383280" cy="1051560"/>
+          </a:xfrm>
+          <a:prstGeom prst="roundRect">
+            <a:avLst/>
+          </a:prstGeom>
+          <a:solidFill>
+            <a:srgbClr val="B3001F"/>
+          </a:solidFill>
+          <a:ln>
+            <a:noFill/>
+          </a:ln>
+          <a:effectLst/>
+        </p:spPr>
+        <p:style>
+          <a:lnRef idx="1">
+            <a:schemeClr val="accent1"/>
+          </a:lnRef>
+          <a:fillRef idx="3">
+            <a:schemeClr val="accent1"/>
+          </a:fillRef>
+          <a:effectRef idx="2">
+            <a:schemeClr val="accent1"/>
+          </a:effectRef>
+          <a:fontRef idx="minor">
+            <a:schemeClr val="lt1"/>
+          </a:fontRef>
+        </p:style>
+        <p:txBody>
+          <a:bodyPr rtlCol="0" anchor="ctr" wrap="square"/>
+          <a:lstStyle/>
+          <a:p>
+            <a:pPr algn="ctr"/>
+            <a:r>
+              <a:rPr sz="1500" b="1" i="0">
+                <a:solidFill>
+                  <a:srgbClr val="FFFFFF"/>
+                </a:solidFill>
+                <a:latin typeface="Calibri"/>
+              </a:rPr>
+              <a:t>2. </a:t>
+            </a:r>
+            <a:r>
+              <a:rPr sz="1500" b="1" i="0">
+                <a:solidFill>
+                  <a:srgbClr val="FFFFFF"/>
+                </a:solidFill>
+                <a:latin typeface="Calibri"/>
+              </a:rPr>
+              <a:t>Labeling &amp; Features</a:t>
+            </a:r>
+          </a:p>
+        </p:txBody>
+      </p:sp>
+      <p:sp>
+        <p:nvSpPr>
+          <p:cNvPr id="8" name="Rounded Rectangle 7"/>
+          <p:cNvSpPr/>
+          <p:nvPr/>
+        </p:nvSpPr>
+        <p:spPr>
+          <a:xfrm>
+            <a:off x="8092440" y="1554480"/>
+            <a:ext cx="3383280" cy="1051560"/>
+          </a:xfrm>
+          <a:prstGeom prst="roundRect">
+            <a:avLst/>
+          </a:prstGeom>
+          <a:solidFill>
+            <a:srgbClr val="0B2447"/>
+          </a:solidFill>
+          <a:ln>
+            <a:noFill/>
+          </a:ln>
+          <a:effectLst/>
+        </p:spPr>
+        <p:style>
+          <a:lnRef idx="1">
+            <a:schemeClr val="accent1"/>
+          </a:lnRef>
+          <a:fillRef idx="3">
+            <a:schemeClr val="accent1"/>
+          </a:fillRef>
+          <a:effectRef idx="2">
+            <a:schemeClr val="accent1"/>
+          </a:effectRef>
+          <a:fontRef idx="minor">
+            <a:schemeClr val="lt1"/>
+          </a:fontRef>
+        </p:style>
+        <p:txBody>
+          <a:bodyPr rtlCol="0" anchor="ctr" wrap="square"/>
+          <a:lstStyle/>
+          <a:p>
+            <a:pPr algn="ctr"/>
+            <a:r>
+              <a:rPr sz="1500" b="1" i="0">
+                <a:solidFill>
+                  <a:srgbClr val="FFFFFF"/>
+                </a:solidFill>
+                <a:latin typeface="Calibri"/>
+              </a:rPr>
+              <a:t>3. </a:t>
+            </a:r>
+            <a:r>
+              <a:rPr sz="1500" b="1" i="0">
+                <a:solidFill>
+                  <a:srgbClr val="FFFFFF"/>
+                </a:solidFill>
+                <a:latin typeface="Calibri"/>
+              </a:rPr>
+              <a:t>Baseline Model</a:t>
+            </a:r>
+          </a:p>
+        </p:txBody>
+      </p:sp>
+      <p:sp>
+        <p:nvSpPr>
+          <p:cNvPr id="9" name="Rounded Rectangle 8"/>
+          <p:cNvSpPr/>
+          <p:nvPr/>
+        </p:nvSpPr>
+        <p:spPr>
+          <a:xfrm>
+            <a:off x="777240" y="2926080"/>
+            <a:ext cx="3383280" cy="1051560"/>
+          </a:xfrm>
+          <a:prstGeom prst="roundRect">
+            <a:avLst/>
+          </a:prstGeom>
+          <a:solidFill>
+            <a:srgbClr val="B3001F"/>
+          </a:solidFill>
+          <a:ln>
+            <a:noFill/>
+          </a:ln>
+          <a:effectLst/>
+        </p:spPr>
+        <p:style>
+          <a:lnRef idx="1">
+            <a:schemeClr val="accent1"/>
+          </a:lnRef>
+          <a:fillRef idx="3">
+            <a:schemeClr val="accent1"/>
+          </a:fillRef>
+          <a:effectRef idx="2">
+            <a:schemeClr val="accent1"/>
+          </a:effectRef>
+          <a:fontRef idx="minor">
+            <a:schemeClr val="lt1"/>
+          </a:fontRef>
+        </p:style>
+        <p:txBody>
+          <a:bodyPr rtlCol="0" anchor="ctr" wrap="square"/>
+          <a:lstStyle/>
+          <a:p>
+            <a:pPr algn="ctr"/>
+            <a:r>
+              <a:rPr sz="1500" b="1" i="0">
+                <a:solidFill>
+                  <a:srgbClr val="FFFFFF"/>
+                </a:solidFill>
+                <a:latin typeface="Calibri"/>
+              </a:rPr>
+              <a:t>4. </a:t>
+            </a:r>
+            <a:r>
+              <a:rPr sz="1500" b="1" i="0">
+                <a:solidFill>
+                  <a:srgbClr val="FFFFFF"/>
+                </a:solidFill>
+                <a:latin typeface="Calibri"/>
+              </a:rPr>
+              <a:t>Tuned Core Model</a:t>
+            </a:r>
+          </a:p>
+        </p:txBody>
+      </p:sp>
+      <p:sp>
+        <p:nvSpPr>
+          <p:cNvPr id="10" name="Rounded Rectangle 9"/>
+          <p:cNvSpPr/>
+          <p:nvPr/>
+        </p:nvSpPr>
+        <p:spPr>
+          <a:xfrm>
+            <a:off x="4434840" y="2926080"/>
+            <a:ext cx="3383280" cy="1051560"/>
+          </a:xfrm>
+          <a:prstGeom prst="roundRect">
+            <a:avLst/>
+          </a:prstGeom>
+          <a:solidFill>
+            <a:srgbClr val="0B2447"/>
+          </a:solidFill>
+          <a:ln>
+            <a:noFill/>
+          </a:ln>
+          <a:effectLst/>
+        </p:spPr>
+        <p:style>
+          <a:lnRef idx="1">
+            <a:schemeClr val="accent1"/>
+          </a:lnRef>
+          <a:fillRef idx="3">
+            <a:schemeClr val="accent1"/>
+          </a:fillRef>
+          <a:effectRef idx="2">
+            <a:schemeClr val="accent1"/>
+          </a:effectRef>
+          <a:fontRef idx="minor">
+            <a:schemeClr val="lt1"/>
+          </a:fontRef>
+        </p:style>
+        <p:txBody>
+          <a:bodyPr rtlCol="0" anchor="ctr" wrap="square"/>
+          <a:lstStyle/>
+          <a:p>
+            <a:pPr algn="ctr"/>
+            <a:r>
+              <a:rPr sz="1500" b="1" i="0">
+                <a:solidFill>
+                  <a:srgbClr val="FFFFFF"/>
+                </a:solidFill>
+                <a:latin typeface="Calibri"/>
+              </a:rPr>
+              <a:t>5. </a:t>
+            </a:r>
+            <a:r>
+              <a:rPr sz="1500" b="1" i="0">
+                <a:solidFill>
+                  <a:srgbClr val="FFFFFF"/>
+                </a:solidFill>
+                <a:latin typeface="Calibri"/>
+              </a:rPr>
+              <a:t>Explainability (SHAP)</a:t>
+            </a:r>
+          </a:p>
+        </p:txBody>
+      </p:sp>
+      <p:sp>
+        <p:nvSpPr>
+          <p:cNvPr id="11" name="Rounded Rectangle 10"/>
+          <p:cNvSpPr/>
+          <p:nvPr/>
+        </p:nvSpPr>
+        <p:spPr>
+          <a:xfrm>
+            <a:off x="8092440" y="2926080"/>
+            <a:ext cx="3383280" cy="1051560"/>
+          </a:xfrm>
+          <a:prstGeom prst="roundRect">
+            <a:avLst/>
+          </a:prstGeom>
+          <a:solidFill>
+            <a:srgbClr val="B3001F"/>
+          </a:solidFill>
+          <a:ln>
+            <a:noFill/>
+          </a:ln>
+          <a:effectLst/>
+        </p:spPr>
+        <p:style>
+          <a:lnRef idx="1">
+            <a:schemeClr val="accent1"/>
+          </a:lnRef>
+          <a:fillRef idx="3">
+            <a:schemeClr val="accent1"/>
+          </a:fillRef>
+          <a:effectRef idx="2">
+            <a:schemeClr val="accent1"/>
+          </a:effectRef>
+          <a:fontRef idx="minor">
+            <a:schemeClr val="lt1"/>
+          </a:fontRef>
+        </p:style>
+        <p:txBody>
+          <a:bodyPr rtlCol="0" anchor="ctr" wrap="square"/>
+          <a:lstStyle/>
+          <a:p>
+            <a:pPr algn="ctr"/>
+            <a:r>
+              <a:rPr sz="1500" b="1" i="0">
+                <a:solidFill>
+                  <a:srgbClr val="FFFFFF"/>
+                </a:solidFill>
+                <a:latin typeface="Calibri"/>
+              </a:rPr>
+              <a:t>6. </a:t>
+            </a:r>
+            <a:r>
+              <a:rPr sz="1500" b="1" i="0">
+                <a:solidFill>
+                  <a:srgbClr val="FFFFFF"/>
+                </a:solidFill>
+                <a:latin typeface="Calibri"/>
+              </a:rPr>
+              <a:t>PFaR + RM Actions</a:t>
+            </a:r>
+          </a:p>
+        </p:txBody>
+      </p:sp>
+      <p:sp>
+        <p:nvSpPr>
+          <p:cNvPr id="12" name="Rounded Rectangle 11"/>
+          <p:cNvSpPr/>
+          <p:nvPr/>
+        </p:nvSpPr>
+        <p:spPr>
+          <a:xfrm>
+            <a:off x="777240" y="4297680"/>
+            <a:ext cx="3383280" cy="1051560"/>
+          </a:xfrm>
+          <a:prstGeom prst="roundRect">
+            <a:avLst/>
+          </a:prstGeom>
+          <a:solidFill>
+            <a:srgbClr val="0B2447"/>
+          </a:solidFill>
+          <a:ln>
+            <a:noFill/>
+          </a:ln>
+          <a:effectLst/>
+        </p:spPr>
+        <p:style>
+          <a:lnRef idx="1">
+            <a:schemeClr val="accent1"/>
+          </a:lnRef>
+          <a:fillRef idx="3">
+            <a:schemeClr val="accent1"/>
+          </a:fillRef>
+          <a:effectRef idx="2">
+            <a:schemeClr val="accent1"/>
+          </a:effectRef>
+          <a:fontRef idx="minor">
+            <a:schemeClr val="lt1"/>
+          </a:fontRef>
+        </p:style>
+        <p:txBody>
+          <a:bodyPr rtlCol="0" anchor="ctr" wrap="square"/>
+          <a:lstStyle/>
+          <a:p>
+            <a:pPr algn="ctr"/>
+            <a:r>
+              <a:rPr sz="1500" b="1" i="0">
+                <a:solidFill>
+                  <a:srgbClr val="FFFFFF"/>
+                </a:solidFill>
+                <a:latin typeface="Calibri"/>
+              </a:rPr>
+              <a:t>7. </a:t>
+            </a:r>
+            <a:r>
+              <a:rPr sz="1500" b="1" i="0">
+                <a:solidFill>
+                  <a:srgbClr val="FFFFFF"/>
+                </a:solidFill>
+                <a:latin typeface="Calibri"/>
+              </a:rPr>
+              <a:t>Survival Analysis</a:t>
+            </a:r>
+          </a:p>
+        </p:txBody>
+      </p:sp>
+      <p:sp>
+        <p:nvSpPr>
+          <p:cNvPr id="13" name="Rounded Rectangle 12"/>
+          <p:cNvSpPr/>
+          <p:nvPr/>
+        </p:nvSpPr>
+        <p:spPr>
+          <a:xfrm>
+            <a:off x="4434840" y="4297680"/>
+            <a:ext cx="3383280" cy="1051560"/>
+          </a:xfrm>
+          <a:prstGeom prst="roundRect">
+            <a:avLst/>
+          </a:prstGeom>
+          <a:solidFill>
+            <a:srgbClr val="B3001F"/>
+          </a:solidFill>
+          <a:ln>
+            <a:noFill/>
+          </a:ln>
+          <a:effectLst/>
+        </p:spPr>
+        <p:style>
+          <a:lnRef idx="1">
+            <a:schemeClr val="accent1"/>
+          </a:lnRef>
+          <a:fillRef idx="3">
+            <a:schemeClr val="accent1"/>
+          </a:fillRef>
+          <a:effectRef idx="2">
+            <a:schemeClr val="accent1"/>
+          </a:effectRef>
+          <a:fontRef idx="minor">
+            <a:schemeClr val="lt1"/>
+          </a:fontRef>
+        </p:style>
+        <p:txBody>
+          <a:bodyPr rtlCol="0" anchor="ctr" wrap="square"/>
+          <a:lstStyle/>
+          <a:p>
+            <a:pPr algn="ctr"/>
+            <a:r>
+              <a:rPr sz="1500" b="1" i="0">
+                <a:solidFill>
+                  <a:srgbClr val="FFFFFF"/>
+                </a:solidFill>
+                <a:latin typeface="Calibri"/>
+              </a:rPr>
+              <a:t>8. </a:t>
+            </a:r>
+            <a:r>
+              <a:rPr sz="1500" b="1" i="0">
+                <a:solidFill>
+                  <a:srgbClr val="FFFFFF"/>
+                </a:solidFill>
+                <a:latin typeface="Calibri"/>
+              </a:rPr>
+              <a:t>Graph Feature</a:t>
+            </a:r>
+          </a:p>
+        </p:txBody>
+      </p:sp>
+      <p:sp>
+        <p:nvSpPr>
+          <p:cNvPr id="14" name="Rounded Rectangle 13"/>
+          <p:cNvSpPr/>
+          <p:nvPr/>
+        </p:nvSpPr>
+        <p:spPr>
+          <a:xfrm>
+            <a:off x="8092440" y="4297680"/>
+            <a:ext cx="3383280" cy="1051560"/>
+          </a:xfrm>
+          <a:prstGeom prst="roundRect">
+            <a:avLst/>
+          </a:prstGeom>
+          <a:solidFill>
+            <a:srgbClr val="0B2447"/>
+          </a:solidFill>
+          <a:ln>
+            <a:noFill/>
+          </a:ln>
+          <a:effectLst/>
+        </p:spPr>
+        <p:style>
+          <a:lnRef idx="1">
+            <a:schemeClr val="accent1"/>
+          </a:lnRef>
+          <a:fillRef idx="3">
+            <a:schemeClr val="accent1"/>
+          </a:fillRef>
+          <a:effectRef idx="2">
+            <a:schemeClr val="accent1"/>
+          </a:effectRef>
+          <a:fontRef idx="minor">
+            <a:schemeClr val="lt1"/>
+          </a:fontRef>
+        </p:style>
+        <p:txBody>
+          <a:bodyPr rtlCol="0" anchor="ctr" wrap="square"/>
+          <a:lstStyle/>
+          <a:p>
+            <a:pPr algn="ctr"/>
+            <a:r>
+              <a:rPr sz="1500" b="1" i="0">
+                <a:solidFill>
+                  <a:srgbClr val="FFFFFF"/>
+                </a:solidFill>
+                <a:latin typeface="Calibri"/>
+              </a:rPr>
+              <a:t>9. </a:t>
+            </a:r>
+            <a:r>
+              <a:rPr sz="1500" b="1" i="0">
+                <a:solidFill>
+                  <a:srgbClr val="FFFFFF"/>
+                </a:solidFill>
+                <a:latin typeface="Calibri"/>
+              </a:rPr>
+              <a:t>Dashboard</a:t>
+            </a:r>
+          </a:p>
+        </p:txBody>
+      </p:sp>
+      <p:sp>
+        <p:nvSpPr>
+          <p:cNvPr id="15" name="TextBox 14"/>
           <p:cNvSpPr txBox="1"/>
           <p:nvPr/>
         </p:nvSpPr>
         <p:spPr>
           <a:xfrm>
-            <a:off x="640080" y="5989320"/>
+            <a:off x="640080" y="6400800"/>
             <a:ext cx="10881360" cy="365760"/>
           </a:xfrm>
           <a:prstGeom prst="rect">
@@ -7843,14 +10532,14 @@
                 </a:solidFill>
                 <a:latin typeface="Calibri"/>
               </a:rPr>
-              <a:t>5,000 customers × 18 months. stable (55%) / gradual (20%) / sudden (10%) / seasonal_false_positive (15%, deliberately NOT deterioration).</a:t>
-            </a:r>
-          </a:p>
-        </p:txBody>
-      </p:sp>
-      <p:sp>
-        <p:nvSpPr>
-          <p:cNvPr id="8" name="TextBox 7"/>
+              <a:t>Every stage reads/writes through src/config.py's file paths — a real data source swaps in at ONE seam, nothing downstream rebuilds.</a:t>
+            </a:r>
+          </a:p>
+        </p:txBody>
+      </p:sp>
+      <p:sp>
+        <p:nvSpPr>
+          <p:cNvPr id="16" name="TextBox 15"/>
           <p:cNvSpPr txBox="1"/>
           <p:nvPr/>
         </p:nvSpPr>
@@ -7884,7 +10573,7 @@
       </p:sp>
       <p:sp>
         <p:nvSpPr>
-          <p:cNvPr id="9" name="TextBox 8"/>
+          <p:cNvPr id="17" name="TextBox 16"/>
           <p:cNvSpPr txBox="1"/>
           <p:nvPr/>
         </p:nvSpPr>
@@ -7994,7 +10683,7 @@
             <a:avLst/>
           </a:prstGeom>
           <a:solidFill>
-            <a:srgbClr val="0F172A"/>
+            <a:srgbClr val="0B2447"/>
           </a:solidFill>
           <a:ln>
             <a:noFill/>
@@ -8038,7 +10727,7 @@
             <a:avLst/>
           </a:prstGeom>
           <a:solidFill>
-            <a:srgbClr val="EA580C"/>
+            <a:srgbClr val="E4002B"/>
           </a:solidFill>
           <a:ln>
             <a:noFill/>
@@ -8092,7 +10781,330 @@
             <a:r>
               <a:rPr sz="1200" b="1" i="0">
                 <a:solidFill>
-                  <a:srgbClr val="7DD3FC"/>
+                  <a:srgbClr val="FFC1CC"/>
+                </a:solidFill>
+                <a:latin typeface="Calibri"/>
+              </a:rPr>
+              <a:t>PHASE 1 — WITH HIDDEN GROUND TRUTH FOR VALIDATION</a:t>
+            </a:r>
+          </a:p>
+          <a:p>
+            <a:r>
+              <a:rPr sz="2600" b="1" i="0">
+                <a:solidFill>
+                  <a:srgbClr val="FFFFFF"/>
+                </a:solidFill>
+                <a:latin typeface="Calibri"/>
+              </a:rPr>
+              <a:t>Synthetic Data: 4 Planted Cohorts</a:t>
+            </a:r>
+          </a:p>
+        </p:txBody>
+      </p:sp>
+      <p:pic>
+        <p:nvPicPr>
+          <p:cNvPr id="6" name="Picture 5" descr="amb_trajectory_by_cohort.png"/>
+          <p:cNvPicPr>
+            <a:picLocks noChangeAspect="1"/>
+          </p:cNvPicPr>
+          <p:nvPr/>
+        </p:nvPicPr>
+        <p:blipFill>
+          <a:blip r:embed="rId2"/>
+          <a:stretch>
+            <a:fillRect/>
+          </a:stretch>
+        </p:blipFill>
+        <p:spPr>
+          <a:xfrm>
+            <a:off x="2285847" y="1280160"/>
+            <a:ext cx="7620000" cy="4572000"/>
+          </a:xfrm>
+          <a:prstGeom prst="rect">
+            <a:avLst/>
+          </a:prstGeom>
+        </p:spPr>
+      </p:pic>
+      <p:sp>
+        <p:nvSpPr>
+          <p:cNvPr id="7" name="TextBox 6"/>
+          <p:cNvSpPr txBox="1"/>
+          <p:nvPr/>
+        </p:nvSpPr>
+        <p:spPr>
+          <a:xfrm>
+            <a:off x="640080" y="5989320"/>
+            <a:ext cx="10881360" cy="365760"/>
+          </a:xfrm>
+          <a:prstGeom prst="rect">
+            <a:avLst/>
+          </a:prstGeom>
+          <a:noFill/>
+        </p:spPr>
+        <p:txBody>
+          <a:bodyPr wrap="none">
+            <a:spAutoFit/>
+          </a:bodyPr>
+          <a:lstStyle/>
+          <a:p>
+            <a:pPr algn="ctr"/>
+            <a:r>
+              <a:rPr sz="1100" b="0" i="1">
+                <a:solidFill>
+                  <a:srgbClr val="64748B"/>
+                </a:solidFill>
+                <a:latin typeface="Calibri"/>
+              </a:rPr>
+              <a:t>5,000 customers × 18 months. stable (55%) / gradual (20%) / sudden (10%) / seasonal_false_positive (15%, deliberately NOT deterioration).</a:t>
+            </a:r>
+          </a:p>
+        </p:txBody>
+      </p:sp>
+      <p:sp>
+        <p:nvSpPr>
+          <p:cNvPr id="8" name="TextBox 7"/>
+          <p:cNvSpPr txBox="1"/>
+          <p:nvPr/>
+        </p:nvSpPr>
+        <p:spPr>
+          <a:xfrm>
+            <a:off x="457200" y="6537960"/>
+            <a:ext cx="8229600" cy="274320"/>
+          </a:xfrm>
+          <a:prstGeom prst="rect">
+            <a:avLst/>
+          </a:prstGeom>
+          <a:noFill/>
+        </p:spPr>
+        <p:txBody>
+          <a:bodyPr wrap="none">
+            <a:spAutoFit/>
+          </a:bodyPr>
+          <a:lstStyle/>
+          <a:p>
+            <a:r>
+              <a:rPr sz="900" b="0" i="0">
+                <a:solidFill>
+                  <a:srgbClr val="64748B"/>
+                </a:solidFill>
+                <a:latin typeface="Calibri"/>
+              </a:rPr>
+              <a:t>CIB Early Warning System  •  Agastya Sharma  •  github.com/agastyasharma20/cib-ews</a:t>
+            </a:r>
+          </a:p>
+        </p:txBody>
+      </p:sp>
+      <p:sp>
+        <p:nvSpPr>
+          <p:cNvPr id="9" name="TextBox 8"/>
+          <p:cNvSpPr txBox="1"/>
+          <p:nvPr/>
+        </p:nvSpPr>
+        <p:spPr>
+          <a:xfrm>
+            <a:off x="11247120" y="6537960"/>
+            <a:ext cx="548640" cy="274320"/>
+          </a:xfrm>
+          <a:prstGeom prst="rect">
+            <a:avLst/>
+          </a:prstGeom>
+          <a:noFill/>
+        </p:spPr>
+        <p:txBody>
+          <a:bodyPr wrap="none">
+            <a:spAutoFit/>
+          </a:bodyPr>
+          <a:lstStyle/>
+          <a:p>
+            <a:pPr algn="r"/>
+            <a:r>
+              <a:rPr sz="900" b="0" i="0">
+                <a:solidFill>
+                  <a:srgbClr val="64748B"/>
+                </a:solidFill>
+                <a:latin typeface="Calibri"/>
+              </a:rPr>
+              <a:t>6</a:t>
+            </a:r>
+          </a:p>
+        </p:txBody>
+      </p:sp>
+    </p:spTree>
+  </p:cSld>
+  <p:clrMapOvr>
+    <a:masterClrMapping/>
+  </p:clrMapOvr>
+</p:sld>
+</file>
+
+<file path=ppt/slides/slide7.xml><?xml version="1.0" encoding="utf-8"?>
+<p:sld xmlns:a="http://schemas.openxmlformats.org/drawingml/2006/main" xmlns:p="http://schemas.openxmlformats.org/presentationml/2006/main" xmlns:r="http://schemas.openxmlformats.org/officeDocument/2006/relationships">
+  <p:cSld>
+    <p:spTree>
+      <p:nvGrpSpPr>
+        <p:cNvPr id="1" name=""/>
+        <p:cNvGrpSpPr/>
+        <p:nvPr/>
+      </p:nvGrpSpPr>
+      <p:grpSpPr/>
+      <p:sp>
+        <p:nvSpPr>
+          <p:cNvPr id="2" name="Rectangle 1"/>
+          <p:cNvSpPr/>
+          <p:nvPr/>
+        </p:nvSpPr>
+        <p:spPr>
+          <a:xfrm>
+            <a:off x="0" y="0"/>
+            <a:ext cx="12191695" cy="6858000"/>
+          </a:xfrm>
+          <a:prstGeom prst="rect">
+            <a:avLst/>
+          </a:prstGeom>
+          <a:solidFill>
+            <a:srgbClr val="FFFFFF"/>
+          </a:solidFill>
+          <a:ln>
+            <a:noFill/>
+          </a:ln>
+          <a:effectLst/>
+        </p:spPr>
+        <p:style>
+          <a:lnRef idx="1">
+            <a:schemeClr val="accent1"/>
+          </a:lnRef>
+          <a:fillRef idx="3">
+            <a:schemeClr val="accent1"/>
+          </a:fillRef>
+          <a:effectRef idx="2">
+            <a:schemeClr val="accent1"/>
+          </a:effectRef>
+          <a:fontRef idx="minor">
+            <a:schemeClr val="lt1"/>
+          </a:fontRef>
+        </p:style>
+        <p:txBody>
+          <a:bodyPr rtlCol="0" anchor="ctr"/>
+          <a:lstStyle/>
+          <a:p>
+            <a:pPr algn="ctr"/>
+          </a:p>
+        </p:txBody>
+      </p:sp>
+      <p:sp>
+        <p:nvSpPr>
+          <p:cNvPr id="3" name="Rectangle 2"/>
+          <p:cNvSpPr/>
+          <p:nvPr/>
+        </p:nvSpPr>
+        <p:spPr>
+          <a:xfrm>
+            <a:off x="0" y="0"/>
+            <a:ext cx="12191695" cy="1051560"/>
+          </a:xfrm>
+          <a:prstGeom prst="rect">
+            <a:avLst/>
+          </a:prstGeom>
+          <a:solidFill>
+            <a:srgbClr val="0B2447"/>
+          </a:solidFill>
+          <a:ln>
+            <a:noFill/>
+          </a:ln>
+          <a:effectLst/>
+        </p:spPr>
+        <p:style>
+          <a:lnRef idx="1">
+            <a:schemeClr val="accent1"/>
+          </a:lnRef>
+          <a:fillRef idx="3">
+            <a:schemeClr val="accent1"/>
+          </a:fillRef>
+          <a:effectRef idx="2">
+            <a:schemeClr val="accent1"/>
+          </a:effectRef>
+          <a:fontRef idx="minor">
+            <a:schemeClr val="lt1"/>
+          </a:fontRef>
+        </p:style>
+        <p:txBody>
+          <a:bodyPr rtlCol="0" anchor="ctr"/>
+          <a:lstStyle/>
+          <a:p>
+            <a:pPr algn="ctr"/>
+          </a:p>
+        </p:txBody>
+      </p:sp>
+      <p:sp>
+        <p:nvSpPr>
+          <p:cNvPr id="4" name="Rectangle 3"/>
+          <p:cNvSpPr/>
+          <p:nvPr/>
+        </p:nvSpPr>
+        <p:spPr>
+          <a:xfrm>
+            <a:off x="0" y="1051560"/>
+            <a:ext cx="12191695" cy="50800"/>
+          </a:xfrm>
+          <a:prstGeom prst="rect">
+            <a:avLst/>
+          </a:prstGeom>
+          <a:solidFill>
+            <a:srgbClr val="E4002B"/>
+          </a:solidFill>
+          <a:ln>
+            <a:noFill/>
+          </a:ln>
+          <a:effectLst/>
+        </p:spPr>
+        <p:style>
+          <a:lnRef idx="1">
+            <a:schemeClr val="accent1"/>
+          </a:lnRef>
+          <a:fillRef idx="3">
+            <a:schemeClr val="accent1"/>
+          </a:fillRef>
+          <a:effectRef idx="2">
+            <a:schemeClr val="accent1"/>
+          </a:effectRef>
+          <a:fontRef idx="minor">
+            <a:schemeClr val="lt1"/>
+          </a:fontRef>
+        </p:style>
+        <p:txBody>
+          <a:bodyPr rtlCol="0" anchor="ctr"/>
+          <a:lstStyle/>
+          <a:p>
+            <a:pPr algn="ctr"/>
+          </a:p>
+        </p:txBody>
+      </p:sp>
+      <p:sp>
+        <p:nvSpPr>
+          <p:cNvPr id="5" name="TextBox 4"/>
+          <p:cNvSpPr txBox="1"/>
+          <p:nvPr/>
+        </p:nvSpPr>
+        <p:spPr>
+          <a:xfrm>
+            <a:off x="457200" y="137160"/>
+            <a:ext cx="11247120" cy="822960"/>
+          </a:xfrm>
+          <a:prstGeom prst="rect">
+            <a:avLst/>
+          </a:prstGeom>
+          <a:noFill/>
+        </p:spPr>
+        <p:txBody>
+          <a:bodyPr wrap="square">
+            <a:spAutoFit/>
+          </a:bodyPr>
+          <a:lstStyle/>
+          <a:p>
+            <a:r>
+              <a:rPr sz="1200" b="1" i="0">
+                <a:solidFill>
+                  <a:srgbClr val="FFC1CC"/>
                 </a:solidFill>
                 <a:latin typeface="Calibri"/>
               </a:rPr>
@@ -8142,7 +11154,7 @@
             <a:r>
               <a:rPr sz="1700" b="0" i="0">
                 <a:solidFill>
-                  <a:srgbClr val="0F172A"/>
+                  <a:srgbClr val="0B2447"/>
                 </a:solidFill>
                 <a:latin typeface="Calibri"/>
               </a:rPr>
@@ -8158,7 +11170,7 @@
             <a:r>
               <a:rPr sz="1700" b="0" i="0">
                 <a:solidFill>
-                  <a:srgbClr val="0F172A"/>
+                  <a:srgbClr val="0B2447"/>
                 </a:solidFill>
                 <a:latin typeface="Calibri"/>
               </a:rPr>
@@ -8174,7 +11186,7 @@
             <a:r>
               <a:rPr sz="1700" b="0" i="0">
                 <a:solidFill>
-                  <a:srgbClr val="0F172A"/>
+                  <a:srgbClr val="0B2447"/>
                 </a:solidFill>
                 <a:latin typeface="Calibri"/>
               </a:rPr>
@@ -8225,7 +11237,7 @@
                   </a:txBody>
                   <a:tcPr>
                     <a:solidFill>
-                      <a:srgbClr val="0F172A"/>
+                      <a:srgbClr val="0B2447"/>
                     </a:solidFill>
                   </a:tcPr>
                 </a:tc>
@@ -8248,7 +11260,7 @@
                   </a:txBody>
                   <a:tcPr>
                     <a:solidFill>
-                      <a:srgbClr val="0F172A"/>
+                      <a:srgbClr val="0B2447"/>
                     </a:solidFill>
                   </a:tcPr>
                 </a:tc>
@@ -8262,7 +11274,7 @@
                       <a:r>
                         <a:rPr sz="1300" b="1" i="0">
                           <a:solidFill>
-                            <a:srgbClr val="0F172A"/>
+                            <a:srgbClr val="0B2447"/>
                           </a:solidFill>
                           <a:latin typeface="Calibri"/>
                         </a:rPr>
@@ -8284,7 +11296,7 @@
                       <a:r>
                         <a:rPr sz="1300" b="0" i="0">
                           <a:solidFill>
-                            <a:srgbClr val="0F172A"/>
+                            <a:srgbClr val="0B2447"/>
                           </a:solidFill>
                           <a:latin typeface="Calibri"/>
                         </a:rPr>
@@ -8308,7 +11320,7 @@
                       <a:r>
                         <a:rPr sz="1300" b="1" i="0">
                           <a:solidFill>
-                            <a:srgbClr val="0F172A"/>
+                            <a:srgbClr val="0B2447"/>
                           </a:solidFill>
                           <a:latin typeface="Calibri"/>
                         </a:rPr>
@@ -8330,7 +11342,7 @@
                       <a:r>
                         <a:rPr sz="1300" b="0" i="0">
                           <a:solidFill>
-                            <a:srgbClr val="0F172A"/>
+                            <a:srgbClr val="0B2447"/>
                           </a:solidFill>
                           <a:latin typeface="Calibri"/>
                         </a:rPr>
@@ -8354,7 +11366,7 @@
                       <a:r>
                         <a:rPr sz="1300" b="1" i="0">
                           <a:solidFill>
-                            <a:srgbClr val="0F172A"/>
+                            <a:srgbClr val="0B2447"/>
                           </a:solidFill>
                           <a:latin typeface="Calibri"/>
                         </a:rPr>
@@ -8376,7 +11388,7 @@
                       <a:r>
                         <a:rPr sz="1300" b="0" i="0">
                           <a:solidFill>
-                            <a:srgbClr val="0F172A"/>
+                            <a:srgbClr val="0B2447"/>
                           </a:solidFill>
                           <a:latin typeface="Calibri"/>
                         </a:rPr>
@@ -8400,7 +11412,7 @@
                       <a:r>
                         <a:rPr sz="1300" b="1" i="0">
                           <a:solidFill>
-                            <a:srgbClr val="0F172A"/>
+                            <a:srgbClr val="0B2447"/>
                           </a:solidFill>
                           <a:latin typeface="Calibri"/>
                         </a:rPr>
@@ -8422,7 +11434,7 @@
                       <a:r>
                         <a:rPr sz="1300" b="0" i="0">
                           <a:solidFill>
-                            <a:srgbClr val="0F172A"/>
+                            <a:srgbClr val="0B2447"/>
                           </a:solidFill>
                           <a:latin typeface="Calibri"/>
                         </a:rPr>
@@ -8471,7 +11483,7 @@
             <a:r>
               <a:rPr sz="1600" b="0" i="0">
                 <a:solidFill>
-                  <a:srgbClr val="0F172A"/>
+                  <a:srgbClr val="0B2447"/>
                 </a:solidFill>
                 <a:latin typeface="Calibri"/>
               </a:rPr>
@@ -8487,7 +11499,7 @@
             <a:r>
               <a:rPr sz="1600" b="0" i="0">
                 <a:solidFill>
-                  <a:srgbClr val="0F172A"/>
+                  <a:srgbClr val="0B2447"/>
                 </a:solidFill>
                 <a:latin typeface="Calibri"/>
               </a:rPr>
@@ -8560,7 +11572,7 @@
                 </a:solidFill>
                 <a:latin typeface="Calibri"/>
               </a:rPr>
-              <a:t>6</a:t>
+              <a:t>7</a:t>
             </a:r>
           </a:p>
         </p:txBody>
@@ -8573,7 +11585,7 @@
 </p:sld>
 </file>
 
-<file path=ppt/slides/slide7.xml><?xml version="1.0" encoding="utf-8"?>
+<file path=ppt/slides/slide8.xml><?xml version="1.0" encoding="utf-8"?>
 <p:sld xmlns:a="http://schemas.openxmlformats.org/drawingml/2006/main" xmlns:p="http://schemas.openxmlformats.org/presentationml/2006/main" xmlns:r="http://schemas.openxmlformats.org/officeDocument/2006/relationships">
   <p:cSld>
     <p:spTree>
@@ -8642,7 +11654,7 @@
             <a:avLst/>
           </a:prstGeom>
           <a:solidFill>
-            <a:srgbClr val="0F172A"/>
+            <a:srgbClr val="0B2447"/>
           </a:solidFill>
           <a:ln>
             <a:noFill/>
@@ -8686,7 +11698,7 @@
             <a:avLst/>
           </a:prstGeom>
           <a:solidFill>
-            <a:srgbClr val="EA580C"/>
+            <a:srgbClr val="E4002B"/>
           </a:solidFill>
           <a:ln>
             <a:noFill/>
@@ -8740,7 +11752,7 @@
             <a:r>
               <a:rPr sz="1200" b="1" i="0">
                 <a:solidFill>
-                  <a:srgbClr val="7DD3FC"/>
+                  <a:srgbClr val="FFC1CC"/>
                 </a:solidFill>
                 <a:latin typeface="Calibri"/>
               </a:rPr>
@@ -8803,7 +11815,7 @@
                   </a:txBody>
                   <a:tcPr>
                     <a:solidFill>
-                      <a:srgbClr val="0F172A"/>
+                      <a:srgbClr val="0B2447"/>
                     </a:solidFill>
                   </a:tcPr>
                 </a:tc>
@@ -8826,7 +11838,7 @@
                   </a:txBody>
                   <a:tcPr>
                     <a:solidFill>
-                      <a:srgbClr val="0F172A"/>
+                      <a:srgbClr val="0B2447"/>
                     </a:solidFill>
                   </a:tcPr>
                 </a:tc>
@@ -8849,7 +11861,7 @@
                   </a:txBody>
                   <a:tcPr>
                     <a:solidFill>
-                      <a:srgbClr val="0F172A"/>
+                      <a:srgbClr val="0B2447"/>
                     </a:solidFill>
                   </a:tcPr>
                 </a:tc>
@@ -8863,7 +11875,7 @@
                       <a:r>
                         <a:rPr sz="1500" b="1" i="0">
                           <a:solidFill>
-                            <a:srgbClr val="0F172A"/>
+                            <a:srgbClr val="0B2447"/>
                           </a:solidFill>
                           <a:latin typeface="Calibri"/>
                         </a:rPr>
@@ -8885,7 +11897,7 @@
                       <a:r>
                         <a:rPr sz="1500" b="0" i="0">
                           <a:solidFill>
-                            <a:srgbClr val="0F172A"/>
+                            <a:srgbClr val="0B2447"/>
                           </a:solidFill>
                           <a:latin typeface="Calibri"/>
                         </a:rPr>
@@ -8907,7 +11919,7 @@
                       <a:r>
                         <a:rPr sz="1500" b="0" i="0">
                           <a:solidFill>
-                            <a:srgbClr val="0F172A"/>
+                            <a:srgbClr val="0B2447"/>
                           </a:solidFill>
                           <a:latin typeface="Calibri"/>
                         </a:rPr>
@@ -8931,7 +11943,7 @@
                       <a:r>
                         <a:rPr sz="1500" b="1" i="0">
                           <a:solidFill>
-                            <a:srgbClr val="0F172A"/>
+                            <a:srgbClr val="0B2447"/>
                           </a:solidFill>
                           <a:latin typeface="Calibri"/>
                         </a:rPr>
@@ -8953,7 +11965,7 @@
                       <a:r>
                         <a:rPr sz="1500" b="0" i="0">
                           <a:solidFill>
-                            <a:srgbClr val="0F172A"/>
+                            <a:srgbClr val="0B2447"/>
                           </a:solidFill>
                           <a:latin typeface="Calibri"/>
                         </a:rPr>
@@ -8975,7 +11987,7 @@
                       <a:r>
                         <a:rPr sz="1500" b="0" i="0">
                           <a:solidFill>
-                            <a:srgbClr val="0F172A"/>
+                            <a:srgbClr val="0B2447"/>
                           </a:solidFill>
                           <a:latin typeface="Calibri"/>
                         </a:rPr>
@@ -8999,7 +12011,7 @@
                       <a:r>
                         <a:rPr sz="1500" b="1" i="0">
                           <a:solidFill>
-                            <a:srgbClr val="0F172A"/>
+                            <a:srgbClr val="0B2447"/>
                           </a:solidFill>
                           <a:latin typeface="Calibri"/>
                         </a:rPr>
@@ -9021,7 +12033,7 @@
                       <a:r>
                         <a:rPr sz="1500" b="0" i="0">
                           <a:solidFill>
-                            <a:srgbClr val="0F172A"/>
+                            <a:srgbClr val="0B2447"/>
                           </a:solidFill>
                           <a:latin typeface="Calibri"/>
                         </a:rPr>
@@ -9043,7 +12055,7 @@
                       <a:r>
                         <a:rPr sz="1500" b="0" i="0">
                           <a:solidFill>
-                            <a:srgbClr val="0F172A"/>
+                            <a:srgbClr val="0B2447"/>
                           </a:solidFill>
                           <a:latin typeface="Calibri"/>
                         </a:rPr>
@@ -9067,7 +12079,7 @@
                       <a:r>
                         <a:rPr sz="1500" b="1" i="0">
                           <a:solidFill>
-                            <a:srgbClr val="0F172A"/>
+                            <a:srgbClr val="0B2447"/>
                           </a:solidFill>
                           <a:latin typeface="Calibri"/>
                         </a:rPr>
@@ -9089,7 +12101,7 @@
                       <a:r>
                         <a:rPr sz="1500" b="0" i="0">
                           <a:solidFill>
-                            <a:srgbClr val="0F172A"/>
+                            <a:srgbClr val="0B2447"/>
                           </a:solidFill>
                           <a:latin typeface="Calibri"/>
                         </a:rPr>
@@ -9111,7 +12123,7 @@
                       <a:r>
                         <a:rPr sz="1500" b="0" i="0">
                           <a:solidFill>
-                            <a:srgbClr val="0F172A"/>
+                            <a:srgbClr val="0B2447"/>
                           </a:solidFill>
                           <a:latin typeface="Calibri"/>
                         </a:rPr>
@@ -9135,7 +12147,7 @@
                       <a:r>
                         <a:rPr sz="1500" b="1" i="0">
                           <a:solidFill>
-                            <a:srgbClr val="0F172A"/>
+                            <a:srgbClr val="0B2447"/>
                           </a:solidFill>
                           <a:latin typeface="Calibri"/>
                         </a:rPr>
@@ -9157,7 +12169,7 @@
                       <a:r>
                         <a:rPr sz="1500" b="0" i="0">
                           <a:solidFill>
-                            <a:srgbClr val="0F172A"/>
+                            <a:srgbClr val="0B2447"/>
                           </a:solidFill>
                           <a:latin typeface="Calibri"/>
                         </a:rPr>
@@ -9179,7 +12191,7 @@
                       <a:r>
                         <a:rPr sz="1500" b="0" i="0">
                           <a:solidFill>
-                            <a:srgbClr val="0F172A"/>
+                            <a:srgbClr val="0B2447"/>
                           </a:solidFill>
                           <a:latin typeface="Calibri"/>
                         </a:rPr>
@@ -9297,7 +12309,7 @@
                 </a:solidFill>
                 <a:latin typeface="Calibri"/>
               </a:rPr>
-              <a:t>7</a:t>
+              <a:t>8</a:t>
             </a:r>
           </a:p>
         </p:txBody>
@@ -9310,7 +12322,7 @@
 </p:sld>
 </file>
 
-<file path=ppt/slides/slide8.xml><?xml version="1.0" encoding="utf-8"?>
+<file path=ppt/slides/slide9.xml><?xml version="1.0" encoding="utf-8"?>
 <p:sld xmlns:a="http://schemas.openxmlformats.org/drawingml/2006/main" xmlns:p="http://schemas.openxmlformats.org/presentationml/2006/main" xmlns:r="http://schemas.openxmlformats.org/officeDocument/2006/relationships">
   <p:cSld>
     <p:spTree>
@@ -9379,7 +12391,7 @@
             <a:avLst/>
           </a:prstGeom>
           <a:solidFill>
-            <a:srgbClr val="0F172A"/>
+            <a:srgbClr val="0B2447"/>
           </a:solidFill>
           <a:ln>
             <a:noFill/>
@@ -9423,7 +12435,7 @@
             <a:avLst/>
           </a:prstGeom>
           <a:solidFill>
-            <a:srgbClr val="EA580C"/>
+            <a:srgbClr val="E4002B"/>
           </a:solidFill>
           <a:ln>
             <a:noFill/>
@@ -9477,7 +12489,7 @@
             <a:r>
               <a:rPr sz="1200" b="1" i="0">
                 <a:solidFill>
-                  <a:srgbClr val="7DD3FC"/>
+                  <a:srgbClr val="FFC1CC"/>
                 </a:solidFill>
                 <a:latin typeface="Calibri"/>
               </a:rPr>
@@ -9541,7 +12553,7 @@
                   </a:txBody>
                   <a:tcPr>
                     <a:solidFill>
-                      <a:srgbClr val="0F172A"/>
+                      <a:srgbClr val="0B2447"/>
                     </a:solidFill>
                   </a:tcPr>
                 </a:tc>
@@ -9564,7 +12576,7 @@
                   </a:txBody>
                   <a:tcPr>
                     <a:solidFill>
-                      <a:srgbClr val="0F172A"/>
+                      <a:srgbClr val="0B2447"/>
                     </a:solidFill>
                   </a:tcPr>
                 </a:tc>
@@ -9587,7 +12599,7 @@
                   </a:txBody>
                   <a:tcPr>
                     <a:solidFill>
-                      <a:srgbClr val="0F172A"/>
+                      <a:srgbClr val="0B2447"/>
                     </a:solidFill>
                   </a:tcPr>
                 </a:tc>
@@ -9610,7 +12622,7 @@
                   </a:txBody>
                   <a:tcPr>
                     <a:solidFill>
-                      <a:srgbClr val="0F172A"/>
+                      <a:srgbClr val="0B2447"/>
                     </a:solidFill>
                   </a:tcPr>
                 </a:tc>
@@ -9624,7 +12636,7 @@
                       <a:r>
                         <a:rPr sz="1600" b="1" i="0">
                           <a:solidFill>
-                            <a:srgbClr val="0F172A"/>
+                            <a:srgbClr val="0B2447"/>
                           </a:solidFill>
                           <a:latin typeface="Calibri"/>
                         </a:rPr>
@@ -9646,7 +12658,7 @@
                       <a:r>
                         <a:rPr sz="1600" b="0" i="0">
                           <a:solidFill>
-                            <a:srgbClr val="0F172A"/>
+                            <a:srgbClr val="0B2447"/>
                           </a:solidFill>
                           <a:latin typeface="Calibri"/>
                         </a:rPr>
@@ -9668,7 +12680,7 @@
                       <a:r>
                         <a:rPr sz="1600" b="0" i="0">
                           <a:solidFill>
-                            <a:srgbClr val="0F172A"/>
+                            <a:srgbClr val="0B2447"/>
                           </a:solidFill>
                           <a:latin typeface="Calibri"/>
                         </a:rPr>
@@ -9690,7 +12702,7 @@
                       <a:r>
                         <a:rPr sz="1600" b="0" i="0">
                           <a:solidFill>
-                            <a:srgbClr val="0F172A"/>
+                            <a:srgbClr val="0B2447"/>
                           </a:solidFill>
                           <a:latin typeface="Calibri"/>
                         </a:rPr>
@@ -9714,7 +12726,7 @@
                       <a:r>
                         <a:rPr sz="1600" b="1" i="0">
                           <a:solidFill>
-                            <a:srgbClr val="0F172A"/>
+                            <a:srgbClr val="0B2447"/>
                           </a:solidFill>
                           <a:latin typeface="Calibri"/>
                         </a:rPr>
@@ -9736,7 +12748,7 @@
                       <a:r>
                         <a:rPr sz="1600" b="0" i="0">
                           <a:solidFill>
-                            <a:srgbClr val="0F172A"/>
+                            <a:srgbClr val="0B2447"/>
                           </a:solidFill>
                           <a:latin typeface="Calibri"/>
                         </a:rPr>
@@ -9758,7 +12770,7 @@
                       <a:r>
                         <a:rPr sz="1600" b="0" i="0">
                           <a:solidFill>
-                            <a:srgbClr val="0F172A"/>
+                            <a:srgbClr val="0B2447"/>
                           </a:solidFill>
                           <a:latin typeface="Calibri"/>
                         </a:rPr>
@@ -9780,7 +12792,7 @@
                       <a:r>
                         <a:rPr sz="1600" b="0" i="0">
                           <a:solidFill>
-                            <a:srgbClr val="0F172A"/>
+                            <a:srgbClr val="0B2447"/>
                           </a:solidFill>
                           <a:latin typeface="Calibri"/>
                         </a:rPr>
@@ -9804,7 +12816,7 @@
                       <a:r>
                         <a:rPr sz="1600" b="1" i="0">
                           <a:solidFill>
-                            <a:srgbClr val="0F172A"/>
+                            <a:srgbClr val="0B2447"/>
                           </a:solidFill>
                           <a:latin typeface="Calibri"/>
                         </a:rPr>
@@ -9826,7 +12838,7 @@
                       <a:r>
                         <a:rPr sz="1600" b="0" i="0">
                           <a:solidFill>
-                            <a:srgbClr val="0F172A"/>
+                            <a:srgbClr val="0B2447"/>
                           </a:solidFill>
                           <a:latin typeface="Calibri"/>
                         </a:rPr>
@@ -9848,7 +12860,7 @@
                       <a:r>
                         <a:rPr sz="1600" b="0" i="0">
                           <a:solidFill>
-                            <a:srgbClr val="0F172A"/>
+                            <a:srgbClr val="0B2447"/>
                           </a:solidFill>
                           <a:latin typeface="Calibri"/>
                         </a:rPr>
@@ -9870,7 +12882,7 @@
                       <a:r>
                         <a:rPr sz="1600" b="0" i="0">
                           <a:solidFill>
-                            <a:srgbClr val="0F172A"/>
+                            <a:srgbClr val="0B2447"/>
                           </a:solidFill>
                           <a:latin typeface="Calibri"/>
                         </a:rPr>
@@ -9919,7 +12931,7 @@
             <a:r>
               <a:rPr sz="1600" b="0" i="0">
                 <a:solidFill>
-                  <a:srgbClr val="0F172A"/>
+                  <a:srgbClr val="0B2447"/>
                 </a:solidFill>
                 <a:latin typeface="Calibri"/>
               </a:rPr>
@@ -9935,7 +12947,7 @@
             <a:r>
               <a:rPr sz="1600" b="0" i="0">
                 <a:solidFill>
-                  <a:srgbClr val="0F172A"/>
+                  <a:srgbClr val="0B2447"/>
                 </a:solidFill>
                 <a:latin typeface="Calibri"/>
               </a:rPr>
@@ -10005,643 +13017,6 @@
       <p:sp>
         <p:nvSpPr>
           <p:cNvPr id="10" name="TextBox 9"/>
-          <p:cNvSpPr txBox="1"/>
-          <p:nvPr/>
-        </p:nvSpPr>
-        <p:spPr>
-          <a:xfrm>
-            <a:off x="11247120" y="6537960"/>
-            <a:ext cx="548640" cy="274320"/>
-          </a:xfrm>
-          <a:prstGeom prst="rect">
-            <a:avLst/>
-          </a:prstGeom>
-          <a:noFill/>
-        </p:spPr>
-        <p:txBody>
-          <a:bodyPr wrap="none">
-            <a:spAutoFit/>
-          </a:bodyPr>
-          <a:lstStyle/>
-          <a:p>
-            <a:pPr algn="r"/>
-            <a:r>
-              <a:rPr sz="900" b="0" i="0">
-                <a:solidFill>
-                  <a:srgbClr val="64748B"/>
-                </a:solidFill>
-                <a:latin typeface="Calibri"/>
-              </a:rPr>
-              <a:t>8</a:t>
-            </a:r>
-          </a:p>
-        </p:txBody>
-      </p:sp>
-    </p:spTree>
-  </p:cSld>
-  <p:clrMapOvr>
-    <a:masterClrMapping/>
-  </p:clrMapOvr>
-</p:sld>
-</file>
-
-<file path=ppt/slides/slide9.xml><?xml version="1.0" encoding="utf-8"?>
-<p:sld xmlns:a="http://schemas.openxmlformats.org/drawingml/2006/main" xmlns:p="http://schemas.openxmlformats.org/presentationml/2006/main" xmlns:r="http://schemas.openxmlformats.org/officeDocument/2006/relationships">
-  <p:cSld>
-    <p:spTree>
-      <p:nvGrpSpPr>
-        <p:cNvPr id="1" name=""/>
-        <p:cNvGrpSpPr/>
-        <p:nvPr/>
-      </p:nvGrpSpPr>
-      <p:grpSpPr/>
-      <p:sp>
-        <p:nvSpPr>
-          <p:cNvPr id="2" name="Rectangle 1"/>
-          <p:cNvSpPr/>
-          <p:nvPr/>
-        </p:nvSpPr>
-        <p:spPr>
-          <a:xfrm>
-            <a:off x="0" y="0"/>
-            <a:ext cx="12191695" cy="6858000"/>
-          </a:xfrm>
-          <a:prstGeom prst="rect">
-            <a:avLst/>
-          </a:prstGeom>
-          <a:solidFill>
-            <a:srgbClr val="FFFFFF"/>
-          </a:solidFill>
-          <a:ln>
-            <a:noFill/>
-          </a:ln>
-          <a:effectLst/>
-        </p:spPr>
-        <p:style>
-          <a:lnRef idx="1">
-            <a:schemeClr val="accent1"/>
-          </a:lnRef>
-          <a:fillRef idx="3">
-            <a:schemeClr val="accent1"/>
-          </a:fillRef>
-          <a:effectRef idx="2">
-            <a:schemeClr val="accent1"/>
-          </a:effectRef>
-          <a:fontRef idx="minor">
-            <a:schemeClr val="lt1"/>
-          </a:fontRef>
-        </p:style>
-        <p:txBody>
-          <a:bodyPr rtlCol="0" anchor="ctr"/>
-          <a:lstStyle/>
-          <a:p>
-            <a:pPr algn="ctr"/>
-          </a:p>
-        </p:txBody>
-      </p:sp>
-      <p:sp>
-        <p:nvSpPr>
-          <p:cNvPr id="3" name="Rectangle 2"/>
-          <p:cNvSpPr/>
-          <p:nvPr/>
-        </p:nvSpPr>
-        <p:spPr>
-          <a:xfrm>
-            <a:off x="0" y="0"/>
-            <a:ext cx="12191695" cy="1051560"/>
-          </a:xfrm>
-          <a:prstGeom prst="rect">
-            <a:avLst/>
-          </a:prstGeom>
-          <a:solidFill>
-            <a:srgbClr val="0F172A"/>
-          </a:solidFill>
-          <a:ln>
-            <a:noFill/>
-          </a:ln>
-          <a:effectLst/>
-        </p:spPr>
-        <p:style>
-          <a:lnRef idx="1">
-            <a:schemeClr val="accent1"/>
-          </a:lnRef>
-          <a:fillRef idx="3">
-            <a:schemeClr val="accent1"/>
-          </a:fillRef>
-          <a:effectRef idx="2">
-            <a:schemeClr val="accent1"/>
-          </a:effectRef>
-          <a:fontRef idx="minor">
-            <a:schemeClr val="lt1"/>
-          </a:fontRef>
-        </p:style>
-        <p:txBody>
-          <a:bodyPr rtlCol="0" anchor="ctr"/>
-          <a:lstStyle/>
-          <a:p>
-            <a:pPr algn="ctr"/>
-          </a:p>
-        </p:txBody>
-      </p:sp>
-      <p:sp>
-        <p:nvSpPr>
-          <p:cNvPr id="4" name="Rectangle 3"/>
-          <p:cNvSpPr/>
-          <p:nvPr/>
-        </p:nvSpPr>
-        <p:spPr>
-          <a:xfrm>
-            <a:off x="0" y="1051560"/>
-            <a:ext cx="12191695" cy="50800"/>
-          </a:xfrm>
-          <a:prstGeom prst="rect">
-            <a:avLst/>
-          </a:prstGeom>
-          <a:solidFill>
-            <a:srgbClr val="EA580C"/>
-          </a:solidFill>
-          <a:ln>
-            <a:noFill/>
-          </a:ln>
-          <a:effectLst/>
-        </p:spPr>
-        <p:style>
-          <a:lnRef idx="1">
-            <a:schemeClr val="accent1"/>
-          </a:lnRef>
-          <a:fillRef idx="3">
-            <a:schemeClr val="accent1"/>
-          </a:fillRef>
-          <a:effectRef idx="2">
-            <a:schemeClr val="accent1"/>
-          </a:effectRef>
-          <a:fontRef idx="minor">
-            <a:schemeClr val="lt1"/>
-          </a:fontRef>
-        </p:style>
-        <p:txBody>
-          <a:bodyPr rtlCol="0" anchor="ctr"/>
-          <a:lstStyle/>
-          <a:p>
-            <a:pPr algn="ctr"/>
-          </a:p>
-        </p:txBody>
-      </p:sp>
-      <p:sp>
-        <p:nvSpPr>
-          <p:cNvPr id="5" name="TextBox 4"/>
-          <p:cNvSpPr txBox="1"/>
-          <p:nvPr/>
-        </p:nvSpPr>
-        <p:spPr>
-          <a:xfrm>
-            <a:off x="457200" y="137160"/>
-            <a:ext cx="11247120" cy="822960"/>
-          </a:xfrm>
-          <a:prstGeom prst="rect">
-            <a:avLst/>
-          </a:prstGeom>
-          <a:noFill/>
-        </p:spPr>
-        <p:txBody>
-          <a:bodyPr wrap="square">
-            <a:spAutoFit/>
-          </a:bodyPr>
-          <a:lstStyle/>
-          <a:p>
-            <a:r>
-              <a:rPr sz="1200" b="1" i="0">
-                <a:solidFill>
-                  <a:srgbClr val="7DD3FC"/>
-                </a:solidFill>
-                <a:latin typeface="Calibri"/>
-              </a:rPr>
-              <a:t>PHASE 5 — FROM A SCORE TO A STORY</a:t>
-            </a:r>
-          </a:p>
-          <a:p>
-            <a:r>
-              <a:rPr sz="2600" b="1" i="0">
-                <a:solidFill>
-                  <a:srgbClr val="FFFFFF"/>
-                </a:solidFill>
-                <a:latin typeface="Calibri"/>
-              </a:rPr>
-              <a:t>Explainability — SHAP Reason Codes</a:t>
-            </a:r>
-          </a:p>
-        </p:txBody>
-      </p:sp>
-      <p:sp>
-        <p:nvSpPr>
-          <p:cNvPr id="6" name="TextBox 5"/>
-          <p:cNvSpPr txBox="1"/>
-          <p:nvPr/>
-        </p:nvSpPr>
-        <p:spPr>
-          <a:xfrm>
-            <a:off x="640080" y="1371600"/>
-            <a:ext cx="10881360" cy="2011680"/>
-          </a:xfrm>
-          <a:prstGeom prst="rect">
-            <a:avLst/>
-          </a:prstGeom>
-          <a:noFill/>
-        </p:spPr>
-        <p:txBody>
-          <a:bodyPr wrap="square">
-            <a:spAutoFit/>
-          </a:bodyPr>
-          <a:lstStyle/>
-          <a:p>
-            <a:pPr>
-              <a:spcBef>
-                <a:spcPts val="1000"/>
-              </a:spcBef>
-            </a:pPr>
-            <a:r>
-              <a:rPr sz="1700" b="0" i="0">
-                <a:solidFill>
-                  <a:srgbClr val="0F172A"/>
-                </a:solidFill>
-                <a:latin typeface="Calibri"/>
-              </a:rPr>
-              <a:t>•  SHAP TreeExplainer computes PER-CUSTOMER attributions — not just global feature importance</a:t>
-            </a:r>
-          </a:p>
-          <a:p>
-            <a:pPr>
-              <a:spcBef>
-                <a:spcPts val="1000"/>
-              </a:spcBef>
-            </a:pPr>
-            <a:r>
-              <a:rPr sz="1700" b="0" i="0">
-                <a:solidFill>
-                  <a:srgbClr val="0F172A"/>
-                </a:solidFill>
-                <a:latin typeface="Calibri"/>
-              </a:rPr>
-              <a:t>•  Raw features grouped into plain-language driver labels BEFORE ranking (3 distinct stories, not 1 story 3 times)</a:t>
-            </a:r>
-          </a:p>
-          <a:p>
-            <a:pPr>
-              <a:spcBef>
-                <a:spcPts val="1000"/>
-              </a:spcBef>
-            </a:pPr>
-            <a:r>
-              <a:rPr sz="1700" b="0" i="0">
-                <a:solidFill>
-                  <a:srgbClr val="0F172A"/>
-                </a:solidFill>
-                <a:latin typeface="Calibri"/>
-              </a:rPr>
-              <a:t>•  Ranked by signed SHAP sum, not magnitude — a protective factor never crowds out the actual risk drivers</a:t>
-            </a:r>
-          </a:p>
-        </p:txBody>
-      </p:sp>
-      <p:graphicFrame>
-        <p:nvGraphicFramePr>
-          <p:cNvPr id="7" name="Table 6"/>
-          <p:cNvGraphicFramePr>
-            <a:graphicFrameLocks noGrp="1"/>
-          </p:cNvGraphicFramePr>
-          <p:nvPr/>
-        </p:nvGraphicFramePr>
-        <p:xfrm>
-          <a:off x="640080" y="3566160"/>
-          <a:ext cx="10881360" cy="1828800"/>
-        </p:xfrm>
-        <a:graphic>
-          <a:graphicData uri="http://schemas.openxmlformats.org/drawingml/2006/table">
-            <a:tbl>
-              <a:tblPr firstRow="1" bandRow="1">
-                <a:tableStyleId>{5C22544A-7EE6-4342-B048-85BDC9FD1C3A}</a:tableStyleId>
-              </a:tblPr>
-              <a:tblGrid>
-                <a:gridCol w="1188720"/>
-                <a:gridCol w="1188720"/>
-                <a:gridCol w="8503920"/>
-              </a:tblGrid>
-              <a:tr h="457200">
-                <a:tc>
-                  <a:txBody>
-                    <a:bodyPr/>
-                    <a:lstStyle/>
-                    <a:p>
-                      <a:pPr algn="l"/>
-                      <a:r>
-                        <a:rPr sz="1400" b="1" i="0">
-                          <a:solidFill>
-                            <a:srgbClr val="FFFFFF"/>
-                          </a:solidFill>
-                          <a:latin typeface="Calibri"/>
-                        </a:rPr>
-                        <a:t>Risk</a:t>
-                      </a:r>
-                    </a:p>
-                  </a:txBody>
-                  <a:tcPr>
-                    <a:solidFill>
-                      <a:srgbClr val="0F172A"/>
-                    </a:solidFill>
-                  </a:tcPr>
-                </a:tc>
-                <a:tc>
-                  <a:txBody>
-                    <a:bodyPr/>
-                    <a:lstStyle/>
-                    <a:p>
-                      <a:pPr algn="l"/>
-                      <a:r>
-                        <a:rPr sz="1400" b="1" i="0">
-                          <a:solidFill>
-                            <a:srgbClr val="FFFFFF"/>
-                          </a:solidFill>
-                          <a:latin typeface="Calibri"/>
-                        </a:rPr>
-                        <a:t>90d score</a:t>
-                      </a:r>
-                    </a:p>
-                  </a:txBody>
-                  <a:tcPr>
-                    <a:solidFill>
-                      <a:srgbClr val="0F172A"/>
-                    </a:solidFill>
-                  </a:tcPr>
-                </a:tc>
-                <a:tc>
-                  <a:txBody>
-                    <a:bodyPr/>
-                    <a:lstStyle/>
-                    <a:p>
-                      <a:pPr algn="l"/>
-                      <a:r>
-                        <a:rPr sz="1400" b="1" i="0">
-                          <a:solidFill>
-                            <a:srgbClr val="FFFFFF"/>
-                          </a:solidFill>
-                          <a:latin typeface="Calibri"/>
-                        </a:rPr>
-                        <a:t>Top 3 reason codes</a:t>
-                      </a:r>
-                    </a:p>
-                  </a:txBody>
-                  <a:tcPr>
-                    <a:solidFill>
-                      <a:srgbClr val="0F172A"/>
-                    </a:solidFill>
-                  </a:tcPr>
-                </a:tc>
-              </a:tr>
-              <a:tr h="457200">
-                <a:tc>
-                  <a:txBody>
-                    <a:bodyPr/>
-                    <a:lstStyle/>
-                    <a:p>
-                      <a:r>
-                        <a:rPr sz="1400" b="1" i="0">
-                          <a:solidFill>
-                            <a:srgbClr val="0F172A"/>
-                          </a:solidFill>
-                          <a:latin typeface="Calibri"/>
-                        </a:rPr>
-                        <a:t>High</a:t>
-                      </a:r>
-                    </a:p>
-                  </a:txBody>
-                  <a:tcPr>
-                    <a:solidFill>
-                      <a:srgbClr val="FFFFFF"/>
-                    </a:solidFill>
-                  </a:tcPr>
-                </a:tc>
-                <a:tc>
-                  <a:txBody>
-                    <a:bodyPr/>
-                    <a:lstStyle/>
-                    <a:p>
-                      <a:r>
-                        <a:rPr sz="1400" b="0" i="0">
-                          <a:solidFill>
-                            <a:srgbClr val="0F172A"/>
-                          </a:solidFill>
-                          <a:latin typeface="Calibri"/>
-                        </a:rPr>
-                        <a:t>1.00</a:t>
-                      </a:r>
-                    </a:p>
-                  </a:txBody>
-                  <a:tcPr>
-                    <a:solidFill>
-                      <a:srgbClr val="FFFFFF"/>
-                    </a:solidFill>
-                  </a:tcPr>
-                </a:tc>
-                <a:tc>
-                  <a:txBody>
-                    <a:bodyPr/>
-                    <a:lstStyle/>
-                    <a:p>
-                      <a:r>
-                        <a:rPr sz="1400" b="0" i="0">
-                          <a:solidFill>
-                            <a:srgbClr val="0F172A"/>
-                          </a:solidFill>
-                          <a:latin typeface="Calibri"/>
-                        </a:rPr>
-                        <a:t>Falling balances → Lower digital activity → Reduced payroll activity</a:t>
-                      </a:r>
-                    </a:p>
-                  </a:txBody>
-                  <a:tcPr>
-                    <a:solidFill>
-                      <a:srgbClr val="FFFFFF"/>
-                    </a:solidFill>
-                  </a:tcPr>
-                </a:tc>
-              </a:tr>
-              <a:tr h="457200">
-                <a:tc>
-                  <a:txBody>
-                    <a:bodyPr/>
-                    <a:lstStyle/>
-                    <a:p>
-                      <a:r>
-                        <a:rPr sz="1400" b="1" i="0">
-                          <a:solidFill>
-                            <a:srgbClr val="0F172A"/>
-                          </a:solidFill>
-                          <a:latin typeface="Calibri"/>
-                        </a:rPr>
-                        <a:t>Medium</a:t>
-                      </a:r>
-                    </a:p>
-                  </a:txBody>
-                  <a:tcPr>
-                    <a:solidFill>
-                      <a:srgbClr val="F1F5F9"/>
-                    </a:solidFill>
-                  </a:tcPr>
-                </a:tc>
-                <a:tc>
-                  <a:txBody>
-                    <a:bodyPr/>
-                    <a:lstStyle/>
-                    <a:p>
-                      <a:r>
-                        <a:rPr sz="1400" b="0" i="0">
-                          <a:solidFill>
-                            <a:srgbClr val="0F172A"/>
-                          </a:solidFill>
-                          <a:latin typeface="Calibri"/>
-                        </a:rPr>
-                        <a:t>0.50</a:t>
-                      </a:r>
-                    </a:p>
-                  </a:txBody>
-                  <a:tcPr>
-                    <a:solidFill>
-                      <a:srgbClr val="F1F5F9"/>
-                    </a:solidFill>
-                  </a:tcPr>
-                </a:tc>
-                <a:tc>
-                  <a:txBody>
-                    <a:bodyPr/>
-                    <a:lstStyle/>
-                    <a:p>
-                      <a:r>
-                        <a:rPr sz="1400" b="0" i="0">
-                          <a:solidFill>
-                            <a:srgbClr val="0F172A"/>
-                          </a:solidFill>
-                          <a:latin typeface="Calibri"/>
-                        </a:rPr>
-                        <a:t>Declining credits → Concentrating counterparties → Declining transactions</a:t>
-                      </a:r>
-                    </a:p>
-                  </a:txBody>
-                  <a:tcPr>
-                    <a:solidFill>
-                      <a:srgbClr val="F1F5F9"/>
-                    </a:solidFill>
-                  </a:tcPr>
-                </a:tc>
-              </a:tr>
-              <a:tr h="457200">
-                <a:tc>
-                  <a:txBody>
-                    <a:bodyPr/>
-                    <a:lstStyle/>
-                    <a:p>
-                      <a:r>
-                        <a:rPr sz="1400" b="1" i="0">
-                          <a:solidFill>
-                            <a:srgbClr val="0F172A"/>
-                          </a:solidFill>
-                          <a:latin typeface="Calibri"/>
-                        </a:rPr>
-                        <a:t>Low</a:t>
-                      </a:r>
-                    </a:p>
-                  </a:txBody>
-                  <a:tcPr>
-                    <a:solidFill>
-                      <a:srgbClr val="FFFFFF"/>
-                    </a:solidFill>
-                  </a:tcPr>
-                </a:tc>
-                <a:tc>
-                  <a:txBody>
-                    <a:bodyPr/>
-                    <a:lstStyle/>
-                    <a:p>
-                      <a:r>
-                        <a:rPr sz="1400" b="0" i="0">
-                          <a:solidFill>
-                            <a:srgbClr val="0F172A"/>
-                          </a:solidFill>
-                          <a:latin typeface="Calibri"/>
-                        </a:rPr>
-                        <a:t>0.00</a:t>
-                      </a:r>
-                    </a:p>
-                  </a:txBody>
-                  <a:tcPr>
-                    <a:solidFill>
-                      <a:srgbClr val="FFFFFF"/>
-                    </a:solidFill>
-                  </a:tcPr>
-                </a:tc>
-                <a:tc>
-                  <a:txBody>
-                    <a:bodyPr/>
-                    <a:lstStyle/>
-                    <a:p>
-                      <a:r>
-                        <a:rPr sz="1400" b="0" i="0">
-                          <a:solidFill>
-                            <a:srgbClr val="0F172A"/>
-                          </a:solidFill>
-                          <a:latin typeface="Calibri"/>
-                        </a:rPr>
-                        <a:t>Narrowing product relationship → Rising complaints → Concentrating counterparties</a:t>
-                      </a:r>
-                    </a:p>
-                  </a:txBody>
-                  <a:tcPr>
-                    <a:solidFill>
-                      <a:srgbClr val="FFFFFF"/>
-                    </a:solidFill>
-                  </a:tcPr>
-                </a:tc>
-              </a:tr>
-            </a:tbl>
-          </a:graphicData>
-        </a:graphic>
-      </p:graphicFrame>
-      <p:sp>
-        <p:nvSpPr>
-          <p:cNvPr id="8" name="TextBox 7"/>
-          <p:cNvSpPr txBox="1"/>
-          <p:nvPr/>
-        </p:nvSpPr>
-        <p:spPr>
-          <a:xfrm>
-            <a:off x="457200" y="6537960"/>
-            <a:ext cx="8229600" cy="274320"/>
-          </a:xfrm>
-          <a:prstGeom prst="rect">
-            <a:avLst/>
-          </a:prstGeom>
-          <a:noFill/>
-        </p:spPr>
-        <p:txBody>
-          <a:bodyPr wrap="none">
-            <a:spAutoFit/>
-          </a:bodyPr>
-          <a:lstStyle/>
-          <a:p>
-            <a:r>
-              <a:rPr sz="900" b="0" i="0">
-                <a:solidFill>
-                  <a:srgbClr val="64748B"/>
-                </a:solidFill>
-                <a:latin typeface="Calibri"/>
-              </a:rPr>
-              <a:t>CIB Early Warning System  •  Agastya Sharma  •  github.com/agastyasharma20/cib-ews</a:t>
-            </a:r>
-          </a:p>
-        </p:txBody>
-      </p:sp>
-      <p:sp>
-        <p:nvSpPr>
-          <p:cNvPr id="9" name="TextBox 8"/>
           <p:cNvSpPr txBox="1"/>
           <p:nvPr/>
         </p:nvSpPr>
@@ -11000,4 +13375,324 @@
   </a:objectDefaults>
   <a:extraClrSchemeLst/>
 </a:theme>
+</file>
+
+<file path=ppt/theme/theme2.xml><?xml version="1.0" encoding="utf-8"?>
+<a:theme xmlns:a="http://schemas.openxmlformats.org/drawingml/2006/main" name="Office Theme">
+  <a:themeElements>
+    <a:clrScheme name="Office">
+      <a:dk1>
+        <a:sysClr val="windowText" lastClr="000000"/>
+      </a:dk1>
+      <a:lt1>
+        <a:sysClr val="window" lastClr="FFFFFF"/>
+      </a:lt1>
+      <a:dk2>
+        <a:srgbClr val="1F497D"/>
+      </a:dk2>
+      <a:lt2>
+        <a:srgbClr val="EEECE1"/>
+      </a:lt2>
+      <a:accent1>
+        <a:srgbClr val="4F81BD"/>
+      </a:accent1>
+      <a:accent2>
+        <a:srgbClr val="C0504D"/>
+      </a:accent2>
+      <a:accent3>
+        <a:srgbClr val="9BBB59"/>
+      </a:accent3>
+      <a:accent4>
+        <a:srgbClr val="8064A2"/>
+      </a:accent4>
+      <a:accent5>
+        <a:srgbClr val="4BACC6"/>
+      </a:accent5>
+      <a:accent6>
+        <a:srgbClr val="F79646"/>
+      </a:accent6>
+      <a:hlink>
+        <a:srgbClr val="0000FF"/>
+      </a:hlink>
+      <a:folHlink>
+        <a:srgbClr val="800080"/>
+      </a:folHlink>
+    </a:clrScheme>
+    <a:fontScheme name="Office">
+      <a:majorFont>
+        <a:latin typeface="Calibri"/>
+        <a:ea typeface=""/>
+        <a:cs typeface=""/>
+        <a:font script="Jpan" typeface="ＭＳ Ｐゴシック"/>
+        <a:font script="Hang" typeface="맑은 고딕"/>
+        <a:font script="Hans" typeface="宋体"/>
+        <a:font script="Hant" typeface="新細明體"/>
+        <a:font script="Arab" typeface="Times New Roman"/>
+        <a:font script="Hebr" typeface="Times New Roman"/>
+        <a:font script="Thai" typeface="Angsana New"/>
+        <a:font script="Ethi" typeface="Nyala"/>
+        <a:font script="Beng" typeface="Vrinda"/>
+        <a:font script="Gujr" typeface="Shruti"/>
+        <a:font script="Khmr" typeface="MoolBoran"/>
+        <a:font script="Knda" typeface="Tunga"/>
+        <a:font script="Guru" typeface="Raavi"/>
+        <a:font script="Cans" typeface="Euphemia"/>
+        <a:font script="Cher" typeface="Plantagenet Cherokee"/>
+        <a:font script="Yiii" typeface="Microsoft Yi Baiti"/>
+        <a:font script="Tibt" typeface="Microsoft Himalaya"/>
+        <a:font script="Thaa" typeface="MV Boli"/>
+        <a:font script="Deva" typeface="Mangal"/>
+        <a:font script="Telu" typeface="Gautami"/>
+        <a:font script="Taml" typeface="Latha"/>
+        <a:font script="Syrc" typeface="Estrangelo Edessa"/>
+        <a:font script="Orya" typeface="Kalinga"/>
+        <a:font script="Mlym" typeface="Kartika"/>
+        <a:font script="Laoo" typeface="DokChampa"/>
+        <a:font script="Sinh" typeface="Iskoola Pota"/>
+        <a:font script="Mong" typeface="Mongolian Baiti"/>
+        <a:font script="Viet" typeface="Times New Roman"/>
+        <a:font script="Uigh" typeface="Microsoft Uighur"/>
+        <a:font script="Geor" typeface="Sylfaen"/>
+      </a:majorFont>
+      <a:minorFont>
+        <a:latin typeface="Calibri"/>
+        <a:ea typeface=""/>
+        <a:cs typeface=""/>
+        <a:font script="Jpan" typeface="ＭＳ Ｐゴシック"/>
+        <a:font script="Hang" typeface="맑은 고딕"/>
+        <a:font script="Hans" typeface="宋体"/>
+        <a:font script="Hant" typeface="新細明體"/>
+        <a:font script="Arab" typeface="Arial"/>
+        <a:font script="Hebr" typeface="Arial"/>
+        <a:font script="Thai" typeface="Cordia New"/>
+        <a:font script="Ethi" typeface="Nyala"/>
+        <a:font script="Beng" typeface="Vrinda"/>
+        <a:font script="Gujr" typeface="Shruti"/>
+        <a:font script="Khmr" typeface="DaunPenh"/>
+        <a:font script="Knda" typeface="Tunga"/>
+        <a:font script="Guru" typeface="Raavi"/>
+        <a:font script="Cans" typeface="Euphemia"/>
+        <a:font script="Cher" typeface="Plantagenet Cherokee"/>
+        <a:font script="Yiii" typeface="Microsoft Yi Baiti"/>
+        <a:font script="Tibt" typeface="Microsoft Himalaya"/>
+        <a:font script="Thaa" typeface="MV Boli"/>
+        <a:font script="Deva" typeface="Mangal"/>
+        <a:font script="Telu" typeface="Gautami"/>
+        <a:font script="Taml" typeface="Latha"/>
+        <a:font script="Syrc" typeface="Estrangelo Edessa"/>
+        <a:font script="Orya" typeface="Kalinga"/>
+        <a:font script="Mlym" typeface="Kartika"/>
+        <a:font script="Laoo" typeface="DokChampa"/>
+        <a:font script="Sinh" typeface="Iskoola Pota"/>
+        <a:font script="Mong" typeface="Mongolian Baiti"/>
+        <a:font script="Viet" typeface="Arial"/>
+        <a:font script="Uigh" typeface="Microsoft Uighur"/>
+        <a:font script="Geor" typeface="Sylfaen"/>
+      </a:minorFont>
+    </a:fontScheme>
+    <a:fmtScheme name="Office">
+      <a:fillStyleLst>
+        <a:solidFill>
+          <a:schemeClr val="phClr"/>
+        </a:solidFill>
+        <a:gradFill rotWithShape="1">
+          <a:gsLst>
+            <a:gs pos="0">
+              <a:schemeClr val="phClr">
+                <a:tint val="50000"/>
+                <a:satMod val="300000"/>
+              </a:schemeClr>
+            </a:gs>
+            <a:gs pos="35000">
+              <a:schemeClr val="phClr">
+                <a:tint val="37000"/>
+                <a:satMod val="300000"/>
+              </a:schemeClr>
+            </a:gs>
+            <a:gs pos="100000">
+              <a:schemeClr val="phClr">
+                <a:tint val="15000"/>
+                <a:satMod val="350000"/>
+              </a:schemeClr>
+            </a:gs>
+          </a:gsLst>
+          <a:lin ang="16200000" scaled="1"/>
+        </a:gradFill>
+        <a:gradFill rotWithShape="1">
+          <a:gsLst>
+            <a:gs pos="0">
+              <a:schemeClr val="phClr">
+                <a:tint val="100000"/>
+                <a:shade val="100000"/>
+                <a:satMod val="130000"/>
+              </a:schemeClr>
+            </a:gs>
+            <a:gs pos="100000">
+              <a:schemeClr val="phClr">
+                <a:tint val="50000"/>
+                <a:shade val="100000"/>
+                <a:satMod val="350000"/>
+              </a:schemeClr>
+            </a:gs>
+          </a:gsLst>
+          <a:lin ang="16200000" scaled="0"/>
+        </a:gradFill>
+      </a:fillStyleLst>
+      <a:lnStyleLst>
+        <a:ln w="9525" cap="flat" cmpd="sng" algn="ctr">
+          <a:solidFill>
+            <a:schemeClr val="phClr">
+              <a:shade val="95000"/>
+              <a:satMod val="105000"/>
+            </a:schemeClr>
+          </a:solidFill>
+          <a:prstDash val="solid"/>
+        </a:ln>
+        <a:ln w="25400" cap="flat" cmpd="sng" algn="ctr">
+          <a:solidFill>
+            <a:schemeClr val="phClr"/>
+          </a:solidFill>
+          <a:prstDash val="solid"/>
+        </a:ln>
+        <a:ln w="38100" cap="flat" cmpd="sng" algn="ctr">
+          <a:solidFill>
+            <a:schemeClr val="phClr"/>
+          </a:solidFill>
+          <a:prstDash val="solid"/>
+        </a:ln>
+      </a:lnStyleLst>
+      <a:effectStyleLst>
+        <a:effectStyle>
+          <a:effectLst>
+            <a:outerShdw blurRad="40000" dist="20000" dir="5400000" rotWithShape="0">
+              <a:srgbClr val="000000">
+                <a:alpha val="38000"/>
+              </a:srgbClr>
+            </a:outerShdw>
+          </a:effectLst>
+        </a:effectStyle>
+        <a:effectStyle>
+          <a:effectLst>
+            <a:outerShdw blurRad="40000" dist="23000" dir="5400000" rotWithShape="0">
+              <a:srgbClr val="000000">
+                <a:alpha val="35000"/>
+              </a:srgbClr>
+            </a:outerShdw>
+          </a:effectLst>
+        </a:effectStyle>
+        <a:effectStyle>
+          <a:effectLst>
+            <a:outerShdw blurRad="40000" dist="23000" dir="5400000" rotWithShape="0">
+              <a:srgbClr val="000000">
+                <a:alpha val="35000"/>
+              </a:srgbClr>
+            </a:outerShdw>
+          </a:effectLst>
+          <a:scene3d>
+            <a:camera prst="orthographicFront">
+              <a:rot lat="0" lon="0" rev="0"/>
+            </a:camera>
+            <a:lightRig rig="threePt" dir="t">
+              <a:rot lat="0" lon="0" rev="1200000"/>
+            </a:lightRig>
+          </a:scene3d>
+          <a:sp3d>
+            <a:bevelT w="63500" h="25400"/>
+          </a:sp3d>
+        </a:effectStyle>
+      </a:effectStyleLst>
+      <a:bgFillStyleLst>
+        <a:solidFill>
+          <a:schemeClr val="phClr"/>
+        </a:solidFill>
+        <a:gradFill rotWithShape="1">
+          <a:gsLst>
+            <a:gs pos="0">
+              <a:schemeClr val="phClr">
+                <a:tint val="40000"/>
+                <a:satMod val="350000"/>
+              </a:schemeClr>
+            </a:gs>
+            <a:gs pos="40000">
+              <a:schemeClr val="phClr">
+                <a:tint val="45000"/>
+                <a:shade val="99000"/>
+                <a:satMod val="350000"/>
+              </a:schemeClr>
+            </a:gs>
+            <a:gs pos="100000">
+              <a:schemeClr val="phClr">
+                <a:shade val="20000"/>
+                <a:satMod val="255000"/>
+              </a:schemeClr>
+            </a:gs>
+          </a:gsLst>
+          <a:path path="circle">
+            <a:fillToRect l="50000" t="-80000" r="50000" b="180000"/>
+          </a:path>
+        </a:gradFill>
+        <a:gradFill rotWithShape="1">
+          <a:gsLst>
+            <a:gs pos="0">
+              <a:schemeClr val="phClr">
+                <a:tint val="80000"/>
+                <a:satMod val="300000"/>
+              </a:schemeClr>
+            </a:gs>
+            <a:gs pos="100000">
+              <a:schemeClr val="phClr">
+                <a:shade val="30000"/>
+                <a:satMod val="200000"/>
+              </a:schemeClr>
+            </a:gs>
+          </a:gsLst>
+          <a:path path="circle">
+            <a:fillToRect l="50000" t="50000" r="50000" b="50000"/>
+          </a:path>
+        </a:gradFill>
+      </a:bgFillStyleLst>
+    </a:fmtScheme>
+  </a:themeElements>
+  <a:objectDefaults>
+    <a:spDef>
+      <a:spPr/>
+      <a:bodyPr/>
+      <a:lstStyle/>
+      <a:style>
+        <a:lnRef idx="1">
+          <a:schemeClr val="accent1"/>
+        </a:lnRef>
+        <a:fillRef idx="3">
+          <a:schemeClr val="accent1"/>
+        </a:fillRef>
+        <a:effectRef idx="2">
+          <a:schemeClr val="accent1"/>
+        </a:effectRef>
+        <a:fontRef idx="minor">
+          <a:schemeClr val="lt1"/>
+        </a:fontRef>
+      </a:style>
+    </a:spDef>
+    <a:lnDef>
+      <a:spPr/>
+      <a:bodyPr/>
+      <a:lstStyle/>
+      <a:style>
+        <a:lnRef idx="2">
+          <a:schemeClr val="accent1"/>
+        </a:lnRef>
+        <a:fillRef idx="0">
+          <a:schemeClr val="accent1"/>
+        </a:fillRef>
+        <a:effectRef idx="1">
+          <a:schemeClr val="accent1"/>
+        </a:effectRef>
+        <a:fontRef idx="minor">
+          <a:schemeClr val="tx1"/>
+        </a:fontRef>
+      </a:style>
+    </a:lnDef>
+  </a:objectDefaults>
+  <a:extraClrSchemeLst/>
+</a:theme>
 </file>